--- a/Daiane Bolzan - Fase 1 - DevOps na Prática.pptx
+++ b/Daiane Bolzan - Fase 1 - DevOps na Prática.pptx
@@ -5,24 +5,33 @@
     <p:sldMasterId id="2147483665" r:id="rId4"/>
   </p:sldMasterIdLst>
   <p:notesMasterIdLst>
-    <p:notesMasterId r:id="rId17"/>
+    <p:notesMasterId r:id="rId26"/>
   </p:notesMasterIdLst>
   <p:handoutMasterIdLst>
-    <p:handoutMasterId r:id="rId18"/>
+    <p:handoutMasterId r:id="rId27"/>
   </p:handoutMasterIdLst>
   <p:sldIdLst>
     <p:sldId id="288" r:id="rId5"/>
     <p:sldId id="325" r:id="rId6"/>
     <p:sldId id="301" r:id="rId7"/>
     <p:sldId id="302" r:id="rId8"/>
-    <p:sldId id="326" r:id="rId9"/>
-    <p:sldId id="327" r:id="rId10"/>
-    <p:sldId id="293" r:id="rId11"/>
-    <p:sldId id="304" r:id="rId12"/>
-    <p:sldId id="321" r:id="rId13"/>
-    <p:sldId id="323" r:id="rId14"/>
-    <p:sldId id="324" r:id="rId15"/>
-    <p:sldId id="300" r:id="rId16"/>
+    <p:sldId id="328" r:id="rId9"/>
+    <p:sldId id="329" r:id="rId10"/>
+    <p:sldId id="330" r:id="rId11"/>
+    <p:sldId id="331" r:id="rId12"/>
+    <p:sldId id="332" r:id="rId13"/>
+    <p:sldId id="333" r:id="rId14"/>
+    <p:sldId id="334" r:id="rId15"/>
+    <p:sldId id="326" r:id="rId16"/>
+    <p:sldId id="335" r:id="rId17"/>
+    <p:sldId id="336" r:id="rId18"/>
+    <p:sldId id="327" r:id="rId19"/>
+    <p:sldId id="293" r:id="rId20"/>
+    <p:sldId id="304" r:id="rId21"/>
+    <p:sldId id="321" r:id="rId22"/>
+    <p:sldId id="323" r:id="rId23"/>
+    <p:sldId id="324" r:id="rId24"/>
+    <p:sldId id="300" r:id="rId25"/>
   </p:sldIdLst>
   <p:sldSz cx="16402050" cy="9601200"/>
   <p:notesSz cx="6858000" cy="9144000"/>
@@ -130,7 +139,16 @@
             <p14:sldId id="325"/>
             <p14:sldId id="301"/>
             <p14:sldId id="302"/>
+            <p14:sldId id="328"/>
+            <p14:sldId id="329"/>
+            <p14:sldId id="330"/>
+            <p14:sldId id="331"/>
+            <p14:sldId id="332"/>
+            <p14:sldId id="333"/>
+            <p14:sldId id="334"/>
             <p14:sldId id="326"/>
+            <p14:sldId id="335"/>
+            <p14:sldId id="336"/>
             <p14:sldId id="327"/>
             <p14:sldId id="293"/>
             <p14:sldId id="304"/>
@@ -162,6 +180,452 @@
     </p:extLst>
   </p:cmAuthor>
 </p:cmAuthorLst>
+</file>
+
+<file path=ppt/revisionInfo.xml><?xml version="1.0" encoding="utf-8"?>
+<p1510:revInfo xmlns:a="http://schemas.openxmlformats.org/drawingml/2006/main" xmlns:r="http://schemas.openxmlformats.org/officeDocument/2006/relationships" xmlns:p1510="http://schemas.microsoft.com/office/powerpoint/2015/10/main">
+  <p1510:revLst>
+    <p1510:client id="{49D8B8B3-1BEA-4786-B464-266712C3C41F}" v="61" dt="2026-05-31T23:39:50.886"/>
+  </p1510:revLst>
+</p1510:revInfo>
+</file>
+
+<file path=ppt/changesInfos/changesInfo1.xml><?xml version="1.0" encoding="utf-8"?>
+<pc:chgInfo xmlns:a="http://schemas.openxmlformats.org/drawingml/2006/main" xmlns:r="http://schemas.openxmlformats.org/officeDocument/2006/relationships" xmlns:ac="http://schemas.microsoft.com/office/drawing/2013/main/command" xmlns:pc="http://schemas.microsoft.com/office/powerpoint/2013/main/command">
+  <pc:docChgLst>
+    <pc:chgData name="DAIANE DEPONTI BOLZAN" userId="56e15508-9627-43d3-b08d-53c2183e9f73" providerId="ADAL" clId="{05EFCEA0-A524-441A-BBCD-50F6F0056890}"/>
+    <pc:docChg chg="undo custSel addSld delSld modSld modSection">
+      <pc:chgData name="DAIANE DEPONTI BOLZAN" userId="56e15508-9627-43d3-b08d-53c2183e9f73" providerId="ADAL" clId="{05EFCEA0-A524-441A-BBCD-50F6F0056890}" dt="2026-05-31T23:39:50.886" v="656"/>
+      <pc:docMkLst>
+        <pc:docMk/>
+      </pc:docMkLst>
+      <pc:sldChg chg="modSp">
+        <pc:chgData name="DAIANE DEPONTI BOLZAN" userId="56e15508-9627-43d3-b08d-53c2183e9f73" providerId="ADAL" clId="{05EFCEA0-A524-441A-BBCD-50F6F0056890}" dt="2026-05-31T23:22:46.957" v="6"/>
+        <pc:sldMkLst>
+          <pc:docMk/>
+          <pc:sldMk cId="4066044570" sldId="302"/>
+        </pc:sldMkLst>
+        <pc:spChg chg="mod">
+          <ac:chgData name="DAIANE DEPONTI BOLZAN" userId="56e15508-9627-43d3-b08d-53c2183e9f73" providerId="ADAL" clId="{05EFCEA0-A524-441A-BBCD-50F6F0056890}" dt="2026-05-31T23:22:46.957" v="6"/>
+          <ac:spMkLst>
+            <pc:docMk/>
+            <pc:sldMk cId="4066044570" sldId="302"/>
+            <ac:spMk id="3" creationId="{486EC7D3-5A22-4E4C-A827-68C78786376B}"/>
+          </ac:spMkLst>
+        </pc:spChg>
+      </pc:sldChg>
+      <pc:sldChg chg="modSp mod">
+        <pc:chgData name="DAIANE DEPONTI BOLZAN" userId="56e15508-9627-43d3-b08d-53c2183e9f73" providerId="ADAL" clId="{05EFCEA0-A524-441A-BBCD-50F6F0056890}" dt="2026-05-31T23:21:12.527" v="1" actId="113"/>
+        <pc:sldMkLst>
+          <pc:docMk/>
+          <pc:sldMk cId="1260139504" sldId="304"/>
+        </pc:sldMkLst>
+        <pc:spChg chg="mod">
+          <ac:chgData name="DAIANE DEPONTI BOLZAN" userId="56e15508-9627-43d3-b08d-53c2183e9f73" providerId="ADAL" clId="{05EFCEA0-A524-441A-BBCD-50F6F0056890}" dt="2026-05-31T23:21:12.527" v="1" actId="113"/>
+          <ac:spMkLst>
+            <pc:docMk/>
+            <pc:sldMk cId="1260139504" sldId="304"/>
+            <ac:spMk id="2" creationId="{0796DCB6-D43A-4EB7-8614-1476A7E4B4E8}"/>
+          </ac:spMkLst>
+        </pc:spChg>
+      </pc:sldChg>
+      <pc:sldChg chg="addSp modSp mod">
+        <pc:chgData name="DAIANE DEPONTI BOLZAN" userId="56e15508-9627-43d3-b08d-53c2183e9f73" providerId="ADAL" clId="{05EFCEA0-A524-441A-BBCD-50F6F0056890}" dt="2026-05-31T23:21:51.342" v="4" actId="1076"/>
+        <pc:sldMkLst>
+          <pc:docMk/>
+          <pc:sldMk cId="3670702398" sldId="321"/>
+        </pc:sldMkLst>
+        <pc:picChg chg="add mod">
+          <ac:chgData name="DAIANE DEPONTI BOLZAN" userId="56e15508-9627-43d3-b08d-53c2183e9f73" providerId="ADAL" clId="{05EFCEA0-A524-441A-BBCD-50F6F0056890}" dt="2026-05-31T23:21:51.342" v="4" actId="1076"/>
+          <ac:picMkLst>
+            <pc:docMk/>
+            <pc:sldMk cId="3670702398" sldId="321"/>
+            <ac:picMk id="4" creationId="{171DE313-4A14-F9BB-DFCD-39077EFFF66A}"/>
+          </ac:picMkLst>
+        </pc:picChg>
+      </pc:sldChg>
+      <pc:sldChg chg="addSp delSp modSp mod">
+        <pc:chgData name="DAIANE DEPONTI BOLZAN" userId="56e15508-9627-43d3-b08d-53c2183e9f73" providerId="ADAL" clId="{05EFCEA0-A524-441A-BBCD-50F6F0056890}" dt="2026-05-31T23:36:22.240" v="617" actId="20577"/>
+        <pc:sldMkLst>
+          <pc:docMk/>
+          <pc:sldMk cId="600266859" sldId="326"/>
+        </pc:sldMkLst>
+        <pc:spChg chg="mod">
+          <ac:chgData name="DAIANE DEPONTI BOLZAN" userId="56e15508-9627-43d3-b08d-53c2183e9f73" providerId="ADAL" clId="{05EFCEA0-A524-441A-BBCD-50F6F0056890}" dt="2026-05-31T23:36:22.240" v="617" actId="20577"/>
+          <ac:spMkLst>
+            <pc:docMk/>
+            <pc:sldMk cId="600266859" sldId="326"/>
+            <ac:spMk id="3" creationId="{ED0C734D-B74A-49B4-81F9-B095FD7D62E3}"/>
+          </ac:spMkLst>
+        </pc:spChg>
+        <pc:graphicFrameChg chg="add del mod modGraphic">
+          <ac:chgData name="DAIANE DEPONTI BOLZAN" userId="56e15508-9627-43d3-b08d-53c2183e9f73" providerId="ADAL" clId="{05EFCEA0-A524-441A-BBCD-50F6F0056890}" dt="2026-05-31T23:34:44.910" v="218" actId="478"/>
+          <ac:graphicFrameMkLst>
+            <pc:docMk/>
+            <pc:sldMk cId="600266859" sldId="326"/>
+            <ac:graphicFrameMk id="2" creationId="{3EF8792B-71E7-D8D4-8F48-96F1B98ED4C4}"/>
+          </ac:graphicFrameMkLst>
+        </pc:graphicFrameChg>
+      </pc:sldChg>
+      <pc:sldChg chg="addSp modSp mod">
+        <pc:chgData name="DAIANE DEPONTI BOLZAN" userId="56e15508-9627-43d3-b08d-53c2183e9f73" providerId="ADAL" clId="{05EFCEA0-A524-441A-BBCD-50F6F0056890}" dt="2026-05-31T23:39:50.886" v="656"/>
+        <pc:sldMkLst>
+          <pc:docMk/>
+          <pc:sldMk cId="1375584897" sldId="327"/>
+        </pc:sldMkLst>
+        <pc:spChg chg="mod">
+          <ac:chgData name="DAIANE DEPONTI BOLZAN" userId="56e15508-9627-43d3-b08d-53c2183e9f73" providerId="ADAL" clId="{05EFCEA0-A524-441A-BBCD-50F6F0056890}" dt="2026-05-31T23:39:50.886" v="656"/>
+          <ac:spMkLst>
+            <pc:docMk/>
+            <pc:sldMk cId="1375584897" sldId="327"/>
+            <ac:spMk id="3" creationId="{B0123114-87BF-4523-A231-EA598A2BD858}"/>
+          </ac:spMkLst>
+        </pc:spChg>
+        <pc:graphicFrameChg chg="add mod modGraphic">
+          <ac:chgData name="DAIANE DEPONTI BOLZAN" userId="56e15508-9627-43d3-b08d-53c2183e9f73" providerId="ADAL" clId="{05EFCEA0-A524-441A-BBCD-50F6F0056890}" dt="2026-05-31T23:39:29.497" v="641" actId="1076"/>
+          <ac:graphicFrameMkLst>
+            <pc:docMk/>
+            <pc:sldMk cId="1375584897" sldId="327"/>
+            <ac:graphicFrameMk id="5" creationId="{74EA80A4-C754-8181-C466-FA354B867BA2}"/>
+          </ac:graphicFrameMkLst>
+        </pc:graphicFrameChg>
+        <pc:picChg chg="add mod">
+          <ac:chgData name="DAIANE DEPONTI BOLZAN" userId="56e15508-9627-43d3-b08d-53c2183e9f73" providerId="ADAL" clId="{05EFCEA0-A524-441A-BBCD-50F6F0056890}" dt="2026-05-31T23:39:34.793" v="643" actId="1076"/>
+          <ac:picMkLst>
+            <pc:docMk/>
+            <pc:sldMk cId="1375584897" sldId="327"/>
+            <ac:picMk id="4" creationId="{4962E595-E068-998E-18B9-0577732FBA8B}"/>
+          </ac:picMkLst>
+        </pc:picChg>
+      </pc:sldChg>
+      <pc:sldChg chg="addSp delSp modSp add mod">
+        <pc:chgData name="DAIANE DEPONTI BOLZAN" userId="56e15508-9627-43d3-b08d-53c2183e9f73" providerId="ADAL" clId="{05EFCEA0-A524-441A-BBCD-50F6F0056890}" dt="2026-05-31T23:25:18.639" v="26" actId="14100"/>
+        <pc:sldMkLst>
+          <pc:docMk/>
+          <pc:sldMk cId="3789650125" sldId="328"/>
+        </pc:sldMkLst>
+        <pc:spChg chg="mod">
+          <ac:chgData name="DAIANE DEPONTI BOLZAN" userId="56e15508-9627-43d3-b08d-53c2183e9f73" providerId="ADAL" clId="{05EFCEA0-A524-441A-BBCD-50F6F0056890}" dt="2026-05-31T23:23:10.977" v="8" actId="20577"/>
+          <ac:spMkLst>
+            <pc:docMk/>
+            <pc:sldMk cId="3789650125" sldId="328"/>
+            <ac:spMk id="3" creationId="{5C874A66-1634-72F5-805D-86D16D9555F4}"/>
+          </ac:spMkLst>
+        </pc:spChg>
+        <pc:spChg chg="add mod">
+          <ac:chgData name="DAIANE DEPONTI BOLZAN" userId="56e15508-9627-43d3-b08d-53c2183e9f73" providerId="ADAL" clId="{05EFCEA0-A524-441A-BBCD-50F6F0056890}" dt="2026-05-31T23:23:13.544" v="10"/>
+          <ac:spMkLst>
+            <pc:docMk/>
+            <pc:sldMk cId="3789650125" sldId="328"/>
+            <ac:spMk id="4" creationId="{D190EBCA-A082-6426-90B7-AD57638C5ED7}"/>
+          </ac:spMkLst>
+        </pc:spChg>
+        <pc:spChg chg="add del mod">
+          <ac:chgData name="DAIANE DEPONTI BOLZAN" userId="56e15508-9627-43d3-b08d-53c2183e9f73" providerId="ADAL" clId="{05EFCEA0-A524-441A-BBCD-50F6F0056890}" dt="2026-05-31T23:25:18.639" v="26" actId="14100"/>
+          <ac:spMkLst>
+            <pc:docMk/>
+            <pc:sldMk cId="3789650125" sldId="328"/>
+            <ac:spMk id="6" creationId="{853B16F8-BF80-65CD-5024-FB18206E7919}"/>
+          </ac:spMkLst>
+        </pc:spChg>
+        <pc:graphicFrameChg chg="add mod">
+          <ac:chgData name="DAIANE DEPONTI BOLZAN" userId="56e15508-9627-43d3-b08d-53c2183e9f73" providerId="ADAL" clId="{05EFCEA0-A524-441A-BBCD-50F6F0056890}" dt="2026-05-31T23:23:11.480" v="9"/>
+          <ac:graphicFrameMkLst>
+            <pc:docMk/>
+            <pc:sldMk cId="3789650125" sldId="328"/>
+            <ac:graphicFrameMk id="2" creationId="{2F4DAFE0-11EF-22B5-1058-29AE2EE4B913}"/>
+          </ac:graphicFrameMkLst>
+        </pc:graphicFrameChg>
+        <pc:graphicFrameChg chg="add mod modGraphic">
+          <ac:chgData name="DAIANE DEPONTI BOLZAN" userId="56e15508-9627-43d3-b08d-53c2183e9f73" providerId="ADAL" clId="{05EFCEA0-A524-441A-BBCD-50F6F0056890}" dt="2026-05-31T23:23:54.468" v="13" actId="12385"/>
+          <ac:graphicFrameMkLst>
+            <pc:docMk/>
+            <pc:sldMk cId="3789650125" sldId="328"/>
+            <ac:graphicFrameMk id="5" creationId="{E61EE2FA-1107-63C9-DD3B-D3D53B115138}"/>
+          </ac:graphicFrameMkLst>
+        </pc:graphicFrameChg>
+      </pc:sldChg>
+      <pc:sldChg chg="addSp delSp modSp add mod">
+        <pc:chgData name="DAIANE DEPONTI BOLZAN" userId="56e15508-9627-43d3-b08d-53c2183e9f73" providerId="ADAL" clId="{05EFCEA0-A524-441A-BBCD-50F6F0056890}" dt="2026-05-31T23:27:25.780" v="72" actId="14100"/>
+        <pc:sldMkLst>
+          <pc:docMk/>
+          <pc:sldMk cId="423612267" sldId="329"/>
+        </pc:sldMkLst>
+        <pc:spChg chg="mod">
+          <ac:chgData name="DAIANE DEPONTI BOLZAN" userId="56e15508-9627-43d3-b08d-53c2183e9f73" providerId="ADAL" clId="{05EFCEA0-A524-441A-BBCD-50F6F0056890}" dt="2026-05-31T23:27:14.044" v="71" actId="113"/>
+          <ac:spMkLst>
+            <pc:docMk/>
+            <pc:sldMk cId="423612267" sldId="329"/>
+            <ac:spMk id="3" creationId="{8431D1BB-7291-7BB3-4C31-58B99A976384}"/>
+          </ac:spMkLst>
+        </pc:spChg>
+        <pc:spChg chg="add del mod">
+          <ac:chgData name="DAIANE DEPONTI BOLZAN" userId="56e15508-9627-43d3-b08d-53c2183e9f73" providerId="ADAL" clId="{05EFCEA0-A524-441A-BBCD-50F6F0056890}" dt="2026-05-31T23:26:43.605" v="37" actId="478"/>
+          <ac:spMkLst>
+            <pc:docMk/>
+            <pc:sldMk cId="423612267" sldId="329"/>
+            <ac:spMk id="4" creationId="{8C6DFF4D-DA98-86C6-88C0-10B1FA6D9016}"/>
+          </ac:spMkLst>
+        </pc:spChg>
+        <pc:spChg chg="del">
+          <ac:chgData name="DAIANE DEPONTI BOLZAN" userId="56e15508-9627-43d3-b08d-53c2183e9f73" providerId="ADAL" clId="{05EFCEA0-A524-441A-BBCD-50F6F0056890}" dt="2026-05-31T23:25:33.606" v="28" actId="478"/>
+          <ac:spMkLst>
+            <pc:docMk/>
+            <pc:sldMk cId="423612267" sldId="329"/>
+            <ac:spMk id="6" creationId="{3DE4720B-88AC-D45C-A2FD-29794D5D3015}"/>
+          </ac:spMkLst>
+        </pc:spChg>
+        <pc:graphicFrameChg chg="add mod modGraphic">
+          <ac:chgData name="DAIANE DEPONTI BOLZAN" userId="56e15508-9627-43d3-b08d-53c2183e9f73" providerId="ADAL" clId="{05EFCEA0-A524-441A-BBCD-50F6F0056890}" dt="2026-05-31T23:27:25.780" v="72" actId="14100"/>
+          <ac:graphicFrameMkLst>
+            <pc:docMk/>
+            <pc:sldMk cId="423612267" sldId="329"/>
+            <ac:graphicFrameMk id="2" creationId="{F7F47A03-81F9-2954-A819-0460794126FA}"/>
+          </ac:graphicFrameMkLst>
+        </pc:graphicFrameChg>
+        <pc:graphicFrameChg chg="del">
+          <ac:chgData name="DAIANE DEPONTI BOLZAN" userId="56e15508-9627-43d3-b08d-53c2183e9f73" providerId="ADAL" clId="{05EFCEA0-A524-441A-BBCD-50F6F0056890}" dt="2026-05-31T23:25:35.505" v="29" actId="478"/>
+          <ac:graphicFrameMkLst>
+            <pc:docMk/>
+            <pc:sldMk cId="423612267" sldId="329"/>
+            <ac:graphicFrameMk id="5" creationId="{DE4CD74E-E12A-4572-BEE7-E20F5B7D683D}"/>
+          </ac:graphicFrameMkLst>
+        </pc:graphicFrameChg>
+      </pc:sldChg>
+      <pc:sldChg chg="delSp modSp add mod">
+        <pc:chgData name="DAIANE DEPONTI BOLZAN" userId="56e15508-9627-43d3-b08d-53c2183e9f73" providerId="ADAL" clId="{05EFCEA0-A524-441A-BBCD-50F6F0056890}" dt="2026-05-31T23:28:03.249" v="77" actId="12"/>
+        <pc:sldMkLst>
+          <pc:docMk/>
+          <pc:sldMk cId="2423736681" sldId="330"/>
+        </pc:sldMkLst>
+        <pc:spChg chg="mod">
+          <ac:chgData name="DAIANE DEPONTI BOLZAN" userId="56e15508-9627-43d3-b08d-53c2183e9f73" providerId="ADAL" clId="{05EFCEA0-A524-441A-BBCD-50F6F0056890}" dt="2026-05-31T23:28:03.249" v="77" actId="12"/>
+          <ac:spMkLst>
+            <pc:docMk/>
+            <pc:sldMk cId="2423736681" sldId="330"/>
+            <ac:spMk id="3" creationId="{15200F98-5E64-DD21-885E-0541F32277D6}"/>
+          </ac:spMkLst>
+        </pc:spChg>
+        <pc:graphicFrameChg chg="del">
+          <ac:chgData name="DAIANE DEPONTI BOLZAN" userId="56e15508-9627-43d3-b08d-53c2183e9f73" providerId="ADAL" clId="{05EFCEA0-A524-441A-BBCD-50F6F0056890}" dt="2026-05-31T23:27:43.321" v="74" actId="478"/>
+          <ac:graphicFrameMkLst>
+            <pc:docMk/>
+            <pc:sldMk cId="2423736681" sldId="330"/>
+            <ac:graphicFrameMk id="2" creationId="{C6D34240-AF53-4899-34E4-D8A28BC6CC6F}"/>
+          </ac:graphicFrameMkLst>
+        </pc:graphicFrameChg>
+      </pc:sldChg>
+      <pc:sldChg chg="addSp delSp modSp add mod">
+        <pc:chgData name="DAIANE DEPONTI BOLZAN" userId="56e15508-9627-43d3-b08d-53c2183e9f73" providerId="ADAL" clId="{05EFCEA0-A524-441A-BBCD-50F6F0056890}" dt="2026-05-31T23:30:15.746" v="160" actId="108"/>
+        <pc:sldMkLst>
+          <pc:docMk/>
+          <pc:sldMk cId="3467603405" sldId="331"/>
+        </pc:sldMkLst>
+        <pc:spChg chg="add del mod">
+          <ac:chgData name="DAIANE DEPONTI BOLZAN" userId="56e15508-9627-43d3-b08d-53c2183e9f73" providerId="ADAL" clId="{05EFCEA0-A524-441A-BBCD-50F6F0056890}" dt="2026-05-31T23:30:15.746" v="160" actId="108"/>
+          <ac:spMkLst>
+            <pc:docMk/>
+            <pc:sldMk cId="3467603405" sldId="331"/>
+            <ac:spMk id="3" creationId="{D0C92FF5-E4E1-BB7C-DA31-E1262003F481}"/>
+          </ac:spMkLst>
+        </pc:spChg>
+        <pc:spChg chg="add mod">
+          <ac:chgData name="DAIANE DEPONTI BOLZAN" userId="56e15508-9627-43d3-b08d-53c2183e9f73" providerId="ADAL" clId="{05EFCEA0-A524-441A-BBCD-50F6F0056890}" dt="2026-05-31T23:28:47.714" v="81"/>
+          <ac:spMkLst>
+            <pc:docMk/>
+            <pc:sldMk cId="3467603405" sldId="331"/>
+            <ac:spMk id="4" creationId="{059E907B-15B7-D3C4-62EF-7C95CB5AB63D}"/>
+          </ac:spMkLst>
+        </pc:spChg>
+        <pc:spChg chg="add mod">
+          <ac:chgData name="DAIANE DEPONTI BOLZAN" userId="56e15508-9627-43d3-b08d-53c2183e9f73" providerId="ADAL" clId="{05EFCEA0-A524-441A-BBCD-50F6F0056890}" dt="2026-05-31T23:28:50.725" v="83"/>
+          <ac:spMkLst>
+            <pc:docMk/>
+            <pc:sldMk cId="3467603405" sldId="331"/>
+            <ac:spMk id="6" creationId="{69E9C33B-7EBB-FE5B-8021-2DA97CB0A2BB}"/>
+          </ac:spMkLst>
+        </pc:spChg>
+        <pc:graphicFrameChg chg="add mod">
+          <ac:chgData name="DAIANE DEPONTI BOLZAN" userId="56e15508-9627-43d3-b08d-53c2183e9f73" providerId="ADAL" clId="{05EFCEA0-A524-441A-BBCD-50F6F0056890}" dt="2026-05-31T23:28:43.687" v="80"/>
+          <ac:graphicFrameMkLst>
+            <pc:docMk/>
+            <pc:sldMk cId="3467603405" sldId="331"/>
+            <ac:graphicFrameMk id="2" creationId="{742EDC2C-9FD8-8A53-7321-010EE1D44065}"/>
+          </ac:graphicFrameMkLst>
+        </pc:graphicFrameChg>
+        <pc:graphicFrameChg chg="add mod">
+          <ac:chgData name="DAIANE DEPONTI BOLZAN" userId="56e15508-9627-43d3-b08d-53c2183e9f73" providerId="ADAL" clId="{05EFCEA0-A524-441A-BBCD-50F6F0056890}" dt="2026-05-31T23:28:49.471" v="82"/>
+          <ac:graphicFrameMkLst>
+            <pc:docMk/>
+            <pc:sldMk cId="3467603405" sldId="331"/>
+            <ac:graphicFrameMk id="5" creationId="{807E543D-5A99-A9D0-8D54-5C3C41546A74}"/>
+          </ac:graphicFrameMkLst>
+        </pc:graphicFrameChg>
+        <pc:graphicFrameChg chg="add mod modGraphic">
+          <ac:chgData name="DAIANE DEPONTI BOLZAN" userId="56e15508-9627-43d3-b08d-53c2183e9f73" providerId="ADAL" clId="{05EFCEA0-A524-441A-BBCD-50F6F0056890}" dt="2026-05-31T23:29:43.245" v="157" actId="14734"/>
+          <ac:graphicFrameMkLst>
+            <pc:docMk/>
+            <pc:sldMk cId="3467603405" sldId="331"/>
+            <ac:graphicFrameMk id="7" creationId="{16893675-9D45-C353-B617-5F475881E6AE}"/>
+          </ac:graphicFrameMkLst>
+        </pc:graphicFrameChg>
+      </pc:sldChg>
+      <pc:sldChg chg="addSp delSp modSp add mod">
+        <pc:chgData name="DAIANE DEPONTI BOLZAN" userId="56e15508-9627-43d3-b08d-53c2183e9f73" providerId="ADAL" clId="{05EFCEA0-A524-441A-BBCD-50F6F0056890}" dt="2026-05-31T23:31:16.815" v="176" actId="12385"/>
+        <pc:sldMkLst>
+          <pc:docMk/>
+          <pc:sldMk cId="1305872043" sldId="332"/>
+        </pc:sldMkLst>
+        <pc:spChg chg="mod">
+          <ac:chgData name="DAIANE DEPONTI BOLZAN" userId="56e15508-9627-43d3-b08d-53c2183e9f73" providerId="ADAL" clId="{05EFCEA0-A524-441A-BBCD-50F6F0056890}" dt="2026-05-31T23:30:33.971" v="170" actId="20577"/>
+          <ac:spMkLst>
+            <pc:docMk/>
+            <pc:sldMk cId="1305872043" sldId="332"/>
+            <ac:spMk id="3" creationId="{B500D0EC-7FE2-3B78-48AB-D7C0C35F8F31}"/>
+          </ac:spMkLst>
+        </pc:spChg>
+        <pc:graphicFrameChg chg="add mod modGraphic">
+          <ac:chgData name="DAIANE DEPONTI BOLZAN" userId="56e15508-9627-43d3-b08d-53c2183e9f73" providerId="ADAL" clId="{05EFCEA0-A524-441A-BBCD-50F6F0056890}" dt="2026-05-31T23:31:16.815" v="176" actId="12385"/>
+          <ac:graphicFrameMkLst>
+            <pc:docMk/>
+            <pc:sldMk cId="1305872043" sldId="332"/>
+            <ac:graphicFrameMk id="2" creationId="{783CB874-8121-25C7-D98C-EBAE98605753}"/>
+          </ac:graphicFrameMkLst>
+        </pc:graphicFrameChg>
+        <pc:graphicFrameChg chg="del modGraphic">
+          <ac:chgData name="DAIANE DEPONTI BOLZAN" userId="56e15508-9627-43d3-b08d-53c2183e9f73" providerId="ADAL" clId="{05EFCEA0-A524-441A-BBCD-50F6F0056890}" dt="2026-05-31T23:31:10.732" v="174" actId="478"/>
+          <ac:graphicFrameMkLst>
+            <pc:docMk/>
+            <pc:sldMk cId="1305872043" sldId="332"/>
+            <ac:graphicFrameMk id="7" creationId="{61331922-12EC-EE5B-9BEB-DA171EDEA400}"/>
+          </ac:graphicFrameMkLst>
+        </pc:graphicFrameChg>
+      </pc:sldChg>
+      <pc:sldChg chg="addSp delSp modSp add mod">
+        <pc:chgData name="DAIANE DEPONTI BOLZAN" userId="56e15508-9627-43d3-b08d-53c2183e9f73" providerId="ADAL" clId="{05EFCEA0-A524-441A-BBCD-50F6F0056890}" dt="2026-05-31T23:32:53.716" v="201"/>
+        <pc:sldMkLst>
+          <pc:docMk/>
+          <pc:sldMk cId="1961475540" sldId="333"/>
+        </pc:sldMkLst>
+        <pc:spChg chg="mod">
+          <ac:chgData name="DAIANE DEPONTI BOLZAN" userId="56e15508-9627-43d3-b08d-53c2183e9f73" providerId="ADAL" clId="{05EFCEA0-A524-441A-BBCD-50F6F0056890}" dt="2026-05-31T23:31:53.406" v="197"/>
+          <ac:spMkLst>
+            <pc:docMk/>
+            <pc:sldMk cId="1961475540" sldId="333"/>
+            <ac:spMk id="3" creationId="{8B344BF5-B909-6195-3A52-378FBD38B22D}"/>
+          </ac:spMkLst>
+        </pc:spChg>
+        <pc:graphicFrameChg chg="del">
+          <ac:chgData name="DAIANE DEPONTI BOLZAN" userId="56e15508-9627-43d3-b08d-53c2183e9f73" providerId="ADAL" clId="{05EFCEA0-A524-441A-BBCD-50F6F0056890}" dt="2026-05-31T23:31:58.717" v="198" actId="478"/>
+          <ac:graphicFrameMkLst>
+            <pc:docMk/>
+            <pc:sldMk cId="1961475540" sldId="333"/>
+            <ac:graphicFrameMk id="2" creationId="{6BE0279F-5E8D-ACD5-9235-EB195A321ECE}"/>
+          </ac:graphicFrameMkLst>
+        </pc:graphicFrameChg>
+        <pc:graphicFrameChg chg="add mod modGraphic">
+          <ac:chgData name="DAIANE DEPONTI BOLZAN" userId="56e15508-9627-43d3-b08d-53c2183e9f73" providerId="ADAL" clId="{05EFCEA0-A524-441A-BBCD-50F6F0056890}" dt="2026-05-31T23:32:45.580" v="200" actId="12385"/>
+          <ac:graphicFrameMkLst>
+            <pc:docMk/>
+            <pc:sldMk cId="1961475540" sldId="333"/>
+            <ac:graphicFrameMk id="4" creationId="{E8C6845A-27BA-10C5-0B42-6DC3E8741995}"/>
+          </ac:graphicFrameMkLst>
+        </pc:graphicFrameChg>
+        <pc:graphicFrameChg chg="add mod">
+          <ac:chgData name="DAIANE DEPONTI BOLZAN" userId="56e15508-9627-43d3-b08d-53c2183e9f73" providerId="ADAL" clId="{05EFCEA0-A524-441A-BBCD-50F6F0056890}" dt="2026-05-31T23:32:53.716" v="201"/>
+          <ac:graphicFrameMkLst>
+            <pc:docMk/>
+            <pc:sldMk cId="1961475540" sldId="333"/>
+            <ac:graphicFrameMk id="5" creationId="{334BBBD1-D93E-EBC8-D7F8-4A0E1D5F18D7}"/>
+          </ac:graphicFrameMkLst>
+        </pc:graphicFrameChg>
+      </pc:sldChg>
+      <pc:sldChg chg="delSp modSp add mod">
+        <pc:chgData name="DAIANE DEPONTI BOLZAN" userId="56e15508-9627-43d3-b08d-53c2183e9f73" providerId="ADAL" clId="{05EFCEA0-A524-441A-BBCD-50F6F0056890}" dt="2026-05-31T23:33:28.263" v="206" actId="12"/>
+        <pc:sldMkLst>
+          <pc:docMk/>
+          <pc:sldMk cId="1690372770" sldId="334"/>
+        </pc:sldMkLst>
+        <pc:spChg chg="mod">
+          <ac:chgData name="DAIANE DEPONTI BOLZAN" userId="56e15508-9627-43d3-b08d-53c2183e9f73" providerId="ADAL" clId="{05EFCEA0-A524-441A-BBCD-50F6F0056890}" dt="2026-05-31T23:33:28.263" v="206" actId="12"/>
+          <ac:spMkLst>
+            <pc:docMk/>
+            <pc:sldMk cId="1690372770" sldId="334"/>
+            <ac:spMk id="3" creationId="{41C178A6-7FD1-7C96-8918-DD4BFFBABF67}"/>
+          </ac:spMkLst>
+        </pc:spChg>
+        <pc:graphicFrameChg chg="del">
+          <ac:chgData name="DAIANE DEPONTI BOLZAN" userId="56e15508-9627-43d3-b08d-53c2183e9f73" providerId="ADAL" clId="{05EFCEA0-A524-441A-BBCD-50F6F0056890}" dt="2026-05-31T23:33:14.455" v="204" actId="478"/>
+          <ac:graphicFrameMkLst>
+            <pc:docMk/>
+            <pc:sldMk cId="1690372770" sldId="334"/>
+            <ac:graphicFrameMk id="4" creationId="{CA31EB90-1781-C9F6-8F0D-DF2B90730A85}"/>
+          </ac:graphicFrameMkLst>
+        </pc:graphicFrameChg>
+        <pc:graphicFrameChg chg="del">
+          <ac:chgData name="DAIANE DEPONTI BOLZAN" userId="56e15508-9627-43d3-b08d-53c2183e9f73" providerId="ADAL" clId="{05EFCEA0-A524-441A-BBCD-50F6F0056890}" dt="2026-05-31T23:33:11.917" v="203" actId="478"/>
+          <ac:graphicFrameMkLst>
+            <pc:docMk/>
+            <pc:sldMk cId="1690372770" sldId="334"/>
+            <ac:graphicFrameMk id="5" creationId="{852185D2-1D97-3EB1-356E-0A4C15F278F9}"/>
+          </ac:graphicFrameMkLst>
+        </pc:graphicFrameChg>
+      </pc:sldChg>
+      <pc:sldChg chg="addSp modSp add mod">
+        <pc:chgData name="DAIANE DEPONTI BOLZAN" userId="56e15508-9627-43d3-b08d-53c2183e9f73" providerId="ADAL" clId="{05EFCEA0-A524-441A-BBCD-50F6F0056890}" dt="2026-05-31T23:36:43.166" v="619" actId="12385"/>
+        <pc:sldMkLst>
+          <pc:docMk/>
+          <pc:sldMk cId="667494311" sldId="335"/>
+        </pc:sldMkLst>
+        <pc:graphicFrameChg chg="add mod modGraphic">
+          <ac:chgData name="DAIANE DEPONTI BOLZAN" userId="56e15508-9627-43d3-b08d-53c2183e9f73" providerId="ADAL" clId="{05EFCEA0-A524-441A-BBCD-50F6F0056890}" dt="2026-05-31T23:36:43.166" v="619" actId="12385"/>
+          <ac:graphicFrameMkLst>
+            <pc:docMk/>
+            <pc:sldMk cId="667494311" sldId="335"/>
+            <ac:graphicFrameMk id="2" creationId="{55084A93-0F17-03E9-3E49-07E1637E0E66}"/>
+          </ac:graphicFrameMkLst>
+        </pc:graphicFrameChg>
+      </pc:sldChg>
+      <pc:sldChg chg="add del">
+        <pc:chgData name="DAIANE DEPONTI BOLZAN" userId="56e15508-9627-43d3-b08d-53c2183e9f73" providerId="ADAL" clId="{05EFCEA0-A524-441A-BBCD-50F6F0056890}" dt="2026-05-31T23:34:39.802" v="215"/>
+        <pc:sldMkLst>
+          <pc:docMk/>
+          <pc:sldMk cId="1469076622" sldId="335"/>
+        </pc:sldMkLst>
+      </pc:sldChg>
+      <pc:sldChg chg="add del">
+        <pc:chgData name="DAIANE DEPONTI BOLZAN" userId="56e15508-9627-43d3-b08d-53c2183e9f73" providerId="ADAL" clId="{05EFCEA0-A524-441A-BBCD-50F6F0056890}" dt="2026-05-31T23:34:50.476" v="220" actId="47"/>
+        <pc:sldMkLst>
+          <pc:docMk/>
+          <pc:sldMk cId="3287375362" sldId="335"/>
+        </pc:sldMkLst>
+      </pc:sldChg>
+      <pc:sldChg chg="addSp modSp add mod">
+        <pc:chgData name="DAIANE DEPONTI BOLZAN" userId="56e15508-9627-43d3-b08d-53c2183e9f73" providerId="ADAL" clId="{05EFCEA0-A524-441A-BBCD-50F6F0056890}" dt="2026-05-31T23:37:52.403" v="627" actId="1076"/>
+        <pc:sldMkLst>
+          <pc:docMk/>
+          <pc:sldMk cId="3106316518" sldId="336"/>
+        </pc:sldMkLst>
+        <pc:spChg chg="mod">
+          <ac:chgData name="DAIANE DEPONTI BOLZAN" userId="56e15508-9627-43d3-b08d-53c2183e9f73" providerId="ADAL" clId="{05EFCEA0-A524-441A-BBCD-50F6F0056890}" dt="2026-05-31T23:37:29.297" v="623"/>
+          <ac:spMkLst>
+            <pc:docMk/>
+            <pc:sldMk cId="3106316518" sldId="336"/>
+            <ac:spMk id="3" creationId="{F0487FBA-B941-88F0-A1E0-9C1671D37687}"/>
+          </ac:spMkLst>
+        </pc:spChg>
+        <pc:picChg chg="add mod">
+          <ac:chgData name="DAIANE DEPONTI BOLZAN" userId="56e15508-9627-43d3-b08d-53c2183e9f73" providerId="ADAL" clId="{05EFCEA0-A524-441A-BBCD-50F6F0056890}" dt="2026-05-31T23:37:52.403" v="627" actId="1076"/>
+          <ac:picMkLst>
+            <pc:docMk/>
+            <pc:sldMk cId="3106316518" sldId="336"/>
+            <ac:picMk id="4" creationId="{E7CA5C10-18CD-AF29-6F69-8BEF03472E81}"/>
+          </ac:picMkLst>
+        </pc:picChg>
+      </pc:sldChg>
+    </pc:docChg>
+  </pc:docChgLst>
+</pc:chgInfo>
 </file>
 
 <file path=ppt/handoutMasters/handoutMaster1.xml><?xml version="1.0" encoding="utf-8"?>
@@ -258,7 +722,7 @@
           <a:p>
             <a:fld id="{22D2343C-BD3C-4650-924C-40706B7DFBCE}" type="datetimeFigureOut">
               <a:rPr lang="pt-BR" smtClean="0"/>
-              <a:t>24/05/2026</a:t>
+              <a:t>31/05/2026</a:t>
             </a:fld>
             <a:endParaRPr lang="pt-BR"/>
           </a:p>
@@ -435,7 +899,7 @@
           <a:p>
             <a:fld id="{66858637-C724-49AC-97B9-A464C80FECDD}" type="datetimeFigureOut">
               <a:rPr lang="pt-BR" smtClean="0"/>
-              <a:t>24/05/2026</a:t>
+              <a:t>31/05/2026</a:t>
             </a:fld>
             <a:endParaRPr lang="pt-BR"/>
           </a:p>
@@ -5908,6 +6372,2817 @@
   <p:cSld>
     <p:spTree>
       <p:nvGrpSpPr>
+        <p:cNvPr id="1" name="">
+          <a:extLst>
+            <a:ext uri="{FF2B5EF4-FFF2-40B4-BE49-F238E27FC236}">
+              <a16:creationId xmlns:a16="http://schemas.microsoft.com/office/drawing/2014/main" id="{08B42BFD-4A19-5D87-C094-A79D5870C70A}"/>
+            </a:ext>
+          </a:extLst>
+        </p:cNvPr>
+        <p:cNvGrpSpPr/>
+        <p:nvPr/>
+      </p:nvGrpSpPr>
+      <p:grpSpPr>
+        <a:xfrm>
+          <a:off x="0" y="0"/>
+          <a:ext cx="0" cy="0"/>
+          <a:chOff x="0" y="0"/>
+          <a:chExt cx="0" cy="0"/>
+        </a:xfrm>
+      </p:grpSpPr>
+      <p:sp>
+        <p:nvSpPr>
+          <p:cNvPr id="3" name="Espaço Reservado para Texto 2">
+            <a:extLst>
+              <a:ext uri="{FF2B5EF4-FFF2-40B4-BE49-F238E27FC236}">
+                <a16:creationId xmlns:a16="http://schemas.microsoft.com/office/drawing/2014/main" id="{8B344BF5-B909-6195-3A52-378FBD38B22D}"/>
+              </a:ext>
+            </a:extLst>
+          </p:cNvPr>
+          <p:cNvSpPr>
+            <a:spLocks noGrp="1"/>
+          </p:cNvSpPr>
+          <p:nvPr>
+            <p:ph type="body" sz="quarter" idx="10"/>
+          </p:nvPr>
+        </p:nvSpPr>
+        <p:spPr/>
+        <p:txBody>
+          <a:bodyPr/>
+          <a:lstStyle/>
+          <a:p>
+            <a:r>
+              <a:rPr lang="pt-BR" b="1" dirty="0"/>
+              <a:t>3.1 Requisitos de Infraestrutura:</a:t>
+            </a:r>
+          </a:p>
+          <a:p>
+            <a:r>
+              <a:rPr lang="pt-BR" dirty="0"/>
+              <a:t>A infraestrutura provisionada pelo AWS </a:t>
+            </a:r>
+            <a:r>
+              <a:rPr lang="pt-BR" dirty="0" err="1"/>
+              <a:t>CloudFormation</a:t>
+            </a:r>
+            <a:r>
+              <a:rPr lang="pt-BR" dirty="0"/>
+              <a:t> na Fase 1 deve contemplar:</a:t>
+            </a:r>
+            <a:endParaRPr lang="pt-BR" b="1" dirty="0"/>
+          </a:p>
+          <a:p>
+            <a:endParaRPr lang="pt-BR" dirty="0"/>
+          </a:p>
+        </p:txBody>
+      </p:sp>
+      <p:graphicFrame>
+        <p:nvGraphicFramePr>
+          <p:cNvPr id="4" name="Tabela 3">
+            <a:extLst>
+              <a:ext uri="{FF2B5EF4-FFF2-40B4-BE49-F238E27FC236}">
+                <a16:creationId xmlns:a16="http://schemas.microsoft.com/office/drawing/2014/main" id="{E8C6845A-27BA-10C5-0B42-6DC3E8741995}"/>
+              </a:ext>
+            </a:extLst>
+          </p:cNvPr>
+          <p:cNvGraphicFramePr>
+            <a:graphicFrameLocks noGrp="1"/>
+          </p:cNvGraphicFramePr>
+          <p:nvPr>
+            <p:extLst>
+              <p:ext uri="{D42A27DB-BD31-4B8C-83A1-F6EECF244321}">
+                <p14:modId xmlns:p14="http://schemas.microsoft.com/office/powerpoint/2010/main" val="1366410370"/>
+              </p:ext>
+            </p:extLst>
+          </p:nvPr>
+        </p:nvGraphicFramePr>
+        <p:xfrm>
+          <a:off x="1127125" y="3146330"/>
+          <a:ext cx="14147800" cy="4910328"/>
+        </p:xfrm>
+        <a:graphic>
+          <a:graphicData uri="http://schemas.openxmlformats.org/drawingml/2006/table">
+            <a:tbl>
+              <a:tblPr>
+                <a:tableStyleId>{1FECB4D8-DB02-4DC6-A0A2-4F2EBAE1DC90}</a:tableStyleId>
+              </a:tblPr>
+              <a:tblGrid>
+                <a:gridCol w="7073900">
+                  <a:extLst>
+                    <a:ext uri="{9D8B030D-6E8A-4147-A177-3AD203B41FA5}">
+                      <a16:colId xmlns:a16="http://schemas.microsoft.com/office/drawing/2014/main" val="2882372076"/>
+                    </a:ext>
+                  </a:extLst>
+                </a:gridCol>
+                <a:gridCol w="7073900">
+                  <a:extLst>
+                    <a:ext uri="{9D8B030D-6E8A-4147-A177-3AD203B41FA5}">
+                      <a16:colId xmlns:a16="http://schemas.microsoft.com/office/drawing/2014/main" val="3209718577"/>
+                    </a:ext>
+                  </a:extLst>
+                </a:gridCol>
+              </a:tblGrid>
+              <a:tr h="0">
+                <a:tc>
+                  <a:txBody>
+                    <a:bodyPr/>
+                    <a:lstStyle/>
+                    <a:p>
+                      <a:pPr>
+                        <a:buNone/>
+                      </a:pPr>
+                      <a:r>
+                        <a:rPr lang="pt-BR" b="1">
+                          <a:effectLst/>
+                        </a:rPr>
+                        <a:t>Recurso AWS</a:t>
+                      </a:r>
+                    </a:p>
+                  </a:txBody>
+                  <a:tcPr marL="123825" marR="123825" marT="57150" marB="57150" anchor="ctr"/>
+                </a:tc>
+                <a:tc>
+                  <a:txBody>
+                    <a:bodyPr/>
+                    <a:lstStyle/>
+                    <a:p>
+                      <a:pPr>
+                        <a:buNone/>
+                      </a:pPr>
+                      <a:r>
+                        <a:rPr lang="pt-BR" b="1">
+                          <a:effectLst/>
+                        </a:rPr>
+                        <a:t>Descrição</a:t>
+                      </a:r>
+                    </a:p>
+                  </a:txBody>
+                  <a:tcPr marL="123825" marR="123825" marT="57150" marB="57150" anchor="ctr"/>
+                </a:tc>
+                <a:extLst>
+                  <a:ext uri="{0D108BD9-81ED-4DB2-BD59-A6C34878D82A}">
+                    <a16:rowId xmlns:a16="http://schemas.microsoft.com/office/drawing/2014/main" val="3469224395"/>
+                  </a:ext>
+                </a:extLst>
+              </a:tr>
+              <a:tr h="0">
+                <a:tc>
+                  <a:txBody>
+                    <a:bodyPr/>
+                    <a:lstStyle/>
+                    <a:p>
+                      <a:pPr>
+                        <a:buNone/>
+                      </a:pPr>
+                      <a:r>
+                        <a:rPr lang="pt-BR">
+                          <a:effectLst/>
+                        </a:rPr>
+                        <a:t>Amazon EC2</a:t>
+                      </a:r>
+                    </a:p>
+                  </a:txBody>
+                  <a:tcPr marL="123825" marR="123825" marT="57150" marB="57150" anchor="ctr"/>
+                </a:tc>
+                <a:tc>
+                  <a:txBody>
+                    <a:bodyPr/>
+                    <a:lstStyle/>
+                    <a:p>
+                      <a:pPr>
+                        <a:buNone/>
+                      </a:pPr>
+                      <a:r>
+                        <a:rPr lang="pt-BR">
+                          <a:effectLst/>
+                        </a:rPr>
+                        <a:t>Instância t2.micro (free tier) para hospedar a aplicação.</a:t>
+                      </a:r>
+                    </a:p>
+                  </a:txBody>
+                  <a:tcPr marL="123825" marR="123825" marT="57150" marB="57150" anchor="ctr"/>
+                </a:tc>
+                <a:extLst>
+                  <a:ext uri="{0D108BD9-81ED-4DB2-BD59-A6C34878D82A}">
+                    <a16:rowId xmlns:a16="http://schemas.microsoft.com/office/drawing/2014/main" val="2652341266"/>
+                  </a:ext>
+                </a:extLst>
+              </a:tr>
+              <a:tr h="0">
+                <a:tc>
+                  <a:txBody>
+                    <a:bodyPr/>
+                    <a:lstStyle/>
+                    <a:p>
+                      <a:pPr>
+                        <a:buNone/>
+                      </a:pPr>
+                      <a:r>
+                        <a:rPr lang="pt-BR">
+                          <a:effectLst/>
+                        </a:rPr>
+                        <a:t>Amazon S3</a:t>
+                      </a:r>
+                    </a:p>
+                  </a:txBody>
+                  <a:tcPr marL="123825" marR="123825" marT="57150" marB="57150" anchor="ctr"/>
+                </a:tc>
+                <a:tc>
+                  <a:txBody>
+                    <a:bodyPr/>
+                    <a:lstStyle/>
+                    <a:p>
+                      <a:pPr>
+                        <a:buNone/>
+                      </a:pPr>
+                      <a:r>
+                        <a:rPr lang="pt-BR">
+                          <a:effectLst/>
+                        </a:rPr>
+                        <a:t>Bucket para armazenar artefatos de build e logs do pipeline.</a:t>
+                      </a:r>
+                    </a:p>
+                  </a:txBody>
+                  <a:tcPr marL="123825" marR="123825" marT="57150" marB="57150" anchor="ctr"/>
+                </a:tc>
+                <a:extLst>
+                  <a:ext uri="{0D108BD9-81ED-4DB2-BD59-A6C34878D82A}">
+                    <a16:rowId xmlns:a16="http://schemas.microsoft.com/office/drawing/2014/main" val="1153338487"/>
+                  </a:ext>
+                </a:extLst>
+              </a:tr>
+              <a:tr h="0">
+                <a:tc>
+                  <a:txBody>
+                    <a:bodyPr/>
+                    <a:lstStyle/>
+                    <a:p>
+                      <a:pPr>
+                        <a:buNone/>
+                      </a:pPr>
+                      <a:r>
+                        <a:rPr lang="pt-BR">
+                          <a:effectLst/>
+                        </a:rPr>
+                        <a:t>IAM Role / Policy</a:t>
+                      </a:r>
+                    </a:p>
+                  </a:txBody>
+                  <a:tcPr marL="123825" marR="123825" marT="57150" marB="57150" anchor="ctr"/>
+                </a:tc>
+                <a:tc>
+                  <a:txBody>
+                    <a:bodyPr/>
+                    <a:lstStyle/>
+                    <a:p>
+                      <a:pPr>
+                        <a:buNone/>
+                      </a:pPr>
+                      <a:r>
+                        <a:rPr lang="pt-BR">
+                          <a:effectLst/>
+                        </a:rPr>
+                        <a:t>Permissões mínimas necessárias para execução segura (princípio do menor privilégio).</a:t>
+                      </a:r>
+                    </a:p>
+                  </a:txBody>
+                  <a:tcPr marL="123825" marR="123825" marT="57150" marB="57150" anchor="ctr"/>
+                </a:tc>
+                <a:extLst>
+                  <a:ext uri="{0D108BD9-81ED-4DB2-BD59-A6C34878D82A}">
+                    <a16:rowId xmlns:a16="http://schemas.microsoft.com/office/drawing/2014/main" val="778390868"/>
+                  </a:ext>
+                </a:extLst>
+              </a:tr>
+              <a:tr h="0">
+                <a:tc>
+                  <a:txBody>
+                    <a:bodyPr/>
+                    <a:lstStyle/>
+                    <a:p>
+                      <a:pPr>
+                        <a:buNone/>
+                      </a:pPr>
+                      <a:r>
+                        <a:rPr lang="pt-BR">
+                          <a:effectLst/>
+                        </a:rPr>
+                        <a:t>Security Group</a:t>
+                      </a:r>
+                    </a:p>
+                  </a:txBody>
+                  <a:tcPr marL="123825" marR="123825" marT="57150" marB="57150" anchor="ctr"/>
+                </a:tc>
+                <a:tc>
+                  <a:txBody>
+                    <a:bodyPr/>
+                    <a:lstStyle/>
+                    <a:p>
+                      <a:pPr>
+                        <a:buNone/>
+                      </a:pPr>
+                      <a:r>
+                        <a:rPr lang="pt-BR">
+                          <a:effectLst/>
+                        </a:rPr>
+                        <a:t>Regras de firewall para expor apenas as portas necessárias (80, 443, 22 restrito).</a:t>
+                      </a:r>
+                    </a:p>
+                  </a:txBody>
+                  <a:tcPr marL="123825" marR="123825" marT="57150" marB="57150" anchor="ctr"/>
+                </a:tc>
+                <a:extLst>
+                  <a:ext uri="{0D108BD9-81ED-4DB2-BD59-A6C34878D82A}">
+                    <a16:rowId xmlns:a16="http://schemas.microsoft.com/office/drawing/2014/main" val="453858552"/>
+                  </a:ext>
+                </a:extLst>
+              </a:tr>
+              <a:tr h="0">
+                <a:tc>
+                  <a:txBody>
+                    <a:bodyPr/>
+                    <a:lstStyle/>
+                    <a:p>
+                      <a:pPr>
+                        <a:buNone/>
+                      </a:pPr>
+                      <a:r>
+                        <a:rPr lang="pt-BR">
+                          <a:effectLst/>
+                        </a:rPr>
+                        <a:t>CloudFormation Stack</a:t>
+                      </a:r>
+                    </a:p>
+                  </a:txBody>
+                  <a:tcPr marL="123825" marR="123825" marT="57150" marB="57150" anchor="ctr"/>
+                </a:tc>
+                <a:tc>
+                  <a:txBody>
+                    <a:bodyPr/>
+                    <a:lstStyle/>
+                    <a:p>
+                      <a:pPr>
+                        <a:buNone/>
+                      </a:pPr>
+                      <a:r>
+                        <a:rPr lang="pt-BR" dirty="0">
+                          <a:effectLst/>
+                        </a:rPr>
+                        <a:t>Stack parametrizável com variáveis de ambiente (</a:t>
+                      </a:r>
+                      <a:r>
+                        <a:rPr lang="pt-BR" dirty="0" err="1">
+                          <a:effectLst/>
+                        </a:rPr>
+                        <a:t>dev</a:t>
+                      </a:r>
+                      <a:r>
+                        <a:rPr lang="pt-BR" dirty="0">
+                          <a:effectLst/>
+                        </a:rPr>
+                        <a:t>/</a:t>
+                      </a:r>
+                      <a:r>
+                        <a:rPr lang="pt-BR" dirty="0" err="1">
+                          <a:effectLst/>
+                        </a:rPr>
+                        <a:t>staging</a:t>
+                      </a:r>
+                      <a:r>
+                        <a:rPr lang="pt-BR" dirty="0">
+                          <a:effectLst/>
+                        </a:rPr>
+                        <a:t>/</a:t>
+                      </a:r>
+                      <a:r>
+                        <a:rPr lang="pt-BR" dirty="0" err="1">
+                          <a:effectLst/>
+                        </a:rPr>
+                        <a:t>prod</a:t>
+                      </a:r>
+                      <a:r>
+                        <a:rPr lang="pt-BR" dirty="0">
+                          <a:effectLst/>
+                        </a:rPr>
+                        <a:t>).</a:t>
+                      </a:r>
+                    </a:p>
+                  </a:txBody>
+                  <a:tcPr marL="123825" marR="123825" marT="57150" marB="57150" anchor="ctr"/>
+                </a:tc>
+                <a:extLst>
+                  <a:ext uri="{0D108BD9-81ED-4DB2-BD59-A6C34878D82A}">
+                    <a16:rowId xmlns:a16="http://schemas.microsoft.com/office/drawing/2014/main" val="1154046601"/>
+                  </a:ext>
+                </a:extLst>
+              </a:tr>
+            </a:tbl>
+          </a:graphicData>
+        </a:graphic>
+      </p:graphicFrame>
+      <p:graphicFrame>
+        <p:nvGraphicFramePr>
+          <p:cNvPr id="5" name="Tabela 4">
+            <a:extLst>
+              <a:ext uri="{FF2B5EF4-FFF2-40B4-BE49-F238E27FC236}">
+                <a16:creationId xmlns:a16="http://schemas.microsoft.com/office/drawing/2014/main" id="{334BBBD1-D93E-EBC8-D7F8-4A0E1D5F18D7}"/>
+              </a:ext>
+            </a:extLst>
+          </p:cNvPr>
+          <p:cNvGraphicFramePr>
+            <a:graphicFrameLocks noGrp="1"/>
+          </p:cNvGraphicFramePr>
+          <p:nvPr>
+            <p:extLst>
+              <p:ext uri="{D42A27DB-BD31-4B8C-83A1-F6EECF244321}">
+                <p14:modId xmlns:p14="http://schemas.microsoft.com/office/powerpoint/2010/main" val="3311927893"/>
+              </p:ext>
+            </p:extLst>
+          </p:nvPr>
+        </p:nvGraphicFramePr>
+        <p:xfrm>
+          <a:off x="1127125" y="3146330"/>
+          <a:ext cx="14147800" cy="4910328"/>
+        </p:xfrm>
+        <a:graphic>
+          <a:graphicData uri="http://schemas.openxmlformats.org/drawingml/2006/table">
+            <a:tbl>
+              <a:tblPr>
+                <a:tableStyleId>{1FECB4D8-DB02-4DC6-A0A2-4F2EBAE1DC90}</a:tableStyleId>
+              </a:tblPr>
+              <a:tblGrid>
+                <a:gridCol w="7073900">
+                  <a:extLst>
+                    <a:ext uri="{9D8B030D-6E8A-4147-A177-3AD203B41FA5}">
+                      <a16:colId xmlns:a16="http://schemas.microsoft.com/office/drawing/2014/main" val="2882372076"/>
+                    </a:ext>
+                  </a:extLst>
+                </a:gridCol>
+                <a:gridCol w="7073900">
+                  <a:extLst>
+                    <a:ext uri="{9D8B030D-6E8A-4147-A177-3AD203B41FA5}">
+                      <a16:colId xmlns:a16="http://schemas.microsoft.com/office/drawing/2014/main" val="3209718577"/>
+                    </a:ext>
+                  </a:extLst>
+                </a:gridCol>
+              </a:tblGrid>
+              <a:tr h="0">
+                <a:tc>
+                  <a:txBody>
+                    <a:bodyPr/>
+                    <a:lstStyle/>
+                    <a:p>
+                      <a:pPr>
+                        <a:buNone/>
+                      </a:pPr>
+                      <a:r>
+                        <a:rPr lang="pt-BR" b="1">
+                          <a:effectLst/>
+                        </a:rPr>
+                        <a:t>Recurso AWS</a:t>
+                      </a:r>
+                    </a:p>
+                  </a:txBody>
+                  <a:tcPr marL="123825" marR="123825" marT="57150" marB="57150" anchor="ctr"/>
+                </a:tc>
+                <a:tc>
+                  <a:txBody>
+                    <a:bodyPr/>
+                    <a:lstStyle/>
+                    <a:p>
+                      <a:pPr>
+                        <a:buNone/>
+                      </a:pPr>
+                      <a:r>
+                        <a:rPr lang="pt-BR" b="1">
+                          <a:effectLst/>
+                        </a:rPr>
+                        <a:t>Descrição</a:t>
+                      </a:r>
+                    </a:p>
+                  </a:txBody>
+                  <a:tcPr marL="123825" marR="123825" marT="57150" marB="57150" anchor="ctr"/>
+                </a:tc>
+                <a:extLst>
+                  <a:ext uri="{0D108BD9-81ED-4DB2-BD59-A6C34878D82A}">
+                    <a16:rowId xmlns:a16="http://schemas.microsoft.com/office/drawing/2014/main" val="3469224395"/>
+                  </a:ext>
+                </a:extLst>
+              </a:tr>
+              <a:tr h="0">
+                <a:tc>
+                  <a:txBody>
+                    <a:bodyPr/>
+                    <a:lstStyle/>
+                    <a:p>
+                      <a:pPr>
+                        <a:buNone/>
+                      </a:pPr>
+                      <a:r>
+                        <a:rPr lang="pt-BR">
+                          <a:effectLst/>
+                        </a:rPr>
+                        <a:t>Amazon EC2</a:t>
+                      </a:r>
+                    </a:p>
+                  </a:txBody>
+                  <a:tcPr marL="123825" marR="123825" marT="57150" marB="57150" anchor="ctr"/>
+                </a:tc>
+                <a:tc>
+                  <a:txBody>
+                    <a:bodyPr/>
+                    <a:lstStyle/>
+                    <a:p>
+                      <a:pPr>
+                        <a:buNone/>
+                      </a:pPr>
+                      <a:r>
+                        <a:rPr lang="pt-BR">
+                          <a:effectLst/>
+                        </a:rPr>
+                        <a:t>Instância t2.micro (free tier) para hospedar a aplicação.</a:t>
+                      </a:r>
+                    </a:p>
+                  </a:txBody>
+                  <a:tcPr marL="123825" marR="123825" marT="57150" marB="57150" anchor="ctr"/>
+                </a:tc>
+                <a:extLst>
+                  <a:ext uri="{0D108BD9-81ED-4DB2-BD59-A6C34878D82A}">
+                    <a16:rowId xmlns:a16="http://schemas.microsoft.com/office/drawing/2014/main" val="2652341266"/>
+                  </a:ext>
+                </a:extLst>
+              </a:tr>
+              <a:tr h="0">
+                <a:tc>
+                  <a:txBody>
+                    <a:bodyPr/>
+                    <a:lstStyle/>
+                    <a:p>
+                      <a:pPr>
+                        <a:buNone/>
+                      </a:pPr>
+                      <a:r>
+                        <a:rPr lang="pt-BR">
+                          <a:effectLst/>
+                        </a:rPr>
+                        <a:t>Amazon S3</a:t>
+                      </a:r>
+                    </a:p>
+                  </a:txBody>
+                  <a:tcPr marL="123825" marR="123825" marT="57150" marB="57150" anchor="ctr"/>
+                </a:tc>
+                <a:tc>
+                  <a:txBody>
+                    <a:bodyPr/>
+                    <a:lstStyle/>
+                    <a:p>
+                      <a:pPr>
+                        <a:buNone/>
+                      </a:pPr>
+                      <a:r>
+                        <a:rPr lang="pt-BR">
+                          <a:effectLst/>
+                        </a:rPr>
+                        <a:t>Bucket para armazenar artefatos de build e logs do pipeline.</a:t>
+                      </a:r>
+                    </a:p>
+                  </a:txBody>
+                  <a:tcPr marL="123825" marR="123825" marT="57150" marB="57150" anchor="ctr"/>
+                </a:tc>
+                <a:extLst>
+                  <a:ext uri="{0D108BD9-81ED-4DB2-BD59-A6C34878D82A}">
+                    <a16:rowId xmlns:a16="http://schemas.microsoft.com/office/drawing/2014/main" val="1153338487"/>
+                  </a:ext>
+                </a:extLst>
+              </a:tr>
+              <a:tr h="0">
+                <a:tc>
+                  <a:txBody>
+                    <a:bodyPr/>
+                    <a:lstStyle/>
+                    <a:p>
+                      <a:pPr>
+                        <a:buNone/>
+                      </a:pPr>
+                      <a:r>
+                        <a:rPr lang="pt-BR">
+                          <a:effectLst/>
+                        </a:rPr>
+                        <a:t>IAM Role / Policy</a:t>
+                      </a:r>
+                    </a:p>
+                  </a:txBody>
+                  <a:tcPr marL="123825" marR="123825" marT="57150" marB="57150" anchor="ctr"/>
+                </a:tc>
+                <a:tc>
+                  <a:txBody>
+                    <a:bodyPr/>
+                    <a:lstStyle/>
+                    <a:p>
+                      <a:pPr>
+                        <a:buNone/>
+                      </a:pPr>
+                      <a:r>
+                        <a:rPr lang="pt-BR">
+                          <a:effectLst/>
+                        </a:rPr>
+                        <a:t>Permissões mínimas necessárias para execução segura (princípio do menor privilégio).</a:t>
+                      </a:r>
+                    </a:p>
+                  </a:txBody>
+                  <a:tcPr marL="123825" marR="123825" marT="57150" marB="57150" anchor="ctr"/>
+                </a:tc>
+                <a:extLst>
+                  <a:ext uri="{0D108BD9-81ED-4DB2-BD59-A6C34878D82A}">
+                    <a16:rowId xmlns:a16="http://schemas.microsoft.com/office/drawing/2014/main" val="778390868"/>
+                  </a:ext>
+                </a:extLst>
+              </a:tr>
+              <a:tr h="0">
+                <a:tc>
+                  <a:txBody>
+                    <a:bodyPr/>
+                    <a:lstStyle/>
+                    <a:p>
+                      <a:pPr>
+                        <a:buNone/>
+                      </a:pPr>
+                      <a:r>
+                        <a:rPr lang="pt-BR">
+                          <a:effectLst/>
+                        </a:rPr>
+                        <a:t>Security Group</a:t>
+                      </a:r>
+                    </a:p>
+                  </a:txBody>
+                  <a:tcPr marL="123825" marR="123825" marT="57150" marB="57150" anchor="ctr"/>
+                </a:tc>
+                <a:tc>
+                  <a:txBody>
+                    <a:bodyPr/>
+                    <a:lstStyle/>
+                    <a:p>
+                      <a:pPr>
+                        <a:buNone/>
+                      </a:pPr>
+                      <a:r>
+                        <a:rPr lang="pt-BR">
+                          <a:effectLst/>
+                        </a:rPr>
+                        <a:t>Regras de firewall para expor apenas as portas necessárias (80, 443, 22 restrito).</a:t>
+                      </a:r>
+                    </a:p>
+                  </a:txBody>
+                  <a:tcPr marL="123825" marR="123825" marT="57150" marB="57150" anchor="ctr"/>
+                </a:tc>
+                <a:extLst>
+                  <a:ext uri="{0D108BD9-81ED-4DB2-BD59-A6C34878D82A}">
+                    <a16:rowId xmlns:a16="http://schemas.microsoft.com/office/drawing/2014/main" val="453858552"/>
+                  </a:ext>
+                </a:extLst>
+              </a:tr>
+              <a:tr h="0">
+                <a:tc>
+                  <a:txBody>
+                    <a:bodyPr/>
+                    <a:lstStyle/>
+                    <a:p>
+                      <a:pPr>
+                        <a:buNone/>
+                      </a:pPr>
+                      <a:r>
+                        <a:rPr lang="pt-BR">
+                          <a:effectLst/>
+                        </a:rPr>
+                        <a:t>CloudFormation Stack</a:t>
+                      </a:r>
+                    </a:p>
+                  </a:txBody>
+                  <a:tcPr marL="123825" marR="123825" marT="57150" marB="57150" anchor="ctr"/>
+                </a:tc>
+                <a:tc>
+                  <a:txBody>
+                    <a:bodyPr/>
+                    <a:lstStyle/>
+                    <a:p>
+                      <a:pPr>
+                        <a:buNone/>
+                      </a:pPr>
+                      <a:r>
+                        <a:rPr lang="pt-BR" dirty="0">
+                          <a:effectLst/>
+                        </a:rPr>
+                        <a:t>Stack parametrizável com variáveis de ambiente (</a:t>
+                      </a:r>
+                      <a:r>
+                        <a:rPr lang="pt-BR" dirty="0" err="1">
+                          <a:effectLst/>
+                        </a:rPr>
+                        <a:t>dev</a:t>
+                      </a:r>
+                      <a:r>
+                        <a:rPr lang="pt-BR" dirty="0">
+                          <a:effectLst/>
+                        </a:rPr>
+                        <a:t>/</a:t>
+                      </a:r>
+                      <a:r>
+                        <a:rPr lang="pt-BR" dirty="0" err="1">
+                          <a:effectLst/>
+                        </a:rPr>
+                        <a:t>staging</a:t>
+                      </a:r>
+                      <a:r>
+                        <a:rPr lang="pt-BR" dirty="0">
+                          <a:effectLst/>
+                        </a:rPr>
+                        <a:t>/</a:t>
+                      </a:r>
+                      <a:r>
+                        <a:rPr lang="pt-BR" dirty="0" err="1">
+                          <a:effectLst/>
+                        </a:rPr>
+                        <a:t>prod</a:t>
+                      </a:r>
+                      <a:r>
+                        <a:rPr lang="pt-BR" dirty="0">
+                          <a:effectLst/>
+                        </a:rPr>
+                        <a:t>).</a:t>
+                      </a:r>
+                    </a:p>
+                  </a:txBody>
+                  <a:tcPr marL="123825" marR="123825" marT="57150" marB="57150" anchor="ctr"/>
+                </a:tc>
+                <a:extLst>
+                  <a:ext uri="{0D108BD9-81ED-4DB2-BD59-A6C34878D82A}">
+                    <a16:rowId xmlns:a16="http://schemas.microsoft.com/office/drawing/2014/main" val="1154046601"/>
+                  </a:ext>
+                </a:extLst>
+              </a:tr>
+            </a:tbl>
+          </a:graphicData>
+        </a:graphic>
+      </p:graphicFrame>
+    </p:spTree>
+    <p:extLst>
+      <p:ext uri="{BB962C8B-B14F-4D97-AF65-F5344CB8AC3E}">
+        <p14:creationId xmlns:p14="http://schemas.microsoft.com/office/powerpoint/2010/main" val="1961475540"/>
+      </p:ext>
+    </p:extLst>
+  </p:cSld>
+  <p:clrMapOvr>
+    <a:masterClrMapping/>
+  </p:clrMapOvr>
+</p:sld>
+</file>
+
+<file path=ppt/slides/slide11.xml><?xml version="1.0" encoding="utf-8"?>
+<p:sld xmlns:a="http://schemas.openxmlformats.org/drawingml/2006/main" xmlns:r="http://schemas.openxmlformats.org/officeDocument/2006/relationships" xmlns:p="http://schemas.openxmlformats.org/presentationml/2006/main">
+  <p:cSld>
+    <p:spTree>
+      <p:nvGrpSpPr>
+        <p:cNvPr id="1" name="">
+          <a:extLst>
+            <a:ext uri="{FF2B5EF4-FFF2-40B4-BE49-F238E27FC236}">
+              <a16:creationId xmlns:a16="http://schemas.microsoft.com/office/drawing/2014/main" id="{5E3F78EF-9156-B818-1BE7-0301B564B0AC}"/>
+            </a:ext>
+          </a:extLst>
+        </p:cNvPr>
+        <p:cNvGrpSpPr/>
+        <p:nvPr/>
+      </p:nvGrpSpPr>
+      <p:grpSpPr>
+        <a:xfrm>
+          <a:off x="0" y="0"/>
+          <a:ext cx="0" cy="0"/>
+          <a:chOff x="0" y="0"/>
+          <a:chExt cx="0" cy="0"/>
+        </a:xfrm>
+      </p:grpSpPr>
+      <p:sp>
+        <p:nvSpPr>
+          <p:cNvPr id="3" name="Espaço Reservado para Texto 2">
+            <a:extLst>
+              <a:ext uri="{FF2B5EF4-FFF2-40B4-BE49-F238E27FC236}">
+                <a16:creationId xmlns:a16="http://schemas.microsoft.com/office/drawing/2014/main" id="{41C178A6-7FD1-7C96-8918-DD4BFFBABF67}"/>
+              </a:ext>
+            </a:extLst>
+          </p:cNvPr>
+          <p:cNvSpPr>
+            <a:spLocks noGrp="1"/>
+          </p:cNvSpPr>
+          <p:nvPr>
+            <p:ph type="body" sz="quarter" idx="10"/>
+          </p:nvPr>
+        </p:nvSpPr>
+        <p:spPr/>
+        <p:txBody>
+          <a:bodyPr/>
+          <a:lstStyle/>
+          <a:p>
+            <a:r>
+              <a:rPr lang="pt-BR" b="1" dirty="0"/>
+              <a:t>3.4 Requisitos de Segurança</a:t>
+            </a:r>
+          </a:p>
+          <a:p>
+            <a:pPr marL="285750" indent="-285750">
+              <a:buFont typeface="Arial" panose="020B0604020202020204" pitchFamily="34" charset="0"/>
+              <a:buChar char="•"/>
+            </a:pPr>
+            <a:r>
+              <a:rPr lang="pt-BR" dirty="0"/>
+              <a:t>Nenhuma credencial ou chave secreta deve estar escrita diretamente no código-fonte.</a:t>
+            </a:r>
+          </a:p>
+          <a:p>
+            <a:pPr marL="285750" indent="-285750">
+              <a:buFont typeface="Arial" panose="020B0604020202020204" pitchFamily="34" charset="0"/>
+              <a:buChar char="•"/>
+            </a:pPr>
+            <a:r>
+              <a:rPr lang="pt-BR" dirty="0"/>
+              <a:t>Todas as credenciais AWS devem ser armazenadas como GitHub Secrets e acessadas via variáveis de ambiente no workflow.</a:t>
+            </a:r>
+          </a:p>
+          <a:p>
+            <a:pPr marL="285750" indent="-285750">
+              <a:buFont typeface="Arial" panose="020B0604020202020204" pitchFamily="34" charset="0"/>
+              <a:buChar char="•"/>
+            </a:pPr>
+            <a:r>
+              <a:rPr lang="pt-BR" dirty="0"/>
+              <a:t>O </a:t>
+            </a:r>
+            <a:r>
+              <a:rPr lang="pt-BR" dirty="0" err="1"/>
+              <a:t>bucket</a:t>
+            </a:r>
+            <a:r>
+              <a:rPr lang="pt-BR" dirty="0"/>
+              <a:t> S3 não deve ser público; acesso controlado por IAM.</a:t>
+            </a:r>
+          </a:p>
+          <a:p>
+            <a:pPr marL="285750" indent="-285750">
+              <a:buFont typeface="Arial" panose="020B0604020202020204" pitchFamily="34" charset="0"/>
+              <a:buChar char="•"/>
+            </a:pPr>
+            <a:r>
+              <a:rPr lang="pt-BR" dirty="0"/>
+              <a:t>A instância EC2 deve ter acesso SSH restrito a </a:t>
+            </a:r>
+            <a:r>
+              <a:rPr lang="pt-BR" dirty="0" err="1"/>
+              <a:t>IPs</a:t>
+            </a:r>
+            <a:r>
+              <a:rPr lang="pt-BR" dirty="0"/>
+              <a:t> específicos ou via AWS Systems Manager.</a:t>
+            </a:r>
+          </a:p>
+          <a:p>
+            <a:pPr marL="285750" indent="-285750">
+              <a:buFont typeface="Arial" panose="020B0604020202020204" pitchFamily="34" charset="0"/>
+              <a:buChar char="•"/>
+            </a:pPr>
+            <a:r>
+              <a:rPr lang="pt-BR" dirty="0"/>
+              <a:t>Dependências do projeto devem ser verificadas quanto a vulnerabilidades conhecidas (</a:t>
+            </a:r>
+            <a:r>
+              <a:rPr lang="pt-BR" dirty="0" err="1"/>
+              <a:t>npm</a:t>
+            </a:r>
+            <a:r>
+              <a:rPr lang="pt-BR" dirty="0"/>
+              <a:t> </a:t>
+            </a:r>
+            <a:r>
+              <a:rPr lang="pt-BR" dirty="0" err="1"/>
+              <a:t>audit</a:t>
+            </a:r>
+            <a:r>
+              <a:rPr lang="pt-BR" dirty="0"/>
+              <a:t> / </a:t>
+            </a:r>
+            <a:r>
+              <a:rPr lang="pt-BR" dirty="0" err="1"/>
+              <a:t>pip</a:t>
+            </a:r>
+            <a:r>
+              <a:rPr lang="pt-BR" dirty="0"/>
+              <a:t> </a:t>
+            </a:r>
+            <a:r>
+              <a:rPr lang="pt-BR" dirty="0" err="1"/>
+              <a:t>audit</a:t>
+            </a:r>
+            <a:r>
+              <a:rPr lang="pt-BR" dirty="0"/>
+              <a:t>).</a:t>
+            </a:r>
+          </a:p>
+          <a:p>
+            <a:r>
+              <a:rPr lang="pt-BR" b="1" dirty="0"/>
+              <a:t>Nota — AWS </a:t>
+            </a:r>
+            <a:r>
+              <a:rPr lang="pt-BR" b="1" dirty="0" err="1"/>
+              <a:t>Academy</a:t>
+            </a:r>
+            <a:r>
+              <a:rPr lang="pt-BR" b="1" dirty="0"/>
+              <a:t> (</a:t>
+            </a:r>
+            <a:r>
+              <a:rPr lang="pt-BR" b="1" dirty="0" err="1"/>
+              <a:t>Learner</a:t>
+            </a:r>
+            <a:r>
+              <a:rPr lang="pt-BR" b="1" dirty="0"/>
+              <a:t> </a:t>
+            </a:r>
+            <a:r>
+              <a:rPr lang="pt-BR" b="1" dirty="0" err="1"/>
+              <a:t>Lab</a:t>
+            </a:r>
+            <a:r>
+              <a:rPr lang="pt-BR" b="1" dirty="0"/>
+              <a:t>):</a:t>
+            </a:r>
+            <a:r>
+              <a:rPr lang="pt-BR" dirty="0"/>
+              <a:t> o ambiente não permite criar usuários IAM nem </a:t>
+            </a:r>
+            <a:r>
+              <a:rPr lang="pt-BR" dirty="0" err="1"/>
+              <a:t>access</a:t>
+            </a:r>
+            <a:r>
+              <a:rPr lang="pt-BR" dirty="0"/>
+              <a:t> </a:t>
+            </a:r>
+            <a:r>
+              <a:rPr lang="pt-BR" dirty="0" err="1"/>
+              <a:t>keys</a:t>
+            </a:r>
+            <a:r>
+              <a:rPr lang="pt-BR" dirty="0"/>
+              <a:t> permanentes. As credenciais são temporárias e obtidas diretamente no </a:t>
+            </a:r>
+            <a:r>
+              <a:rPr lang="pt-BR" dirty="0" err="1"/>
+              <a:t>Learner</a:t>
+            </a:r>
+            <a:r>
+              <a:rPr lang="pt-BR" dirty="0"/>
+              <a:t> Lab. Consulte a seção </a:t>
+            </a:r>
+            <a:r>
+              <a:rPr lang="pt-BR" u="sng" dirty="0">
+                <a:hlinkClick r:id="rId2"/>
+              </a:rPr>
+              <a:t>5.4 Credenciais AWS </a:t>
+            </a:r>
+            <a:r>
+              <a:rPr lang="pt-BR" u="sng" dirty="0" err="1">
+                <a:hlinkClick r:id="rId2"/>
+              </a:rPr>
+              <a:t>Academy</a:t>
+            </a:r>
+            <a:r>
+              <a:rPr lang="pt-BR" dirty="0"/>
+              <a:t> para o procedimento completo.</a:t>
+            </a:r>
+          </a:p>
+          <a:p>
+            <a:endParaRPr lang="pt-BR" dirty="0"/>
+          </a:p>
+        </p:txBody>
+      </p:sp>
+    </p:spTree>
+    <p:extLst>
+      <p:ext uri="{BB962C8B-B14F-4D97-AF65-F5344CB8AC3E}">
+        <p14:creationId xmlns:p14="http://schemas.microsoft.com/office/powerpoint/2010/main" val="1690372770"/>
+      </p:ext>
+    </p:extLst>
+  </p:cSld>
+  <p:clrMapOvr>
+    <a:masterClrMapping/>
+  </p:clrMapOvr>
+</p:sld>
+</file>
+
+<file path=ppt/slides/slide12.xml><?xml version="1.0" encoding="utf-8"?>
+<p:sld xmlns:a="http://schemas.openxmlformats.org/drawingml/2006/main" xmlns:r="http://schemas.openxmlformats.org/officeDocument/2006/relationships" xmlns:p="http://schemas.openxmlformats.org/presentationml/2006/main">
+  <p:cSld>
+    <p:spTree>
+      <p:nvGrpSpPr>
+        <p:cNvPr id="1" name=""/>
+        <p:cNvGrpSpPr/>
+        <p:nvPr/>
+      </p:nvGrpSpPr>
+      <p:grpSpPr>
+        <a:xfrm>
+          <a:off x="0" y="0"/>
+          <a:ext cx="0" cy="0"/>
+          <a:chOff x="0" y="0"/>
+          <a:chExt cx="0" cy="0"/>
+        </a:xfrm>
+      </p:grpSpPr>
+      <p:sp>
+        <p:nvSpPr>
+          <p:cNvPr id="3" name="Espaço Reservado para Texto 2">
+            <a:extLst>
+              <a:ext uri="{FF2B5EF4-FFF2-40B4-BE49-F238E27FC236}">
+                <a16:creationId xmlns:a16="http://schemas.microsoft.com/office/drawing/2014/main" id="{ED0C734D-B74A-49B4-81F9-B095FD7D62E3}"/>
+              </a:ext>
+            </a:extLst>
+          </p:cNvPr>
+          <p:cNvSpPr>
+            <a:spLocks noGrp="1"/>
+          </p:cNvSpPr>
+          <p:nvPr>
+            <p:ph type="body" sz="quarter" idx="10"/>
+          </p:nvPr>
+        </p:nvSpPr>
+        <p:spPr/>
+        <p:txBody>
+          <a:bodyPr/>
+          <a:lstStyle/>
+          <a:p>
+            <a:r>
+              <a:rPr lang="pt-BR" b="1" dirty="0"/>
+              <a:t>4.2 Etapas do Pipeline CI</a:t>
+            </a:r>
+          </a:p>
+          <a:p>
+            <a:r>
+              <a:rPr lang="pt-BR" dirty="0"/>
+              <a:t>Trigger (</a:t>
+            </a:r>
+            <a:r>
+              <a:rPr lang="pt-BR" dirty="0" err="1"/>
+              <a:t>push</a:t>
+            </a:r>
+            <a:r>
+              <a:rPr lang="pt-BR" dirty="0"/>
+              <a:t> / PR / </a:t>
+            </a:r>
+            <a:r>
+              <a:rPr lang="pt-BR" dirty="0" err="1"/>
+              <a:t>workflow_dispatch</a:t>
+            </a:r>
+            <a:r>
+              <a:rPr lang="pt-BR" dirty="0"/>
+              <a:t>)</a:t>
+            </a:r>
+          </a:p>
+          <a:p>
+            <a:r>
+              <a:rPr lang="pt-BR" dirty="0"/>
+              <a:t>       │</a:t>
+            </a:r>
+          </a:p>
+          <a:p>
+            <a:r>
+              <a:rPr lang="pt-BR" dirty="0"/>
+              <a:t>       ▼</a:t>
+            </a:r>
+          </a:p>
+          <a:p>
+            <a:r>
+              <a:rPr lang="pt-BR" dirty="0"/>
+              <a:t>┌─────────────────────────────────────────────────────────┐</a:t>
+            </a:r>
+          </a:p>
+          <a:p>
+            <a:r>
+              <a:rPr lang="pt-BR" dirty="0"/>
+              <a:t>│            GitHub </a:t>
+            </a:r>
+            <a:r>
+              <a:rPr lang="pt-BR" dirty="0" err="1"/>
+              <a:t>Actions</a:t>
+            </a:r>
+            <a:r>
+              <a:rPr lang="pt-BR" dirty="0"/>
+              <a:t> — </a:t>
+            </a:r>
+            <a:r>
+              <a:rPr lang="pt-BR" dirty="0" err="1"/>
+              <a:t>ci.yml</a:t>
+            </a:r>
+            <a:r>
+              <a:rPr lang="pt-BR" dirty="0"/>
+              <a:t>                                                                       │</a:t>
+            </a:r>
+          </a:p>
+          <a:p>
+            <a:r>
+              <a:rPr lang="pt-BR" dirty="0"/>
+              <a:t>│                                                                                                                              │</a:t>
+            </a:r>
+          </a:p>
+          <a:p>
+            <a:r>
+              <a:rPr lang="pt-BR" dirty="0"/>
+              <a:t>│  1. Checkout          → Clona o repositório                                                     │</a:t>
+            </a:r>
+          </a:p>
+          <a:p>
+            <a:r>
+              <a:rPr lang="pt-BR" dirty="0"/>
+              <a:t>│  2. Setup Ambiente    → Node.js 20 (com cache </a:t>
+            </a:r>
+            <a:r>
+              <a:rPr lang="pt-BR" dirty="0" err="1"/>
+              <a:t>npm</a:t>
+            </a:r>
+            <a:r>
+              <a:rPr lang="pt-BR" dirty="0"/>
+              <a:t>)                              │</a:t>
+            </a:r>
+          </a:p>
+          <a:p>
+            <a:r>
+              <a:rPr lang="pt-BR" dirty="0"/>
+              <a:t>│  3. Instalar </a:t>
+            </a:r>
+            <a:r>
+              <a:rPr lang="pt-BR" dirty="0" err="1"/>
+              <a:t>Deps</a:t>
+            </a:r>
+            <a:r>
+              <a:rPr lang="pt-BR" dirty="0"/>
+              <a:t>     → </a:t>
+            </a:r>
+            <a:r>
+              <a:rPr lang="pt-BR" dirty="0" err="1"/>
+              <a:t>npm</a:t>
+            </a:r>
+            <a:r>
+              <a:rPr lang="pt-BR" dirty="0"/>
+              <a:t> </a:t>
+            </a:r>
+            <a:r>
+              <a:rPr lang="pt-BR" dirty="0" err="1"/>
+              <a:t>install</a:t>
+            </a:r>
+            <a:r>
+              <a:rPr lang="pt-BR" dirty="0"/>
+              <a:t>                                                                   │</a:t>
+            </a:r>
+          </a:p>
+          <a:p>
+            <a:r>
+              <a:rPr lang="pt-BR" dirty="0"/>
+              <a:t>│  4. Lint              → </a:t>
+            </a:r>
+            <a:r>
+              <a:rPr lang="pt-BR" dirty="0" err="1"/>
+              <a:t>HTMLHint</a:t>
+            </a:r>
+            <a:r>
+              <a:rPr lang="pt-BR" dirty="0"/>
+              <a:t> (index.html)                                                     │</a:t>
+            </a:r>
+          </a:p>
+          <a:p>
+            <a:r>
+              <a:rPr lang="pt-BR" dirty="0"/>
+              <a:t>│  5. Testes Unitários  → </a:t>
+            </a:r>
+            <a:r>
+              <a:rPr lang="pt-BR" dirty="0" err="1"/>
+              <a:t>Jest</a:t>
+            </a:r>
+            <a:r>
+              <a:rPr lang="pt-BR" dirty="0"/>
+              <a:t> + cobertura (</a:t>
+            </a:r>
+            <a:r>
+              <a:rPr lang="pt-BR" dirty="0" err="1"/>
+              <a:t>jsdom</a:t>
+            </a:r>
+            <a:r>
+              <a:rPr lang="pt-BR" dirty="0"/>
+              <a:t>)                                         │</a:t>
+            </a:r>
+          </a:p>
+          <a:p>
+            <a:r>
+              <a:rPr lang="pt-BR" dirty="0"/>
+              <a:t>│  6. Auditoria         → </a:t>
+            </a:r>
+            <a:r>
+              <a:rPr lang="pt-BR" dirty="0" err="1"/>
+              <a:t>npm</a:t>
+            </a:r>
+            <a:r>
+              <a:rPr lang="pt-BR" dirty="0"/>
+              <a:t> </a:t>
+            </a:r>
+            <a:r>
+              <a:rPr lang="pt-BR" dirty="0" err="1"/>
+              <a:t>audit</a:t>
+            </a:r>
+            <a:r>
+              <a:rPr lang="pt-BR" dirty="0"/>
+              <a:t> --</a:t>
+            </a:r>
+            <a:r>
+              <a:rPr lang="pt-BR" dirty="0" err="1"/>
+              <a:t>audit-level</a:t>
+            </a:r>
+            <a:r>
+              <a:rPr lang="pt-BR" dirty="0"/>
+              <a:t>=</a:t>
+            </a:r>
+            <a:r>
+              <a:rPr lang="pt-BR" dirty="0" err="1"/>
+              <a:t>moderate</a:t>
+            </a:r>
+            <a:r>
+              <a:rPr lang="pt-BR" dirty="0"/>
+              <a:t>                            │</a:t>
+            </a:r>
+          </a:p>
+          <a:p>
+            <a:r>
+              <a:rPr lang="pt-BR" dirty="0"/>
+              <a:t>│  7. Artefato          → Upload do relatório de cobertura                               │</a:t>
+            </a:r>
+          </a:p>
+          <a:p>
+            <a:r>
+              <a:rPr lang="pt-BR" dirty="0"/>
+              <a:t>│  8. Notificação       → Status no GitHub PR/</a:t>
+            </a:r>
+            <a:r>
+              <a:rPr lang="pt-BR" dirty="0" err="1"/>
+              <a:t>commit</a:t>
+            </a:r>
+            <a:r>
+              <a:rPr lang="pt-BR" dirty="0"/>
+              <a:t>                                     │</a:t>
+            </a:r>
+          </a:p>
+          <a:p>
+            <a:r>
+              <a:rPr lang="pt-BR" dirty="0"/>
+              <a:t>└─────────────────────────────────────────────────────────┘</a:t>
+            </a:r>
+          </a:p>
+        </p:txBody>
+      </p:sp>
+    </p:spTree>
+    <p:extLst>
+      <p:ext uri="{BB962C8B-B14F-4D97-AF65-F5344CB8AC3E}">
+        <p14:creationId xmlns:p14="http://schemas.microsoft.com/office/powerpoint/2010/main" val="600266859"/>
+      </p:ext>
+    </p:extLst>
+  </p:cSld>
+  <p:clrMapOvr>
+    <a:masterClrMapping/>
+  </p:clrMapOvr>
+</p:sld>
+</file>
+
+<file path=ppt/slides/slide13.xml><?xml version="1.0" encoding="utf-8"?>
+<p:sld xmlns:a="http://schemas.openxmlformats.org/drawingml/2006/main" xmlns:r="http://schemas.openxmlformats.org/officeDocument/2006/relationships" xmlns:p="http://schemas.openxmlformats.org/presentationml/2006/main">
+  <p:cSld>
+    <p:spTree>
+      <p:nvGrpSpPr>
+        <p:cNvPr id="1" name="">
+          <a:extLst>
+            <a:ext uri="{FF2B5EF4-FFF2-40B4-BE49-F238E27FC236}">
+              <a16:creationId xmlns:a16="http://schemas.microsoft.com/office/drawing/2014/main" id="{1B60F7E0-A4FE-F635-6251-8E992E98EC2F}"/>
+            </a:ext>
+          </a:extLst>
+        </p:cNvPr>
+        <p:cNvGrpSpPr/>
+        <p:nvPr/>
+      </p:nvGrpSpPr>
+      <p:grpSpPr>
+        <a:xfrm>
+          <a:off x="0" y="0"/>
+          <a:ext cx="0" cy="0"/>
+          <a:chOff x="0" y="0"/>
+          <a:chExt cx="0" cy="0"/>
+        </a:xfrm>
+      </p:grpSpPr>
+      <p:sp>
+        <p:nvSpPr>
+          <p:cNvPr id="3" name="Espaço Reservado para Texto 2">
+            <a:extLst>
+              <a:ext uri="{FF2B5EF4-FFF2-40B4-BE49-F238E27FC236}">
+                <a16:creationId xmlns:a16="http://schemas.microsoft.com/office/drawing/2014/main" id="{BA9C01A9-EA58-3E0D-A01D-E4C7FE765D39}"/>
+              </a:ext>
+            </a:extLst>
+          </p:cNvPr>
+          <p:cNvSpPr>
+            <a:spLocks noGrp="1"/>
+          </p:cNvSpPr>
+          <p:nvPr>
+            <p:ph type="body" sz="quarter" idx="10"/>
+          </p:nvPr>
+        </p:nvSpPr>
+        <p:spPr/>
+        <p:txBody>
+          <a:bodyPr/>
+          <a:lstStyle/>
+          <a:p>
+            <a:endParaRPr lang="pt-BR" dirty="0"/>
+          </a:p>
+        </p:txBody>
+      </p:sp>
+      <p:graphicFrame>
+        <p:nvGraphicFramePr>
+          <p:cNvPr id="2" name="Tabela 1">
+            <a:extLst>
+              <a:ext uri="{FF2B5EF4-FFF2-40B4-BE49-F238E27FC236}">
+                <a16:creationId xmlns:a16="http://schemas.microsoft.com/office/drawing/2014/main" id="{55084A93-0F17-03E9-3E49-07E1637E0E66}"/>
+              </a:ext>
+            </a:extLst>
+          </p:cNvPr>
+          <p:cNvGraphicFramePr>
+            <a:graphicFrameLocks noGrp="1"/>
+          </p:cNvGraphicFramePr>
+          <p:nvPr>
+            <p:extLst>
+              <p:ext uri="{D42A27DB-BD31-4B8C-83A1-F6EECF244321}">
+                <p14:modId xmlns:p14="http://schemas.microsoft.com/office/powerpoint/2010/main" val="1373408901"/>
+              </p:ext>
+            </p:extLst>
+          </p:nvPr>
+        </p:nvGraphicFramePr>
+        <p:xfrm>
+          <a:off x="2194334" y="2555875"/>
+          <a:ext cx="12013382" cy="6091239"/>
+        </p:xfrm>
+        <a:graphic>
+          <a:graphicData uri="http://schemas.openxmlformats.org/drawingml/2006/table">
+            <a:tbl>
+              <a:tblPr>
+                <a:tableStyleId>{1FECB4D8-DB02-4DC6-A0A2-4F2EBAE1DC90}</a:tableStyleId>
+              </a:tblPr>
+              <a:tblGrid>
+                <a:gridCol w="6006691">
+                  <a:extLst>
+                    <a:ext uri="{9D8B030D-6E8A-4147-A177-3AD203B41FA5}">
+                      <a16:colId xmlns:a16="http://schemas.microsoft.com/office/drawing/2014/main" val="4042806318"/>
+                    </a:ext>
+                  </a:extLst>
+                </a:gridCol>
+                <a:gridCol w="6006691">
+                  <a:extLst>
+                    <a:ext uri="{9D8B030D-6E8A-4147-A177-3AD203B41FA5}">
+                      <a16:colId xmlns:a16="http://schemas.microsoft.com/office/drawing/2014/main" val="1666094814"/>
+                    </a:ext>
+                  </a:extLst>
+                </a:gridCol>
+              </a:tblGrid>
+              <a:tr h="423164">
+                <a:tc>
+                  <a:txBody>
+                    <a:bodyPr/>
+                    <a:lstStyle/>
+                    <a:p>
+                      <a:pPr>
+                        <a:buNone/>
+                      </a:pPr>
+                      <a:r>
+                        <a:rPr lang="pt-BR" sz="2100" b="1">
+                          <a:effectLst/>
+                        </a:rPr>
+                        <a:t>Etapa</a:t>
+                      </a:r>
+                    </a:p>
+                  </a:txBody>
+                  <a:tcPr marL="105144" marR="105144" marT="48528" marB="48528" anchor="ctr"/>
+                </a:tc>
+                <a:tc>
+                  <a:txBody>
+                    <a:bodyPr/>
+                    <a:lstStyle/>
+                    <a:p>
+                      <a:pPr>
+                        <a:buNone/>
+                      </a:pPr>
+                      <a:r>
+                        <a:rPr lang="pt-BR" sz="2100" b="1">
+                          <a:effectLst/>
+                        </a:rPr>
+                        <a:t>Descrição</a:t>
+                      </a:r>
+                    </a:p>
+                  </a:txBody>
+                  <a:tcPr marL="105144" marR="105144" marT="48528" marB="48528" anchor="ctr"/>
+                </a:tc>
+                <a:extLst>
+                  <a:ext uri="{0D108BD9-81ED-4DB2-BD59-A6C34878D82A}">
+                    <a16:rowId xmlns:a16="http://schemas.microsoft.com/office/drawing/2014/main" val="2669032989"/>
+                  </a:ext>
+                </a:extLst>
+              </a:tr>
+              <a:tr h="749273">
+                <a:tc>
+                  <a:txBody>
+                    <a:bodyPr/>
+                    <a:lstStyle/>
+                    <a:p>
+                      <a:pPr>
+                        <a:buNone/>
+                      </a:pPr>
+                      <a:r>
+                        <a:rPr lang="pt-BR" sz="2100">
+                          <a:effectLst/>
+                        </a:rPr>
+                        <a:t>1. Checkout</a:t>
+                      </a:r>
+                    </a:p>
+                  </a:txBody>
+                  <a:tcPr marL="105144" marR="105144" marT="48528" marB="48528" anchor="ctr"/>
+                </a:tc>
+                <a:tc>
+                  <a:txBody>
+                    <a:bodyPr/>
+                    <a:lstStyle/>
+                    <a:p>
+                      <a:pPr>
+                        <a:buNone/>
+                      </a:pPr>
+                      <a:r>
+                        <a:rPr lang="pt-BR" sz="2100">
+                          <a:effectLst/>
+                        </a:rPr>
+                        <a:t>Clona o repositório e prepara o ambiente no runner do GitHub Actions.</a:t>
+                      </a:r>
+                    </a:p>
+                  </a:txBody>
+                  <a:tcPr marL="105144" marR="105144" marT="48528" marB="48528" anchor="ctr"/>
+                </a:tc>
+                <a:extLst>
+                  <a:ext uri="{0D108BD9-81ED-4DB2-BD59-A6C34878D82A}">
+                    <a16:rowId xmlns:a16="http://schemas.microsoft.com/office/drawing/2014/main" val="3489112420"/>
+                  </a:ext>
+                </a:extLst>
+              </a:tr>
+              <a:tr h="749273">
+                <a:tc>
+                  <a:txBody>
+                    <a:bodyPr/>
+                    <a:lstStyle/>
+                    <a:p>
+                      <a:pPr>
+                        <a:buNone/>
+                      </a:pPr>
+                      <a:r>
+                        <a:rPr lang="pt-BR" sz="2100" dirty="0">
+                          <a:effectLst/>
+                        </a:rPr>
+                        <a:t>2. Setup do Ambiente</a:t>
+                      </a:r>
+                    </a:p>
+                  </a:txBody>
+                  <a:tcPr marL="105144" marR="105144" marT="48528" marB="48528" anchor="ctr"/>
+                </a:tc>
+                <a:tc>
+                  <a:txBody>
+                    <a:bodyPr/>
+                    <a:lstStyle/>
+                    <a:p>
+                      <a:pPr>
+                        <a:buNone/>
+                      </a:pPr>
+                      <a:r>
+                        <a:rPr lang="pt-BR" sz="2100">
+                          <a:effectLst/>
+                        </a:rPr>
+                        <a:t>Instala Node.js 20 com cache de pacotes npm para execuções mais rápidas.</a:t>
+                      </a:r>
+                    </a:p>
+                  </a:txBody>
+                  <a:tcPr marL="105144" marR="105144" marT="48528" marB="48528" anchor="ctr"/>
+                </a:tc>
+                <a:extLst>
+                  <a:ext uri="{0D108BD9-81ED-4DB2-BD59-A6C34878D82A}">
+                    <a16:rowId xmlns:a16="http://schemas.microsoft.com/office/drawing/2014/main" val="4027014910"/>
+                  </a:ext>
+                </a:extLst>
+              </a:tr>
+              <a:tr h="423164">
+                <a:tc>
+                  <a:txBody>
+                    <a:bodyPr/>
+                    <a:lstStyle/>
+                    <a:p>
+                      <a:pPr>
+                        <a:buNone/>
+                      </a:pPr>
+                      <a:r>
+                        <a:rPr lang="pt-BR" sz="2100">
+                          <a:effectLst/>
+                        </a:rPr>
+                        <a:t>3. Instalação de Dependências</a:t>
+                      </a:r>
+                    </a:p>
+                  </a:txBody>
+                  <a:tcPr marL="105144" marR="105144" marT="48528" marB="48528" anchor="ctr"/>
+                </a:tc>
+                <a:tc>
+                  <a:txBody>
+                    <a:bodyPr/>
+                    <a:lstStyle/>
+                    <a:p>
+                      <a:pPr>
+                        <a:buNone/>
+                      </a:pPr>
+                      <a:r>
+                        <a:rPr lang="pt-BR" sz="2100">
+                          <a:effectLst/>
+                        </a:rPr>
+                        <a:t>Executa npm install para instalar Jest e HTMLHint.</a:t>
+                      </a:r>
+                    </a:p>
+                  </a:txBody>
+                  <a:tcPr marL="105144" marR="105144" marT="48528" marB="48528" anchor="ctr"/>
+                </a:tc>
+                <a:extLst>
+                  <a:ext uri="{0D108BD9-81ED-4DB2-BD59-A6C34878D82A}">
+                    <a16:rowId xmlns:a16="http://schemas.microsoft.com/office/drawing/2014/main" val="3294993784"/>
+                  </a:ext>
+                </a:extLst>
+              </a:tr>
+              <a:tr h="749273">
+                <a:tc>
+                  <a:txBody>
+                    <a:bodyPr/>
+                    <a:lstStyle/>
+                    <a:p>
+                      <a:pPr>
+                        <a:buNone/>
+                      </a:pPr>
+                      <a:r>
+                        <a:rPr lang="pt-BR" sz="2100">
+                          <a:effectLst/>
+                        </a:rPr>
+                        <a:t>4. Lint</a:t>
+                      </a:r>
+                    </a:p>
+                  </a:txBody>
+                  <a:tcPr marL="105144" marR="105144" marT="48528" marB="48528" anchor="ctr"/>
+                </a:tc>
+                <a:tc>
+                  <a:txBody>
+                    <a:bodyPr/>
+                    <a:lstStyle/>
+                    <a:p>
+                      <a:pPr>
+                        <a:buNone/>
+                      </a:pPr>
+                      <a:r>
+                        <a:rPr lang="pt-BR" sz="2100">
+                          <a:effectLst/>
+                        </a:rPr>
+                        <a:t>Valida a qualidade e estrutura do HTML com HTMLHint usando as regras de .htmlhintrc.</a:t>
+                      </a:r>
+                    </a:p>
+                  </a:txBody>
+                  <a:tcPr marL="105144" marR="105144" marT="48528" marB="48528" anchor="ctr"/>
+                </a:tc>
+                <a:extLst>
+                  <a:ext uri="{0D108BD9-81ED-4DB2-BD59-A6C34878D82A}">
+                    <a16:rowId xmlns:a16="http://schemas.microsoft.com/office/drawing/2014/main" val="1711636558"/>
+                  </a:ext>
+                </a:extLst>
+              </a:tr>
+              <a:tr h="749273">
+                <a:tc>
+                  <a:txBody>
+                    <a:bodyPr/>
+                    <a:lstStyle/>
+                    <a:p>
+                      <a:pPr>
+                        <a:buNone/>
+                      </a:pPr>
+                      <a:r>
+                        <a:rPr lang="pt-BR" sz="2100">
+                          <a:effectLst/>
+                        </a:rPr>
+                        <a:t>5. Testes Unitários</a:t>
+                      </a:r>
+                    </a:p>
+                  </a:txBody>
+                  <a:tcPr marL="105144" marR="105144" marT="48528" marB="48528" anchor="ctr"/>
+                </a:tc>
+                <a:tc>
+                  <a:txBody>
+                    <a:bodyPr/>
+                    <a:lstStyle/>
+                    <a:p>
+                      <a:pPr>
+                        <a:buNone/>
+                      </a:pPr>
+                      <a:r>
+                        <a:rPr lang="pt-BR" sz="2100">
+                          <a:effectLst/>
+                        </a:rPr>
+                        <a:t>Executa 19 testes com Jest em ambiente jsdom e gera relatório de cobertura (mínimo 60%).</a:t>
+                      </a:r>
+                    </a:p>
+                  </a:txBody>
+                  <a:tcPr marL="105144" marR="105144" marT="48528" marB="48528" anchor="ctr"/>
+                </a:tc>
+                <a:extLst>
+                  <a:ext uri="{0D108BD9-81ED-4DB2-BD59-A6C34878D82A}">
+                    <a16:rowId xmlns:a16="http://schemas.microsoft.com/office/drawing/2014/main" val="2175218392"/>
+                  </a:ext>
+                </a:extLst>
+              </a:tr>
+              <a:tr h="749273">
+                <a:tc>
+                  <a:txBody>
+                    <a:bodyPr/>
+                    <a:lstStyle/>
+                    <a:p>
+                      <a:pPr>
+                        <a:buNone/>
+                      </a:pPr>
+                      <a:r>
+                        <a:rPr lang="pt-BR" sz="2100">
+                          <a:effectLst/>
+                        </a:rPr>
+                        <a:t>6. Verificação de Segurança</a:t>
+                      </a:r>
+                    </a:p>
+                  </a:txBody>
+                  <a:tcPr marL="105144" marR="105144" marT="48528" marB="48528" anchor="ctr"/>
+                </a:tc>
+                <a:tc>
+                  <a:txBody>
+                    <a:bodyPr/>
+                    <a:lstStyle/>
+                    <a:p>
+                      <a:pPr>
+                        <a:buNone/>
+                      </a:pPr>
+                      <a:r>
+                        <a:rPr lang="pt-BR" sz="2100">
+                          <a:effectLst/>
+                        </a:rPr>
+                        <a:t>Executa npm audit para identificar vulnerabilidades nas dependências.</a:t>
+                      </a:r>
+                    </a:p>
+                  </a:txBody>
+                  <a:tcPr marL="105144" marR="105144" marT="48528" marB="48528" anchor="ctr"/>
+                </a:tc>
+                <a:extLst>
+                  <a:ext uri="{0D108BD9-81ED-4DB2-BD59-A6C34878D82A}">
+                    <a16:rowId xmlns:a16="http://schemas.microsoft.com/office/drawing/2014/main" val="2646925540"/>
+                  </a:ext>
+                </a:extLst>
+              </a:tr>
+              <a:tr h="749273">
+                <a:tc>
+                  <a:txBody>
+                    <a:bodyPr/>
+                    <a:lstStyle/>
+                    <a:p>
+                      <a:pPr>
+                        <a:buNone/>
+                      </a:pPr>
+                      <a:r>
+                        <a:rPr lang="pt-BR" sz="2100">
+                          <a:effectLst/>
+                        </a:rPr>
+                        <a:t>7. Artefato de Cobertura</a:t>
+                      </a:r>
+                    </a:p>
+                  </a:txBody>
+                  <a:tcPr marL="105144" marR="105144" marT="48528" marB="48528" anchor="ctr"/>
+                </a:tc>
+                <a:tc>
+                  <a:txBody>
+                    <a:bodyPr/>
+                    <a:lstStyle/>
+                    <a:p>
+                      <a:pPr>
+                        <a:buNone/>
+                      </a:pPr>
+                      <a:r>
+                        <a:rPr lang="pt-BR" sz="2100">
+                          <a:effectLst/>
+                        </a:rPr>
+                        <a:t>Faz upload do relatório de cobertura como artefato no GitHub Actions (retido 7 dias).</a:t>
+                      </a:r>
+                    </a:p>
+                  </a:txBody>
+                  <a:tcPr marL="105144" marR="105144" marT="48528" marB="48528" anchor="ctr"/>
+                </a:tc>
+                <a:extLst>
+                  <a:ext uri="{0D108BD9-81ED-4DB2-BD59-A6C34878D82A}">
+                    <a16:rowId xmlns:a16="http://schemas.microsoft.com/office/drawing/2014/main" val="4221556080"/>
+                  </a:ext>
+                </a:extLst>
+              </a:tr>
+              <a:tr h="749273">
+                <a:tc>
+                  <a:txBody>
+                    <a:bodyPr/>
+                    <a:lstStyle/>
+                    <a:p>
+                      <a:pPr>
+                        <a:buNone/>
+                      </a:pPr>
+                      <a:r>
+                        <a:rPr lang="pt-BR" sz="2100">
+                          <a:effectLst/>
+                        </a:rPr>
+                        <a:t>8. Notificação</a:t>
+                      </a:r>
+                    </a:p>
+                  </a:txBody>
+                  <a:tcPr marL="105144" marR="105144" marT="48528" marB="48528" anchor="ctr"/>
+                </a:tc>
+                <a:tc>
+                  <a:txBody>
+                    <a:bodyPr/>
+                    <a:lstStyle/>
+                    <a:p>
+                      <a:pPr>
+                        <a:buNone/>
+                      </a:pPr>
+                      <a:r>
+                        <a:rPr lang="pt-BR" sz="2100" dirty="0">
+                          <a:effectLst/>
+                        </a:rPr>
+                        <a:t>GitHub </a:t>
+                      </a:r>
+                      <a:r>
+                        <a:rPr lang="pt-BR" sz="2100" dirty="0" err="1">
+                          <a:effectLst/>
+                        </a:rPr>
+                        <a:t>Actions</a:t>
+                      </a:r>
+                      <a:r>
+                        <a:rPr lang="pt-BR" sz="2100" dirty="0">
+                          <a:effectLst/>
+                        </a:rPr>
+                        <a:t> reporta sucesso ou falha no </a:t>
+                      </a:r>
+                      <a:r>
+                        <a:rPr lang="pt-BR" sz="2100" dirty="0" err="1">
+                          <a:effectLst/>
+                        </a:rPr>
+                        <a:t>commit</a:t>
+                      </a:r>
+                      <a:r>
+                        <a:rPr lang="pt-BR" sz="2100" dirty="0">
+                          <a:effectLst/>
+                        </a:rPr>
+                        <a:t> e no </a:t>
+                      </a:r>
+                      <a:r>
+                        <a:rPr lang="pt-BR" sz="2100" dirty="0" err="1">
+                          <a:effectLst/>
+                        </a:rPr>
+                        <a:t>Pull</a:t>
+                      </a:r>
+                      <a:r>
+                        <a:rPr lang="pt-BR" sz="2100" dirty="0">
+                          <a:effectLst/>
+                        </a:rPr>
+                        <a:t> </a:t>
+                      </a:r>
+                      <a:r>
+                        <a:rPr lang="pt-BR" sz="2100" dirty="0" err="1">
+                          <a:effectLst/>
+                        </a:rPr>
+                        <a:t>Request</a:t>
+                      </a:r>
+                      <a:r>
+                        <a:rPr lang="pt-BR" sz="2100" dirty="0">
+                          <a:effectLst/>
+                        </a:rPr>
+                        <a:t> automaticamente.</a:t>
+                      </a:r>
+                    </a:p>
+                  </a:txBody>
+                  <a:tcPr marL="105144" marR="105144" marT="48528" marB="48528" anchor="ctr"/>
+                </a:tc>
+                <a:extLst>
+                  <a:ext uri="{0D108BD9-81ED-4DB2-BD59-A6C34878D82A}">
+                    <a16:rowId xmlns:a16="http://schemas.microsoft.com/office/drawing/2014/main" val="100170507"/>
+                  </a:ext>
+                </a:extLst>
+              </a:tr>
+            </a:tbl>
+          </a:graphicData>
+        </a:graphic>
+      </p:graphicFrame>
+    </p:spTree>
+    <p:extLst>
+      <p:ext uri="{BB962C8B-B14F-4D97-AF65-F5344CB8AC3E}">
+        <p14:creationId xmlns:p14="http://schemas.microsoft.com/office/powerpoint/2010/main" val="667494311"/>
+      </p:ext>
+    </p:extLst>
+  </p:cSld>
+  <p:clrMapOvr>
+    <a:masterClrMapping/>
+  </p:clrMapOvr>
+</p:sld>
+</file>
+
+<file path=ppt/slides/slide14.xml><?xml version="1.0" encoding="utf-8"?>
+<p:sld xmlns:a="http://schemas.openxmlformats.org/drawingml/2006/main" xmlns:r="http://schemas.openxmlformats.org/officeDocument/2006/relationships" xmlns:p="http://schemas.openxmlformats.org/presentationml/2006/main">
+  <p:cSld>
+    <p:spTree>
+      <p:nvGrpSpPr>
+        <p:cNvPr id="1" name="">
+          <a:extLst>
+            <a:ext uri="{FF2B5EF4-FFF2-40B4-BE49-F238E27FC236}">
+              <a16:creationId xmlns:a16="http://schemas.microsoft.com/office/drawing/2014/main" id="{CB3CAC15-CFFB-DF0E-D37A-0F78B9C2E875}"/>
+            </a:ext>
+          </a:extLst>
+        </p:cNvPr>
+        <p:cNvGrpSpPr/>
+        <p:nvPr/>
+      </p:nvGrpSpPr>
+      <p:grpSpPr>
+        <a:xfrm>
+          <a:off x="0" y="0"/>
+          <a:ext cx="0" cy="0"/>
+          <a:chOff x="0" y="0"/>
+          <a:chExt cx="0" cy="0"/>
+        </a:xfrm>
+      </p:grpSpPr>
+      <p:sp>
+        <p:nvSpPr>
+          <p:cNvPr id="3" name="Espaço Reservado para Texto 2">
+            <a:extLst>
+              <a:ext uri="{FF2B5EF4-FFF2-40B4-BE49-F238E27FC236}">
+                <a16:creationId xmlns:a16="http://schemas.microsoft.com/office/drawing/2014/main" id="{F0487FBA-B941-88F0-A1E0-9C1671D37687}"/>
+              </a:ext>
+            </a:extLst>
+          </p:cNvPr>
+          <p:cNvSpPr>
+            <a:spLocks noGrp="1"/>
+          </p:cNvSpPr>
+          <p:nvPr>
+            <p:ph type="body" sz="quarter" idx="10"/>
+          </p:nvPr>
+        </p:nvSpPr>
+        <p:spPr/>
+        <p:txBody>
+          <a:bodyPr/>
+          <a:lstStyle/>
+          <a:p>
+            <a:r>
+              <a:rPr lang="pt-BR" b="1" dirty="0"/>
+              <a:t>4.3 Gatilhos do Pipeline</a:t>
+            </a:r>
+          </a:p>
+          <a:p>
+            <a:r>
+              <a:rPr lang="pt-BR" dirty="0"/>
+              <a:t>O pipeline é composto por dois </a:t>
+            </a:r>
+            <a:r>
+              <a:rPr lang="pt-BR" dirty="0" err="1"/>
+              <a:t>jobs</a:t>
+            </a:r>
+            <a:r>
+              <a:rPr lang="pt-BR" dirty="0"/>
+              <a:t> independentes que executam em paralelo:</a:t>
+            </a:r>
+          </a:p>
+          <a:p>
+            <a:pPr marL="285750" indent="-285750">
+              <a:buFont typeface="Arial" panose="020B0604020202020204" pitchFamily="34" charset="0"/>
+              <a:buChar char="•"/>
+            </a:pPr>
+            <a:r>
+              <a:rPr lang="pt-BR" b="1" dirty="0" err="1"/>
+              <a:t>ci</a:t>
+            </a:r>
+            <a:r>
+              <a:rPr lang="pt-BR" dirty="0"/>
+              <a:t> — Lint, testes e auditoria de segurança da aplicação Node.js</a:t>
+            </a:r>
+          </a:p>
+          <a:p>
+            <a:pPr marL="285750" indent="-285750">
+              <a:buFont typeface="Arial" panose="020B0604020202020204" pitchFamily="34" charset="0"/>
+              <a:buChar char="•"/>
+            </a:pPr>
+            <a:r>
+              <a:rPr lang="pt-BR" b="1" dirty="0" err="1"/>
+              <a:t>iac-validation</a:t>
+            </a:r>
+            <a:r>
+              <a:rPr lang="pt-BR" dirty="0"/>
+              <a:t> — Validação dos </a:t>
+            </a:r>
+            <a:r>
+              <a:rPr lang="pt-BR" dirty="0" err="1"/>
+              <a:t>templates</a:t>
+            </a:r>
+            <a:r>
+              <a:rPr lang="pt-BR" dirty="0"/>
+              <a:t> </a:t>
+            </a:r>
+            <a:r>
+              <a:rPr lang="pt-BR" dirty="0" err="1"/>
+              <a:t>CloudFormation</a:t>
+            </a:r>
+            <a:r>
+              <a:rPr lang="pt-BR" dirty="0"/>
+              <a:t> com </a:t>
+            </a:r>
+            <a:r>
+              <a:rPr lang="pt-BR" dirty="0" err="1"/>
+              <a:t>cfn-lint</a:t>
+            </a:r>
+            <a:endParaRPr lang="pt-BR" dirty="0"/>
+          </a:p>
+          <a:p>
+            <a:r>
+              <a:rPr lang="pt-BR" dirty="0"/>
+              <a:t>Ambos são acionados por:</a:t>
+            </a:r>
+          </a:p>
+          <a:p>
+            <a:pPr marL="285750" indent="-285750">
+              <a:buFont typeface="Arial" panose="020B0604020202020204" pitchFamily="34" charset="0"/>
+              <a:buChar char="•"/>
+            </a:pPr>
+            <a:r>
+              <a:rPr lang="pt-BR" dirty="0" err="1"/>
+              <a:t>Push</a:t>
+            </a:r>
+            <a:r>
+              <a:rPr lang="pt-BR" dirty="0"/>
+              <a:t> para as </a:t>
+            </a:r>
+            <a:r>
+              <a:rPr lang="pt-BR" dirty="0" err="1"/>
+              <a:t>branches</a:t>
+            </a:r>
+            <a:r>
+              <a:rPr lang="pt-BR" dirty="0"/>
+              <a:t> </a:t>
+            </a:r>
+            <a:r>
+              <a:rPr lang="pt-BR" dirty="0" err="1"/>
+              <a:t>main</a:t>
+            </a:r>
+            <a:r>
+              <a:rPr lang="pt-BR" dirty="0"/>
+              <a:t> e </a:t>
+            </a:r>
+            <a:r>
+              <a:rPr lang="pt-BR" dirty="0" err="1"/>
+              <a:t>develop</a:t>
+            </a:r>
+            <a:endParaRPr lang="pt-BR" dirty="0"/>
+          </a:p>
+          <a:p>
+            <a:pPr marL="285750" indent="-285750">
+              <a:buFont typeface="Arial" panose="020B0604020202020204" pitchFamily="34" charset="0"/>
+              <a:buChar char="•"/>
+            </a:pPr>
+            <a:r>
+              <a:rPr lang="pt-BR" dirty="0"/>
+              <a:t>Abertura ou atualização de </a:t>
+            </a:r>
+            <a:r>
+              <a:rPr lang="pt-BR" dirty="0" err="1"/>
+              <a:t>Pull</a:t>
+            </a:r>
+            <a:r>
+              <a:rPr lang="pt-BR" dirty="0"/>
+              <a:t> </a:t>
+            </a:r>
+            <a:r>
+              <a:rPr lang="pt-BR" dirty="0" err="1"/>
+              <a:t>Request</a:t>
+            </a:r>
+            <a:r>
+              <a:rPr lang="pt-BR" dirty="0"/>
+              <a:t> direcionado para </a:t>
+            </a:r>
+            <a:r>
+              <a:rPr lang="pt-BR" dirty="0" err="1"/>
+              <a:t>main</a:t>
+            </a:r>
+            <a:endParaRPr lang="pt-BR" dirty="0"/>
+          </a:p>
+          <a:p>
+            <a:pPr marL="285750" indent="-285750">
+              <a:buFont typeface="Arial" panose="020B0604020202020204" pitchFamily="34" charset="0"/>
+              <a:buChar char="•"/>
+            </a:pPr>
+            <a:r>
+              <a:rPr lang="pt-BR" dirty="0"/>
+              <a:t>Execução manual via </a:t>
+            </a:r>
+            <a:r>
+              <a:rPr lang="pt-BR" dirty="0" err="1"/>
+              <a:t>workflow_dispatch</a:t>
+            </a:r>
+            <a:r>
+              <a:rPr lang="pt-BR" dirty="0"/>
+              <a:t> (botão no GitHub </a:t>
+            </a:r>
+            <a:r>
+              <a:rPr lang="pt-BR" dirty="0" err="1"/>
+              <a:t>Actions</a:t>
+            </a:r>
+            <a:r>
+              <a:rPr lang="pt-BR" dirty="0"/>
+              <a:t>)</a:t>
+            </a:r>
+          </a:p>
+          <a:p>
+            <a:endParaRPr lang="pt-BR" dirty="0"/>
+          </a:p>
+        </p:txBody>
+      </p:sp>
+      <p:pic>
+        <p:nvPicPr>
+          <p:cNvPr id="4" name="Imagem 3">
+            <a:extLst>
+              <a:ext uri="{FF2B5EF4-FFF2-40B4-BE49-F238E27FC236}">
+                <a16:creationId xmlns:a16="http://schemas.microsoft.com/office/drawing/2014/main" id="{E7CA5C10-18CD-AF29-6F69-8BEF03472E81}"/>
+              </a:ext>
+            </a:extLst>
+          </p:cNvPr>
+          <p:cNvPicPr>
+            <a:picLocks noChangeAspect="1"/>
+          </p:cNvPicPr>
+          <p:nvPr/>
+        </p:nvPicPr>
+        <p:blipFill>
+          <a:blip r:embed="rId2"/>
+          <a:stretch>
+            <a:fillRect/>
+          </a:stretch>
+        </p:blipFill>
+        <p:spPr>
+          <a:xfrm>
+            <a:off x="5653058" y="4800600"/>
+            <a:ext cx="5719437" cy="3664709"/>
+          </a:xfrm>
+          <a:prstGeom prst="rect">
+            <a:avLst/>
+          </a:prstGeom>
+        </p:spPr>
+      </p:pic>
+    </p:spTree>
+    <p:extLst>
+      <p:ext uri="{BB962C8B-B14F-4D97-AF65-F5344CB8AC3E}">
+        <p14:creationId xmlns:p14="http://schemas.microsoft.com/office/powerpoint/2010/main" val="3106316518"/>
+      </p:ext>
+    </p:extLst>
+  </p:cSld>
+  <p:clrMapOvr>
+    <a:masterClrMapping/>
+  </p:clrMapOvr>
+</p:sld>
+</file>
+
+<file path=ppt/slides/slide15.xml><?xml version="1.0" encoding="utf-8"?>
+<p:sld xmlns:a="http://schemas.openxmlformats.org/drawingml/2006/main" xmlns:r="http://schemas.openxmlformats.org/officeDocument/2006/relationships" xmlns:p="http://schemas.openxmlformats.org/presentationml/2006/main">
+  <p:cSld>
+    <p:spTree>
+      <p:nvGrpSpPr>
+        <p:cNvPr id="1" name=""/>
+        <p:cNvGrpSpPr/>
+        <p:nvPr/>
+      </p:nvGrpSpPr>
+      <p:grpSpPr>
+        <a:xfrm>
+          <a:off x="0" y="0"/>
+          <a:ext cx="0" cy="0"/>
+          <a:chOff x="0" y="0"/>
+          <a:chExt cx="0" cy="0"/>
+        </a:xfrm>
+      </p:grpSpPr>
+      <p:sp>
+        <p:nvSpPr>
+          <p:cNvPr id="3" name="Espaço Reservado para Texto 2">
+            <a:extLst>
+              <a:ext uri="{FF2B5EF4-FFF2-40B4-BE49-F238E27FC236}">
+                <a16:creationId xmlns:a16="http://schemas.microsoft.com/office/drawing/2014/main" id="{B0123114-87BF-4523-A231-EA598A2BD858}"/>
+              </a:ext>
+            </a:extLst>
+          </p:cNvPr>
+          <p:cNvSpPr>
+            <a:spLocks noGrp="1"/>
+          </p:cNvSpPr>
+          <p:nvPr>
+            <p:ph type="body" sz="quarter" idx="10"/>
+          </p:nvPr>
+        </p:nvSpPr>
+        <p:spPr>
+          <a:xfrm>
+            <a:off x="928688" y="2439902"/>
+            <a:ext cx="14544674" cy="6840000"/>
+          </a:xfrm>
+        </p:spPr>
+        <p:txBody>
+          <a:bodyPr/>
+          <a:lstStyle/>
+          <a:p>
+            <a:r>
+              <a:rPr lang="pt-BR" b="1" dirty="0"/>
+              <a:t>5. Infraestrutura como Código</a:t>
+            </a:r>
+          </a:p>
+          <a:p>
+            <a:r>
+              <a:rPr lang="pt-BR" b="1" dirty="0"/>
+              <a:t>5.1 Estrutura dos </a:t>
+            </a:r>
+            <a:r>
+              <a:rPr lang="pt-BR" b="1" dirty="0" err="1"/>
+              <a:t>Templates</a:t>
+            </a:r>
+            <a:endParaRPr lang="pt-BR" b="1" dirty="0"/>
+          </a:p>
+          <a:p>
+            <a:r>
+              <a:rPr lang="pt-BR" dirty="0"/>
+              <a:t>A infraestrutura é inteiramente definida como código usando AWS </a:t>
+            </a:r>
+            <a:r>
+              <a:rPr lang="pt-BR" dirty="0" err="1"/>
+              <a:t>CloudFormation</a:t>
+            </a:r>
+            <a:r>
+              <a:rPr lang="pt-BR" dirty="0"/>
+              <a:t>, garantindo rastreabilidade, reprodutibilidade e consistência entre ambientes. Os </a:t>
+            </a:r>
+            <a:r>
+              <a:rPr lang="pt-BR" dirty="0" err="1"/>
+              <a:t>templates</a:t>
+            </a:r>
+            <a:r>
+              <a:rPr lang="pt-BR" dirty="0"/>
+              <a:t> estão organizados em camadas independentes:</a:t>
+            </a:r>
+          </a:p>
+          <a:p>
+            <a:endParaRPr lang="pt-BR" dirty="0"/>
+          </a:p>
+          <a:p>
+            <a:endParaRPr lang="pt-BR" dirty="0"/>
+          </a:p>
+          <a:p>
+            <a:endParaRPr lang="pt-BR" dirty="0"/>
+          </a:p>
+          <a:p>
+            <a:endParaRPr lang="pt-BR" dirty="0"/>
+          </a:p>
+          <a:p>
+            <a:endParaRPr lang="pt-BR" dirty="0"/>
+          </a:p>
+          <a:p>
+            <a:endParaRPr lang="pt-BR" dirty="0"/>
+          </a:p>
+          <a:p>
+            <a:endParaRPr lang="pt-BR" dirty="0"/>
+          </a:p>
+          <a:p>
+            <a:endParaRPr lang="pt-BR" dirty="0"/>
+          </a:p>
+          <a:p>
+            <a:endParaRPr lang="pt-BR" dirty="0"/>
+          </a:p>
+          <a:p>
+            <a:endParaRPr lang="pt-BR" dirty="0"/>
+          </a:p>
+          <a:p>
+            <a:endParaRPr lang="pt-BR" dirty="0"/>
+          </a:p>
+          <a:p>
+            <a:endParaRPr lang="pt-BR" dirty="0"/>
+          </a:p>
+          <a:p>
+            <a:endParaRPr lang="pt-BR" dirty="0"/>
+          </a:p>
+          <a:p>
+            <a:endParaRPr lang="pt-BR" dirty="0"/>
+          </a:p>
+          <a:p>
+            <a:endParaRPr lang="pt-BR" dirty="0"/>
+          </a:p>
+          <a:p>
+            <a:r>
+              <a:rPr lang="pt-BR" b="1" dirty="0"/>
+              <a:t>5.2 Parâmetros Configuráveis</a:t>
+            </a:r>
+          </a:p>
+          <a:p>
+            <a:r>
+              <a:rPr lang="pt-BR" dirty="0"/>
+              <a:t>Todos os </a:t>
+            </a:r>
+            <a:r>
+              <a:rPr lang="pt-BR" dirty="0" err="1"/>
+              <a:t>templates</a:t>
+            </a:r>
+            <a:r>
+              <a:rPr lang="pt-BR" dirty="0"/>
+              <a:t> aceitam o parâmetro </a:t>
+            </a:r>
+            <a:r>
+              <a:rPr lang="pt-BR" dirty="0" err="1"/>
+              <a:t>Environment</a:t>
+            </a:r>
+            <a:r>
+              <a:rPr lang="pt-BR" dirty="0"/>
+              <a:t> com os valores </a:t>
+            </a:r>
+            <a:r>
+              <a:rPr lang="pt-BR" dirty="0" err="1"/>
+              <a:t>production</a:t>
+            </a:r>
+            <a:r>
+              <a:rPr lang="pt-BR" dirty="0"/>
+              <a:t>, </a:t>
+            </a:r>
+            <a:r>
+              <a:rPr lang="pt-BR" dirty="0" err="1"/>
+              <a:t>staging</a:t>
+            </a:r>
+            <a:r>
+              <a:rPr lang="pt-BR" dirty="0"/>
+              <a:t> ou </a:t>
+            </a:r>
+            <a:r>
+              <a:rPr lang="pt-BR" dirty="0" err="1"/>
+              <a:t>development</a:t>
+            </a:r>
+            <a:r>
+              <a:rPr lang="pt-BR" dirty="0"/>
+              <a:t>, garantindo o isolamento entre ambientes.</a:t>
+            </a:r>
+          </a:p>
+          <a:p>
+            <a:endParaRPr lang="pt-BR" dirty="0"/>
+          </a:p>
+          <a:p>
+            <a:endParaRPr lang="pt-BR" dirty="0"/>
+          </a:p>
+          <a:p>
+            <a:endParaRPr lang="pt-BR" dirty="0"/>
+          </a:p>
+        </p:txBody>
+      </p:sp>
+      <p:pic>
+        <p:nvPicPr>
+          <p:cNvPr id="4" name="Imagem 3">
+            <a:extLst>
+              <a:ext uri="{FF2B5EF4-FFF2-40B4-BE49-F238E27FC236}">
+                <a16:creationId xmlns:a16="http://schemas.microsoft.com/office/drawing/2014/main" id="{4962E595-E068-998E-18B9-0577732FBA8B}"/>
+              </a:ext>
+            </a:extLst>
+          </p:cNvPr>
+          <p:cNvPicPr>
+            <a:picLocks noChangeAspect="1"/>
+          </p:cNvPicPr>
+          <p:nvPr/>
+        </p:nvPicPr>
+        <p:blipFill>
+          <a:blip r:embed="rId2"/>
+          <a:stretch>
+            <a:fillRect/>
+          </a:stretch>
+        </p:blipFill>
+        <p:spPr>
+          <a:xfrm>
+            <a:off x="4443537" y="3832619"/>
+            <a:ext cx="7924800" cy="1638300"/>
+          </a:xfrm>
+          <a:prstGeom prst="rect">
+            <a:avLst/>
+          </a:prstGeom>
+        </p:spPr>
+      </p:pic>
+      <p:graphicFrame>
+        <p:nvGraphicFramePr>
+          <p:cNvPr id="5" name="Tabela 4">
+            <a:extLst>
+              <a:ext uri="{FF2B5EF4-FFF2-40B4-BE49-F238E27FC236}">
+                <a16:creationId xmlns:a16="http://schemas.microsoft.com/office/drawing/2014/main" id="{74EA80A4-C754-8181-C466-FA354B867BA2}"/>
+              </a:ext>
+            </a:extLst>
+          </p:cNvPr>
+          <p:cNvGraphicFramePr>
+            <a:graphicFrameLocks noGrp="1"/>
+          </p:cNvGraphicFramePr>
+          <p:nvPr>
+            <p:extLst>
+              <p:ext uri="{D42A27DB-BD31-4B8C-83A1-F6EECF244321}">
+                <p14:modId xmlns:p14="http://schemas.microsoft.com/office/powerpoint/2010/main" val="1683461083"/>
+              </p:ext>
+            </p:extLst>
+          </p:nvPr>
+        </p:nvGraphicFramePr>
+        <p:xfrm>
+          <a:off x="1127125" y="5470919"/>
+          <a:ext cx="14147800" cy="2875788"/>
+        </p:xfrm>
+        <a:graphic>
+          <a:graphicData uri="http://schemas.openxmlformats.org/drawingml/2006/table">
+            <a:tbl>
+              <a:tblPr>
+                <a:tableStyleId>{1FECB4D8-DB02-4DC6-A0A2-4F2EBAE1DC90}</a:tableStyleId>
+              </a:tblPr>
+              <a:tblGrid>
+                <a:gridCol w="3090033">
+                  <a:extLst>
+                    <a:ext uri="{9D8B030D-6E8A-4147-A177-3AD203B41FA5}">
+                      <a16:colId xmlns:a16="http://schemas.microsoft.com/office/drawing/2014/main" val="3688835446"/>
+                    </a:ext>
+                  </a:extLst>
+                </a:gridCol>
+                <a:gridCol w="11057767">
+                  <a:extLst>
+                    <a:ext uri="{9D8B030D-6E8A-4147-A177-3AD203B41FA5}">
+                      <a16:colId xmlns:a16="http://schemas.microsoft.com/office/drawing/2014/main" val="1226153716"/>
+                    </a:ext>
+                  </a:extLst>
+                </a:gridCol>
+              </a:tblGrid>
+              <a:tr h="0">
+                <a:tc>
+                  <a:txBody>
+                    <a:bodyPr/>
+                    <a:lstStyle/>
+                    <a:p>
+                      <a:pPr>
+                        <a:buNone/>
+                      </a:pPr>
+                      <a:r>
+                        <a:rPr lang="pt-BR" b="1" dirty="0" err="1">
+                          <a:effectLst/>
+                        </a:rPr>
+                        <a:t>Template</a:t>
+                      </a:r>
+                      <a:endParaRPr lang="pt-BR" b="1" dirty="0">
+                        <a:effectLst/>
+                      </a:endParaRPr>
+                    </a:p>
+                  </a:txBody>
+                  <a:tcPr marL="123825" marR="123825" marT="57150" marB="57150" anchor="ctr"/>
+                </a:tc>
+                <a:tc>
+                  <a:txBody>
+                    <a:bodyPr/>
+                    <a:lstStyle/>
+                    <a:p>
+                      <a:pPr>
+                        <a:buNone/>
+                      </a:pPr>
+                      <a:r>
+                        <a:rPr lang="pt-BR" b="1">
+                          <a:effectLst/>
+                        </a:rPr>
+                        <a:t>Recursos AWS Criados</a:t>
+                      </a:r>
+                    </a:p>
+                  </a:txBody>
+                  <a:tcPr marL="123825" marR="123825" marT="57150" marB="57150" anchor="ctr"/>
+                </a:tc>
+                <a:extLst>
+                  <a:ext uri="{0D108BD9-81ED-4DB2-BD59-A6C34878D82A}">
+                    <a16:rowId xmlns:a16="http://schemas.microsoft.com/office/drawing/2014/main" val="2745538623"/>
+                  </a:ext>
+                </a:extLst>
+              </a:tr>
+              <a:tr h="0">
+                <a:tc>
+                  <a:txBody>
+                    <a:bodyPr/>
+                    <a:lstStyle/>
+                    <a:p>
+                      <a:pPr>
+                        <a:buNone/>
+                      </a:pPr>
+                      <a:r>
+                        <a:rPr lang="pt-BR">
+                          <a:effectLst/>
+                        </a:rPr>
+                        <a:t>network.yaml</a:t>
+                      </a:r>
+                    </a:p>
+                  </a:txBody>
+                  <a:tcPr marL="123825" marR="123825" marT="57150" marB="57150" anchor="ctr"/>
+                </a:tc>
+                <a:tc>
+                  <a:txBody>
+                    <a:bodyPr/>
+                    <a:lstStyle/>
+                    <a:p>
+                      <a:pPr>
+                        <a:buNone/>
+                      </a:pPr>
+                      <a:r>
+                        <a:rPr lang="pt-BR">
+                          <a:effectLst/>
+                        </a:rPr>
+                        <a:t>AWS::EC2::VPC, AWS::EC2::Subnet, AWS::EC2::InternetGateway, AWS::EC2::Route</a:t>
+                      </a:r>
+                    </a:p>
+                  </a:txBody>
+                  <a:tcPr marL="123825" marR="123825" marT="57150" marB="57150" anchor="ctr"/>
+                </a:tc>
+                <a:extLst>
+                  <a:ext uri="{0D108BD9-81ED-4DB2-BD59-A6C34878D82A}">
+                    <a16:rowId xmlns:a16="http://schemas.microsoft.com/office/drawing/2014/main" val="1286038858"/>
+                  </a:ext>
+                </a:extLst>
+              </a:tr>
+              <a:tr h="0">
+                <a:tc>
+                  <a:txBody>
+                    <a:bodyPr/>
+                    <a:lstStyle/>
+                    <a:p>
+                      <a:pPr>
+                        <a:buNone/>
+                      </a:pPr>
+                      <a:r>
+                        <a:rPr lang="pt-BR">
+                          <a:effectLst/>
+                        </a:rPr>
+                        <a:t>storage.yaml</a:t>
+                      </a:r>
+                    </a:p>
+                  </a:txBody>
+                  <a:tcPr marL="123825" marR="123825" marT="57150" marB="57150" anchor="ctr"/>
+                </a:tc>
+                <a:tc>
+                  <a:txBody>
+                    <a:bodyPr/>
+                    <a:lstStyle/>
+                    <a:p>
+                      <a:pPr>
+                        <a:buNone/>
+                      </a:pPr>
+                      <a:r>
+                        <a:rPr lang="en-US">
+                          <a:effectLst/>
+                        </a:rPr>
+                        <a:t>AWS::S3::Bucket (site + artefatos), AWS::S3::BucketPolicy</a:t>
+                      </a:r>
+                    </a:p>
+                  </a:txBody>
+                  <a:tcPr marL="123825" marR="123825" marT="57150" marB="57150" anchor="ctr"/>
+                </a:tc>
+                <a:extLst>
+                  <a:ext uri="{0D108BD9-81ED-4DB2-BD59-A6C34878D82A}">
+                    <a16:rowId xmlns:a16="http://schemas.microsoft.com/office/drawing/2014/main" val="240980471"/>
+                  </a:ext>
+                </a:extLst>
+              </a:tr>
+              <a:tr h="0">
+                <a:tc>
+                  <a:txBody>
+                    <a:bodyPr/>
+                    <a:lstStyle/>
+                    <a:p>
+                      <a:pPr>
+                        <a:buNone/>
+                      </a:pPr>
+                      <a:r>
+                        <a:rPr lang="pt-BR">
+                          <a:effectLst/>
+                        </a:rPr>
+                        <a:t>compute.yaml</a:t>
+                      </a:r>
+                    </a:p>
+                  </a:txBody>
+                  <a:tcPr marL="123825" marR="123825" marT="57150" marB="57150" anchor="ctr"/>
+                </a:tc>
+                <a:tc>
+                  <a:txBody>
+                    <a:bodyPr/>
+                    <a:lstStyle/>
+                    <a:p>
+                      <a:pPr>
+                        <a:buNone/>
+                      </a:pPr>
+                      <a:r>
+                        <a:rPr lang="pt-BR">
+                          <a:effectLst/>
+                        </a:rPr>
+                        <a:t>AWS::EC2::Instance (t2.micro), AWS::EC2::SecurityGroup, AWS::IAM::Role, AWS::IAM::InstanceProfile</a:t>
+                      </a:r>
+                    </a:p>
+                  </a:txBody>
+                  <a:tcPr marL="123825" marR="123825" marT="57150" marB="57150" anchor="ctr"/>
+                </a:tc>
+                <a:extLst>
+                  <a:ext uri="{0D108BD9-81ED-4DB2-BD59-A6C34878D82A}">
+                    <a16:rowId xmlns:a16="http://schemas.microsoft.com/office/drawing/2014/main" val="1598360581"/>
+                  </a:ext>
+                </a:extLst>
+              </a:tr>
+              <a:tr h="0">
+                <a:tc>
+                  <a:txBody>
+                    <a:bodyPr/>
+                    <a:lstStyle/>
+                    <a:p>
+                      <a:pPr>
+                        <a:buNone/>
+                      </a:pPr>
+                      <a:r>
+                        <a:rPr lang="pt-BR">
+                          <a:effectLst/>
+                        </a:rPr>
+                        <a:t>main.yaml</a:t>
+                      </a:r>
+                    </a:p>
+                  </a:txBody>
+                  <a:tcPr marL="123825" marR="123825" marT="57150" marB="57150" anchor="ctr"/>
+                </a:tc>
+                <a:tc>
+                  <a:txBody>
+                    <a:bodyPr/>
+                    <a:lstStyle/>
+                    <a:p>
+                      <a:pPr>
+                        <a:buNone/>
+                      </a:pPr>
+                      <a:r>
+                        <a:rPr lang="pt-BR" dirty="0">
+                          <a:effectLst/>
+                        </a:rPr>
+                        <a:t>AWS::</a:t>
+                      </a:r>
+                      <a:r>
+                        <a:rPr lang="pt-BR" dirty="0" err="1">
+                          <a:effectLst/>
+                        </a:rPr>
+                        <a:t>CloudFormation</a:t>
+                      </a:r>
+                      <a:r>
+                        <a:rPr lang="pt-BR" dirty="0">
+                          <a:effectLst/>
+                        </a:rPr>
+                        <a:t>::Stack (</a:t>
+                      </a:r>
+                      <a:r>
+                        <a:rPr lang="pt-BR" dirty="0" err="1">
+                          <a:effectLst/>
+                        </a:rPr>
+                        <a:t>nested</a:t>
+                      </a:r>
+                      <a:r>
+                        <a:rPr lang="pt-BR" dirty="0">
+                          <a:effectLst/>
+                        </a:rPr>
+                        <a:t> — referencia os 3 acima)</a:t>
+                      </a:r>
+                    </a:p>
+                  </a:txBody>
+                  <a:tcPr marL="123825" marR="123825" marT="57150" marB="57150" anchor="ctr"/>
+                </a:tc>
+                <a:extLst>
+                  <a:ext uri="{0D108BD9-81ED-4DB2-BD59-A6C34878D82A}">
+                    <a16:rowId xmlns:a16="http://schemas.microsoft.com/office/drawing/2014/main" val="3089769758"/>
+                  </a:ext>
+                </a:extLst>
+              </a:tr>
+            </a:tbl>
+          </a:graphicData>
+        </a:graphic>
+      </p:graphicFrame>
+    </p:spTree>
+    <p:extLst>
+      <p:ext uri="{BB962C8B-B14F-4D97-AF65-F5344CB8AC3E}">
+        <p14:creationId xmlns:p14="http://schemas.microsoft.com/office/powerpoint/2010/main" val="1375584897"/>
+      </p:ext>
+    </p:extLst>
+  </p:cSld>
+  <p:clrMapOvr>
+    <a:masterClrMapping/>
+  </p:clrMapOvr>
+</p:sld>
+</file>
+
+<file path=ppt/slides/slide16.xml><?xml version="1.0" encoding="utf-8"?>
+<p:sld xmlns:a="http://schemas.openxmlformats.org/drawingml/2006/main" xmlns:r="http://schemas.openxmlformats.org/officeDocument/2006/relationships" xmlns:p="http://schemas.openxmlformats.org/presentationml/2006/main">
+  <p:cSld>
+    <p:spTree>
+      <p:nvGrpSpPr>
+        <p:cNvPr id="1" name=""/>
+        <p:cNvGrpSpPr/>
+        <p:nvPr/>
+      </p:nvGrpSpPr>
+      <p:grpSpPr>
+        <a:xfrm>
+          <a:off x="0" y="0"/>
+          <a:ext cx="0" cy="0"/>
+          <a:chOff x="0" y="0"/>
+          <a:chExt cx="0" cy="0"/>
+        </a:xfrm>
+      </p:grpSpPr>
+    </p:spTree>
+    <p:extLst>
+      <p:ext uri="{BB962C8B-B14F-4D97-AF65-F5344CB8AC3E}">
+        <p14:creationId xmlns:p14="http://schemas.microsoft.com/office/powerpoint/2010/main" val="1999929606"/>
+      </p:ext>
+    </p:extLst>
+  </p:cSld>
+  <p:clrMapOvr>
+    <a:masterClrMapping/>
+  </p:clrMapOvr>
+</p:sld>
+</file>
+
+<file path=ppt/slides/slide17.xml><?xml version="1.0" encoding="utf-8"?>
+<p:sld xmlns:a="http://schemas.openxmlformats.org/drawingml/2006/main" xmlns:r="http://schemas.openxmlformats.org/officeDocument/2006/relationships" xmlns:p="http://schemas.openxmlformats.org/presentationml/2006/main">
+  <p:cSld>
+    <p:spTree>
+      <p:nvGrpSpPr>
+        <p:cNvPr id="1" name=""/>
+        <p:cNvGrpSpPr/>
+        <p:nvPr/>
+      </p:nvGrpSpPr>
+      <p:grpSpPr>
+        <a:xfrm>
+          <a:off x="0" y="0"/>
+          <a:ext cx="0" cy="0"/>
+          <a:chOff x="0" y="0"/>
+          <a:chExt cx="0" cy="0"/>
+        </a:xfrm>
+      </p:grpSpPr>
+      <p:sp>
+        <p:nvSpPr>
+          <p:cNvPr id="2" name="Espaço Reservado para Texto 1">
+            <a:extLst>
+              <a:ext uri="{FF2B5EF4-FFF2-40B4-BE49-F238E27FC236}">
+                <a16:creationId xmlns:a16="http://schemas.microsoft.com/office/drawing/2014/main" id="{0796DCB6-D43A-4EB7-8614-1476A7E4B4E8}"/>
+              </a:ext>
+            </a:extLst>
+          </p:cNvPr>
+          <p:cNvSpPr>
+            <a:spLocks noGrp="1"/>
+          </p:cNvSpPr>
+          <p:nvPr>
+            <p:ph type="body" sz="quarter" idx="10"/>
+          </p:nvPr>
+        </p:nvSpPr>
+        <p:spPr/>
+        <p:txBody>
+          <a:bodyPr/>
+          <a:lstStyle/>
+          <a:p>
+            <a:r>
+              <a:rPr lang="pt-BR" b="1" dirty="0"/>
+              <a:t>https://github.com/Daaaiii/Devops.git</a:t>
+            </a:r>
+          </a:p>
+        </p:txBody>
+      </p:sp>
+      <p:sp>
+        <p:nvSpPr>
+          <p:cNvPr id="3" name="Espaço Reservado para Texto 2">
+            <a:extLst>
+              <a:ext uri="{FF2B5EF4-FFF2-40B4-BE49-F238E27FC236}">
+                <a16:creationId xmlns:a16="http://schemas.microsoft.com/office/drawing/2014/main" id="{2A21E794-B8F1-4074-A736-C3EC5824ADE5}"/>
+              </a:ext>
+            </a:extLst>
+          </p:cNvPr>
+          <p:cNvSpPr>
+            <a:spLocks noGrp="1"/>
+          </p:cNvSpPr>
+          <p:nvPr>
+            <p:ph type="body" sz="quarter" idx="11"/>
+          </p:nvPr>
+        </p:nvSpPr>
+        <p:spPr/>
+        <p:txBody>
+          <a:bodyPr/>
+          <a:lstStyle/>
+          <a:p>
+            <a:endParaRPr lang="pt-BR" dirty="0"/>
+          </a:p>
+        </p:txBody>
+      </p:sp>
+    </p:spTree>
+    <p:extLst>
+      <p:ext uri="{BB962C8B-B14F-4D97-AF65-F5344CB8AC3E}">
+        <p14:creationId xmlns:p14="http://schemas.microsoft.com/office/powerpoint/2010/main" val="1260139504"/>
+      </p:ext>
+    </p:extLst>
+  </p:cSld>
+  <p:clrMapOvr>
+    <a:masterClrMapping/>
+  </p:clrMapOvr>
+</p:sld>
+</file>
+
+<file path=ppt/slides/slide18.xml><?xml version="1.0" encoding="utf-8"?>
+<p:sld xmlns:a="http://schemas.openxmlformats.org/drawingml/2006/main" xmlns:r="http://schemas.openxmlformats.org/officeDocument/2006/relationships" xmlns:p="http://schemas.openxmlformats.org/presentationml/2006/main">
+  <p:cSld>
+    <p:spTree>
+      <p:nvGrpSpPr>
+        <p:cNvPr id="1" name=""/>
+        <p:cNvGrpSpPr/>
+        <p:nvPr/>
+      </p:nvGrpSpPr>
+      <p:grpSpPr>
+        <a:xfrm>
+          <a:off x="0" y="0"/>
+          <a:ext cx="0" cy="0"/>
+          <a:chOff x="0" y="0"/>
+          <a:chExt cx="0" cy="0"/>
+        </a:xfrm>
+      </p:grpSpPr>
+      <p:sp>
+        <p:nvSpPr>
+          <p:cNvPr id="2" name="Espaço Reservado para Texto 1">
+            <a:extLst>
+              <a:ext uri="{FF2B5EF4-FFF2-40B4-BE49-F238E27FC236}">
+                <a16:creationId xmlns:a16="http://schemas.microsoft.com/office/drawing/2014/main" id="{B1C23B81-E62A-4DBE-B9A9-C4B80D49122D}"/>
+              </a:ext>
+            </a:extLst>
+          </p:cNvPr>
+          <p:cNvSpPr>
+            <a:spLocks noGrp="1"/>
+          </p:cNvSpPr>
+          <p:nvPr>
+            <p:ph type="body" sz="quarter" idx="10"/>
+          </p:nvPr>
+        </p:nvSpPr>
+        <p:spPr/>
+        <p:txBody>
+          <a:bodyPr/>
+          <a:lstStyle/>
+          <a:p>
+            <a:endParaRPr lang="pt-BR" dirty="0"/>
+          </a:p>
+        </p:txBody>
+      </p:sp>
+      <p:pic>
+        <p:nvPicPr>
+          <p:cNvPr id="4" name="Imagem 3">
+            <a:extLst>
+              <a:ext uri="{FF2B5EF4-FFF2-40B4-BE49-F238E27FC236}">
+                <a16:creationId xmlns:a16="http://schemas.microsoft.com/office/drawing/2014/main" id="{171DE313-4A14-F9BB-DFCD-39077EFFF66A}"/>
+              </a:ext>
+            </a:extLst>
+          </p:cNvPr>
+          <p:cNvPicPr>
+            <a:picLocks noChangeAspect="1"/>
+          </p:cNvPicPr>
+          <p:nvPr/>
+        </p:nvPicPr>
+        <p:blipFill>
+          <a:blip r:embed="rId2"/>
+          <a:stretch>
+            <a:fillRect/>
+          </a:stretch>
+        </p:blipFill>
+        <p:spPr>
+          <a:xfrm>
+            <a:off x="571286" y="2300062"/>
+            <a:ext cx="14914444" cy="6590839"/>
+          </a:xfrm>
+          <a:prstGeom prst="rect">
+            <a:avLst/>
+          </a:prstGeom>
+        </p:spPr>
+      </p:pic>
+    </p:spTree>
+    <p:extLst>
+      <p:ext uri="{BB962C8B-B14F-4D97-AF65-F5344CB8AC3E}">
+        <p14:creationId xmlns:p14="http://schemas.microsoft.com/office/powerpoint/2010/main" val="3670702398"/>
+      </p:ext>
+    </p:extLst>
+  </p:cSld>
+  <p:clrMapOvr>
+    <a:masterClrMapping/>
+  </p:clrMapOvr>
+</p:sld>
+</file>
+
+<file path=ppt/slides/slide19.xml><?xml version="1.0" encoding="utf-8"?>
+<p:sld xmlns:a="http://schemas.openxmlformats.org/drawingml/2006/main" xmlns:r="http://schemas.openxmlformats.org/officeDocument/2006/relationships" xmlns:p="http://schemas.openxmlformats.org/presentationml/2006/main">
+  <p:cSld>
+    <p:spTree>
+      <p:nvGrpSpPr>
         <p:cNvPr id="1" name=""/>
         <p:cNvGrpSpPr/>
         <p:nvPr/>
@@ -5933,7 +9208,37 @@
 </p:sld>
 </file>
 
-<file path=ppt/slides/slide11.xml><?xml version="1.0" encoding="utf-8"?>
+<file path=ppt/slides/slide2.xml><?xml version="1.0" encoding="utf-8"?>
+<p:sld xmlns:a="http://schemas.openxmlformats.org/drawingml/2006/main" xmlns:r="http://schemas.openxmlformats.org/officeDocument/2006/relationships" xmlns:p="http://schemas.openxmlformats.org/presentationml/2006/main">
+  <p:cSld>
+    <p:spTree>
+      <p:nvGrpSpPr>
+        <p:cNvPr id="1" name=""/>
+        <p:cNvGrpSpPr/>
+        <p:nvPr/>
+      </p:nvGrpSpPr>
+      <p:grpSpPr>
+        <a:xfrm>
+          <a:off x="0" y="0"/>
+          <a:ext cx="0" cy="0"/>
+          <a:chOff x="0" y="0"/>
+          <a:chExt cx="0" cy="0"/>
+        </a:xfrm>
+      </p:grpSpPr>
+    </p:spTree>
+    <p:extLst>
+      <p:ext uri="{BB962C8B-B14F-4D97-AF65-F5344CB8AC3E}">
+        <p14:creationId xmlns:p14="http://schemas.microsoft.com/office/powerpoint/2010/main" val="2615047958"/>
+      </p:ext>
+    </p:extLst>
+  </p:cSld>
+  <p:clrMapOvr>
+    <a:masterClrMapping/>
+  </p:clrMapOvr>
+</p:sld>
+</file>
+
+<file path=ppt/slides/slide20.xml><?xml version="1.0" encoding="utf-8"?>
 <p:sld xmlns:a="http://schemas.openxmlformats.org/drawingml/2006/main" xmlns:r="http://schemas.openxmlformats.org/officeDocument/2006/relationships" xmlns:p="http://schemas.openxmlformats.org/presentationml/2006/main">
   <p:cSld>
     <p:spTree>
@@ -6013,7 +9318,7 @@
 </p:sld>
 </file>
 
-<file path=ppt/slides/slide12.xml><?xml version="1.0" encoding="utf-8"?>
+<file path=ppt/slides/slide21.xml><?xml version="1.0" encoding="utf-8"?>
 <p:sld xmlns:a="http://schemas.openxmlformats.org/drawingml/2006/main" xmlns:r="http://schemas.openxmlformats.org/officeDocument/2006/relationships" xmlns:p="http://schemas.openxmlformats.org/presentationml/2006/main">
   <p:cSld>
     <p:spTree>
@@ -6034,36 +9339,6 @@
     <p:extLst>
       <p:ext uri="{BB962C8B-B14F-4D97-AF65-F5344CB8AC3E}">
         <p14:creationId xmlns:p14="http://schemas.microsoft.com/office/powerpoint/2010/main" val="580378000"/>
-      </p:ext>
-    </p:extLst>
-  </p:cSld>
-  <p:clrMapOvr>
-    <a:masterClrMapping/>
-  </p:clrMapOvr>
-</p:sld>
-</file>
-
-<file path=ppt/slides/slide2.xml><?xml version="1.0" encoding="utf-8"?>
-<p:sld xmlns:a="http://schemas.openxmlformats.org/drawingml/2006/main" xmlns:r="http://schemas.openxmlformats.org/officeDocument/2006/relationships" xmlns:p="http://schemas.openxmlformats.org/presentationml/2006/main">
-  <p:cSld>
-    <p:spTree>
-      <p:nvGrpSpPr>
-        <p:cNvPr id="1" name=""/>
-        <p:cNvGrpSpPr/>
-        <p:nvPr/>
-      </p:nvGrpSpPr>
-      <p:grpSpPr>
-        <a:xfrm>
-          <a:off x="0" y="0"/>
-          <a:ext cx="0" cy="0"/>
-          <a:chOff x="0" y="0"/>
-          <a:chExt cx="0" cy="0"/>
-        </a:xfrm>
-      </p:grpSpPr>
-    </p:spTree>
-    <p:extLst>
-      <p:ext uri="{BB962C8B-B14F-4D97-AF65-F5344CB8AC3E}">
-        <p14:creationId xmlns:p14="http://schemas.microsoft.com/office/powerpoint/2010/main" val="2615047958"/>
       </p:ext>
     </p:extLst>
   </p:cSld>
@@ -6141,7 +9416,154 @@
           <a:bodyPr/>
           <a:lstStyle/>
           <a:p>
-            <a:endParaRPr lang="pt-BR"/>
+            <a:r>
+              <a:rPr lang="pt-BR" b="1" dirty="0"/>
+              <a:t>1. Descrição do Projeto</a:t>
+            </a:r>
+          </a:p>
+          <a:p>
+            <a:r>
+              <a:rPr lang="pt-BR" b="1" dirty="0"/>
+              <a:t>1.1 Visão Geral</a:t>
+            </a:r>
+          </a:p>
+          <a:p>
+            <a:r>
+              <a:rPr lang="pt-BR" dirty="0"/>
+              <a:t>Este projeto tem como finalidade implementar um pipeline completo de </a:t>
+            </a:r>
+            <a:r>
+              <a:rPr lang="pt-BR" dirty="0" err="1"/>
+              <a:t>DevOps</a:t>
+            </a:r>
+            <a:r>
+              <a:rPr lang="pt-BR" dirty="0"/>
+              <a:t> para uma aplicação web, cobrindo desde a integração contínua até a entrega contínua em ambiente de nuvem. A aplicação alvo é uma página HTML simples, projetada para fins didáticos e servindo de base para a aplicação das práticas </a:t>
+            </a:r>
+            <a:r>
+              <a:rPr lang="pt-BR" dirty="0" err="1"/>
+              <a:t>DevOps</a:t>
+            </a:r>
+            <a:r>
+              <a:rPr lang="pt-BR" dirty="0"/>
+              <a:t> ensinadas na disciplina.</a:t>
+            </a:r>
+          </a:p>
+          <a:p>
+            <a:r>
+              <a:rPr lang="pt-BR" dirty="0"/>
+              <a:t>O projeto é estruturado em duas fases:</a:t>
+            </a:r>
+          </a:p>
+          <a:p>
+            <a:r>
+              <a:rPr lang="pt-BR" b="1" dirty="0"/>
+              <a:t>Fase 1</a:t>
+            </a:r>
+            <a:r>
+              <a:rPr lang="pt-BR" dirty="0"/>
+              <a:t> — Configuração e Automação Inicial: abrange a configuração do repositório, o pipeline de Integração Contínua (CI) com GitHub </a:t>
+            </a:r>
+            <a:r>
+              <a:rPr lang="pt-BR" dirty="0" err="1"/>
+              <a:t>Actions</a:t>
+            </a:r>
+            <a:r>
+              <a:rPr lang="pt-BR" dirty="0"/>
+              <a:t> e os scripts de Infraestrutura como Código (</a:t>
+            </a:r>
+            <a:r>
+              <a:rPr lang="pt-BR" dirty="0" err="1"/>
+              <a:t>IaC</a:t>
+            </a:r>
+            <a:r>
+              <a:rPr lang="pt-BR" dirty="0"/>
+              <a:t>) utilizando AWS </a:t>
+            </a:r>
+            <a:r>
+              <a:rPr lang="pt-BR" dirty="0" err="1"/>
+              <a:t>CloudFormation</a:t>
+            </a:r>
+            <a:r>
+              <a:rPr lang="pt-BR" dirty="0"/>
+              <a:t>.</a:t>
+            </a:r>
+          </a:p>
+          <a:p>
+            <a:r>
+              <a:rPr lang="pt-BR" b="1" dirty="0"/>
+              <a:t>Fase 2</a:t>
+            </a:r>
+            <a:r>
+              <a:rPr lang="pt-BR" dirty="0"/>
+              <a:t> — Entrega Contínua, Monitoramento e Segurança: expandirá o pipeline para CD, </a:t>
+            </a:r>
+            <a:r>
+              <a:rPr lang="pt-BR" dirty="0" err="1"/>
+              <a:t>containerização</a:t>
+            </a:r>
+            <a:r>
+              <a:rPr lang="pt-BR" dirty="0"/>
+              <a:t> com Docker, monitoramento e segurança.</a:t>
+            </a:r>
+          </a:p>
+          <a:p>
+            <a:r>
+              <a:rPr lang="pt-BR" dirty="0"/>
+              <a:t>🔗 </a:t>
+            </a:r>
+            <a:r>
+              <a:rPr lang="pt-BR" b="1" dirty="0"/>
+              <a:t>Repositório do Projeto:</a:t>
+            </a:r>
+            <a:r>
+              <a:rPr lang="pt-BR" dirty="0"/>
+              <a:t> </a:t>
+            </a:r>
+            <a:r>
+              <a:rPr lang="pt-BR" i="1" u="sng" dirty="0">
+                <a:hlinkClick r:id="rId2"/>
+              </a:rPr>
+              <a:t>Link do repositório GitHub</a:t>
+            </a:r>
+            <a:endParaRPr lang="pt-BR" dirty="0"/>
+          </a:p>
+          <a:p>
+            <a:r>
+              <a:rPr lang="pt-BR" b="1" dirty="0"/>
+              <a:t>1.2 Contexto e Motivação</a:t>
+            </a:r>
+          </a:p>
+          <a:p>
+            <a:r>
+              <a:rPr lang="pt-BR" dirty="0"/>
+              <a:t>O mercado de desenvolvimento de software demanda cada vez mais profissionais capazes de integrar práticas de desenvolvimento e operações de forma ágil e automatizada. A cultura </a:t>
+            </a:r>
+            <a:r>
+              <a:rPr lang="pt-BR" dirty="0" err="1"/>
+              <a:t>DevOps</a:t>
+            </a:r>
+            <a:r>
+              <a:rPr lang="pt-BR" dirty="0"/>
+              <a:t> surge como resposta a essa demanda, eliminando silos entre equipes, acelerando entregas e aumentando a confiabilidade dos sistemas em produção.</a:t>
+            </a:r>
+          </a:p>
+          <a:p>
+            <a:r>
+              <a:rPr lang="pt-BR" dirty="0"/>
+              <a:t>Este projeto permite vivenciar na prática os conceitos teóricos da disciplina: automatização de builds, validação contínua por testes, provisionamento de infraestrutura por código e </a:t>
+            </a:r>
+            <a:r>
+              <a:rPr lang="pt-BR" dirty="0" err="1"/>
+              <a:t>deploy</a:t>
+            </a:r>
+            <a:r>
+              <a:rPr lang="pt-BR" dirty="0"/>
+              <a:t> reproduzível. Ao final, o resultado será um pipeline real e funcional hospedado no GitHub e integrado à AWS.</a:t>
+            </a:r>
+          </a:p>
+          <a:p>
+            <a:endParaRPr lang="pt-BR" dirty="0"/>
           </a:p>
         </p:txBody>
       </p:sp>
@@ -6163,7 +9585,13 @@
   <p:cSld>
     <p:spTree>
       <p:nvGrpSpPr>
-        <p:cNvPr id="1" name=""/>
+        <p:cNvPr id="1" name="">
+          <a:extLst>
+            <a:ext uri="{FF2B5EF4-FFF2-40B4-BE49-F238E27FC236}">
+              <a16:creationId xmlns:a16="http://schemas.microsoft.com/office/drawing/2014/main" id="{8E28DA91-E7DB-0A47-47E2-D0570E2DDD19}"/>
+            </a:ext>
+          </a:extLst>
+        </p:cNvPr>
         <p:cNvGrpSpPr/>
         <p:nvPr/>
       </p:nvGrpSpPr>
@@ -6180,7 +9608,7 @@
           <p:cNvPr id="3" name="Espaço Reservado para Texto 2">
             <a:extLst>
               <a:ext uri="{FF2B5EF4-FFF2-40B4-BE49-F238E27FC236}">
-                <a16:creationId xmlns:a16="http://schemas.microsoft.com/office/drawing/2014/main" id="{ED0C734D-B74A-49B4-81F9-B095FD7D62E3}"/>
+                <a16:creationId xmlns:a16="http://schemas.microsoft.com/office/drawing/2014/main" id="{5C874A66-1634-72F5-805D-86D16D9555F4}"/>
               </a:ext>
             </a:extLst>
           </p:cNvPr>
@@ -6196,14 +9624,822 @@
           <a:bodyPr/>
           <a:lstStyle/>
           <a:p>
-            <a:endParaRPr lang="pt-BR"/>
+            <a:r>
+              <a:rPr lang="pt-BR" dirty="0"/>
+              <a:t>.</a:t>
+            </a:r>
+          </a:p>
+          <a:p>
+            <a:endParaRPr lang="pt-BR" dirty="0"/>
+          </a:p>
+        </p:txBody>
+      </p:sp>
+      <p:graphicFrame>
+        <p:nvGraphicFramePr>
+          <p:cNvPr id="5" name="Tabela 4">
+            <a:extLst>
+              <a:ext uri="{FF2B5EF4-FFF2-40B4-BE49-F238E27FC236}">
+                <a16:creationId xmlns:a16="http://schemas.microsoft.com/office/drawing/2014/main" id="{E61EE2FA-1107-63C9-DD3B-D3D53B115138}"/>
+              </a:ext>
+            </a:extLst>
+          </p:cNvPr>
+          <p:cNvGraphicFramePr>
+            <a:graphicFrameLocks noGrp="1"/>
+          </p:cNvGraphicFramePr>
+          <p:nvPr>
+            <p:extLst>
+              <p:ext uri="{D42A27DB-BD31-4B8C-83A1-F6EECF244321}">
+                <p14:modId xmlns:p14="http://schemas.microsoft.com/office/powerpoint/2010/main" val="3638156640"/>
+              </p:ext>
+            </p:extLst>
+          </p:nvPr>
+        </p:nvGraphicFramePr>
+        <p:xfrm>
+          <a:off x="2288542" y="2555875"/>
+          <a:ext cx="11824965" cy="6091238"/>
+        </p:xfrm>
+        <a:graphic>
+          <a:graphicData uri="http://schemas.openxmlformats.org/drawingml/2006/table">
+            <a:tbl>
+              <a:tblPr>
+                <a:tableStyleId>{1FECB4D8-DB02-4DC6-A0A2-4F2EBAE1DC90}</a:tableStyleId>
+              </a:tblPr>
+              <a:tblGrid>
+                <a:gridCol w="3941655">
+                  <a:extLst>
+                    <a:ext uri="{9D8B030D-6E8A-4147-A177-3AD203B41FA5}">
+                      <a16:colId xmlns:a16="http://schemas.microsoft.com/office/drawing/2014/main" val="1101375876"/>
+                    </a:ext>
+                  </a:extLst>
+                </a:gridCol>
+                <a:gridCol w="3941655">
+                  <a:extLst>
+                    <a:ext uri="{9D8B030D-6E8A-4147-A177-3AD203B41FA5}">
+                      <a16:colId xmlns:a16="http://schemas.microsoft.com/office/drawing/2014/main" val="3780754805"/>
+                    </a:ext>
+                  </a:extLst>
+                </a:gridCol>
+                <a:gridCol w="3941655">
+                  <a:extLst>
+                    <a:ext uri="{9D8B030D-6E8A-4147-A177-3AD203B41FA5}">
+                      <a16:colId xmlns:a16="http://schemas.microsoft.com/office/drawing/2014/main" val="2028275943"/>
+                    </a:ext>
+                  </a:extLst>
+                </a:gridCol>
+              </a:tblGrid>
+              <a:tr h="416528">
+                <a:tc>
+                  <a:txBody>
+                    <a:bodyPr/>
+                    <a:lstStyle/>
+                    <a:p>
+                      <a:pPr>
+                        <a:buNone/>
+                      </a:pPr>
+                      <a:r>
+                        <a:rPr lang="pt-BR" sz="2100" b="1" dirty="0">
+                          <a:effectLst/>
+                        </a:rPr>
+                        <a:t>Categoria</a:t>
+                      </a:r>
+                    </a:p>
+                  </a:txBody>
+                  <a:tcPr marL="103495" marR="103495" marT="47767" marB="47767" anchor="ctr"/>
+                </a:tc>
+                <a:tc>
+                  <a:txBody>
+                    <a:bodyPr/>
+                    <a:lstStyle/>
+                    <a:p>
+                      <a:pPr>
+                        <a:buNone/>
+                      </a:pPr>
+                      <a:r>
+                        <a:rPr lang="pt-BR" sz="2100" b="1">
+                          <a:effectLst/>
+                        </a:rPr>
+                        <a:t>Tecnologia / Ferramenta</a:t>
+                      </a:r>
+                    </a:p>
+                  </a:txBody>
+                  <a:tcPr marL="103495" marR="103495" marT="47767" marB="47767" anchor="ctr"/>
+                </a:tc>
+                <a:tc>
+                  <a:txBody>
+                    <a:bodyPr/>
+                    <a:lstStyle/>
+                    <a:p>
+                      <a:pPr>
+                        <a:buNone/>
+                      </a:pPr>
+                      <a:r>
+                        <a:rPr lang="pt-BR" sz="2100" b="1">
+                          <a:effectLst/>
+                        </a:rPr>
+                        <a:t>Finalidade</a:t>
+                      </a:r>
+                    </a:p>
+                  </a:txBody>
+                  <a:tcPr marL="103495" marR="103495" marT="47767" marB="47767" anchor="ctr"/>
+                </a:tc>
+                <a:extLst>
+                  <a:ext uri="{0D108BD9-81ED-4DB2-BD59-A6C34878D82A}">
+                    <a16:rowId xmlns:a16="http://schemas.microsoft.com/office/drawing/2014/main" val="46017477"/>
+                  </a:ext>
+                </a:extLst>
+              </a:tr>
+              <a:tr h="737521">
+                <a:tc>
+                  <a:txBody>
+                    <a:bodyPr/>
+                    <a:lstStyle/>
+                    <a:p>
+                      <a:pPr>
+                        <a:buNone/>
+                      </a:pPr>
+                      <a:r>
+                        <a:rPr lang="pt-BR" sz="2100">
+                          <a:effectLst/>
+                        </a:rPr>
+                        <a:t>Linguagem</a:t>
+                      </a:r>
+                    </a:p>
+                  </a:txBody>
+                  <a:tcPr marL="103495" marR="103495" marT="47767" marB="47767" anchor="ctr"/>
+                </a:tc>
+                <a:tc>
+                  <a:txBody>
+                    <a:bodyPr/>
+                    <a:lstStyle/>
+                    <a:p>
+                      <a:pPr>
+                        <a:buNone/>
+                      </a:pPr>
+                      <a:r>
+                        <a:rPr lang="pt-BR" sz="2100">
+                          <a:effectLst/>
+                        </a:rPr>
+                        <a:t>Node.js (JavaScript)</a:t>
+                      </a:r>
+                    </a:p>
+                  </a:txBody>
+                  <a:tcPr marL="103495" marR="103495" marT="47767" marB="47767" anchor="ctr"/>
+                </a:tc>
+                <a:tc>
+                  <a:txBody>
+                    <a:bodyPr/>
+                    <a:lstStyle/>
+                    <a:p>
+                      <a:pPr>
+                        <a:buNone/>
+                      </a:pPr>
+                      <a:r>
+                        <a:rPr lang="pt-BR" sz="2100">
+                          <a:effectLst/>
+                        </a:rPr>
+                        <a:t>Desenvolvimento da aplicação e execução dos testes</a:t>
+                      </a:r>
+                    </a:p>
+                  </a:txBody>
+                  <a:tcPr marL="103495" marR="103495" marT="47767" marB="47767" anchor="ctr"/>
+                </a:tc>
+                <a:extLst>
+                  <a:ext uri="{0D108BD9-81ED-4DB2-BD59-A6C34878D82A}">
+                    <a16:rowId xmlns:a16="http://schemas.microsoft.com/office/drawing/2014/main" val="4038333128"/>
+                  </a:ext>
+                </a:extLst>
+              </a:tr>
+              <a:tr h="737521">
+                <a:tc>
+                  <a:txBody>
+                    <a:bodyPr/>
+                    <a:lstStyle/>
+                    <a:p>
+                      <a:pPr>
+                        <a:buNone/>
+                      </a:pPr>
+                      <a:r>
+                        <a:rPr lang="pt-BR" sz="2100">
+                          <a:effectLst/>
+                        </a:rPr>
+                        <a:t>Controle de Versão</a:t>
+                      </a:r>
+                    </a:p>
+                  </a:txBody>
+                  <a:tcPr marL="103495" marR="103495" marT="47767" marB="47767" anchor="ctr"/>
+                </a:tc>
+                <a:tc>
+                  <a:txBody>
+                    <a:bodyPr/>
+                    <a:lstStyle/>
+                    <a:p>
+                      <a:pPr>
+                        <a:buNone/>
+                      </a:pPr>
+                      <a:r>
+                        <a:rPr lang="pt-BR" sz="2100" dirty="0" err="1">
+                          <a:effectLst/>
+                        </a:rPr>
+                        <a:t>Git</a:t>
+                      </a:r>
+                      <a:r>
+                        <a:rPr lang="pt-BR" sz="2100" dirty="0">
+                          <a:effectLst/>
+                        </a:rPr>
+                        <a:t> + GitHub</a:t>
+                      </a:r>
+                    </a:p>
+                  </a:txBody>
+                  <a:tcPr marL="103495" marR="103495" marT="47767" marB="47767" anchor="ctr"/>
+                </a:tc>
+                <a:tc>
+                  <a:txBody>
+                    <a:bodyPr/>
+                    <a:lstStyle/>
+                    <a:p>
+                      <a:pPr>
+                        <a:buNone/>
+                      </a:pPr>
+                      <a:r>
+                        <a:rPr lang="pt-BR" sz="2100">
+                          <a:effectLst/>
+                        </a:rPr>
+                        <a:t>Repositório de código e colaboração</a:t>
+                      </a:r>
+                    </a:p>
+                  </a:txBody>
+                  <a:tcPr marL="103495" marR="103495" marT="47767" marB="47767" anchor="ctr"/>
+                </a:tc>
+                <a:extLst>
+                  <a:ext uri="{0D108BD9-81ED-4DB2-BD59-A6C34878D82A}">
+                    <a16:rowId xmlns:a16="http://schemas.microsoft.com/office/drawing/2014/main" val="1624714760"/>
+                  </a:ext>
+                </a:extLst>
+              </a:tr>
+              <a:tr h="416528">
+                <a:tc>
+                  <a:txBody>
+                    <a:bodyPr/>
+                    <a:lstStyle/>
+                    <a:p>
+                      <a:pPr>
+                        <a:buNone/>
+                      </a:pPr>
+                      <a:r>
+                        <a:rPr lang="pt-BR" sz="2100">
+                          <a:effectLst/>
+                        </a:rPr>
+                        <a:t>CI/CD</a:t>
+                      </a:r>
+                    </a:p>
+                  </a:txBody>
+                  <a:tcPr marL="103495" marR="103495" marT="47767" marB="47767" anchor="ctr"/>
+                </a:tc>
+                <a:tc>
+                  <a:txBody>
+                    <a:bodyPr/>
+                    <a:lstStyle/>
+                    <a:p>
+                      <a:pPr>
+                        <a:buNone/>
+                      </a:pPr>
+                      <a:r>
+                        <a:rPr lang="pt-BR" sz="2100" dirty="0">
+                          <a:effectLst/>
+                        </a:rPr>
+                        <a:t>GitHub </a:t>
+                      </a:r>
+                      <a:r>
+                        <a:rPr lang="pt-BR" sz="2100" dirty="0" err="1">
+                          <a:effectLst/>
+                        </a:rPr>
+                        <a:t>Actions</a:t>
+                      </a:r>
+                      <a:endParaRPr lang="pt-BR" sz="2100" dirty="0">
+                        <a:effectLst/>
+                      </a:endParaRPr>
+                    </a:p>
+                  </a:txBody>
+                  <a:tcPr marL="103495" marR="103495" marT="47767" marB="47767" anchor="ctr"/>
+                </a:tc>
+                <a:tc>
+                  <a:txBody>
+                    <a:bodyPr/>
+                    <a:lstStyle/>
+                    <a:p>
+                      <a:pPr>
+                        <a:buNone/>
+                      </a:pPr>
+                      <a:r>
+                        <a:rPr lang="pt-BR" sz="2100">
+                          <a:effectLst/>
+                        </a:rPr>
+                        <a:t>Automação do pipeline</a:t>
+                      </a:r>
+                    </a:p>
+                  </a:txBody>
+                  <a:tcPr marL="103495" marR="103495" marT="47767" marB="47767" anchor="ctr"/>
+                </a:tc>
+                <a:extLst>
+                  <a:ext uri="{0D108BD9-81ED-4DB2-BD59-A6C34878D82A}">
+                    <a16:rowId xmlns:a16="http://schemas.microsoft.com/office/drawing/2014/main" val="580714294"/>
+                  </a:ext>
+                </a:extLst>
+              </a:tr>
+              <a:tr h="737521">
+                <a:tc>
+                  <a:txBody>
+                    <a:bodyPr/>
+                    <a:lstStyle/>
+                    <a:p>
+                      <a:pPr>
+                        <a:buNone/>
+                      </a:pPr>
+                      <a:r>
+                        <a:rPr lang="pt-BR" sz="2100">
+                          <a:effectLst/>
+                        </a:rPr>
+                        <a:t>Lint</a:t>
+                      </a:r>
+                    </a:p>
+                  </a:txBody>
+                  <a:tcPr marL="103495" marR="103495" marT="47767" marB="47767" anchor="ctr"/>
+                </a:tc>
+                <a:tc>
+                  <a:txBody>
+                    <a:bodyPr/>
+                    <a:lstStyle/>
+                    <a:p>
+                      <a:pPr>
+                        <a:buNone/>
+                      </a:pPr>
+                      <a:r>
+                        <a:rPr lang="pt-BR" sz="2100">
+                          <a:effectLst/>
+                        </a:rPr>
+                        <a:t>HTMLHint</a:t>
+                      </a:r>
+                    </a:p>
+                  </a:txBody>
+                  <a:tcPr marL="103495" marR="103495" marT="47767" marB="47767" anchor="ctr"/>
+                </a:tc>
+                <a:tc>
+                  <a:txBody>
+                    <a:bodyPr/>
+                    <a:lstStyle/>
+                    <a:p>
+                      <a:pPr>
+                        <a:buNone/>
+                      </a:pPr>
+                      <a:r>
+                        <a:rPr lang="pt-BR" sz="2100">
+                          <a:effectLst/>
+                        </a:rPr>
+                        <a:t>Validação e qualidade do código HTML</a:t>
+                      </a:r>
+                    </a:p>
+                  </a:txBody>
+                  <a:tcPr marL="103495" marR="103495" marT="47767" marB="47767" anchor="ctr"/>
+                </a:tc>
+                <a:extLst>
+                  <a:ext uri="{0D108BD9-81ED-4DB2-BD59-A6C34878D82A}">
+                    <a16:rowId xmlns:a16="http://schemas.microsoft.com/office/drawing/2014/main" val="4151284446"/>
+                  </a:ext>
+                </a:extLst>
+              </a:tr>
+              <a:tr h="737521">
+                <a:tc>
+                  <a:txBody>
+                    <a:bodyPr/>
+                    <a:lstStyle/>
+                    <a:p>
+                      <a:pPr>
+                        <a:buNone/>
+                      </a:pPr>
+                      <a:r>
+                        <a:rPr lang="pt-BR" sz="2100">
+                          <a:effectLst/>
+                        </a:rPr>
+                        <a:t>Testes</a:t>
+                      </a:r>
+                    </a:p>
+                  </a:txBody>
+                  <a:tcPr marL="103495" marR="103495" marT="47767" marB="47767" anchor="ctr"/>
+                </a:tc>
+                <a:tc>
+                  <a:txBody>
+                    <a:bodyPr/>
+                    <a:lstStyle/>
+                    <a:p>
+                      <a:pPr>
+                        <a:buNone/>
+                      </a:pPr>
+                      <a:r>
+                        <a:rPr lang="pt-BR" sz="2100">
+                          <a:effectLst/>
+                        </a:rPr>
+                        <a:t>Jest + jest-environment-jsdom</a:t>
+                      </a:r>
+                    </a:p>
+                  </a:txBody>
+                  <a:tcPr marL="103495" marR="103495" marT="47767" marB="47767" anchor="ctr"/>
+                </a:tc>
+                <a:tc>
+                  <a:txBody>
+                    <a:bodyPr/>
+                    <a:lstStyle/>
+                    <a:p>
+                      <a:pPr>
+                        <a:buNone/>
+                      </a:pPr>
+                      <a:r>
+                        <a:rPr lang="pt-BR" sz="2100">
+                          <a:effectLst/>
+                        </a:rPr>
+                        <a:t>Testes unitários com DOM e relatório de cobertura</a:t>
+                      </a:r>
+                    </a:p>
+                  </a:txBody>
+                  <a:tcPr marL="103495" marR="103495" marT="47767" marB="47767" anchor="ctr"/>
+                </a:tc>
+                <a:extLst>
+                  <a:ext uri="{0D108BD9-81ED-4DB2-BD59-A6C34878D82A}">
+                    <a16:rowId xmlns:a16="http://schemas.microsoft.com/office/drawing/2014/main" val="4025448114"/>
+                  </a:ext>
+                </a:extLst>
+              </a:tr>
+              <a:tr h="737521">
+                <a:tc>
+                  <a:txBody>
+                    <a:bodyPr/>
+                    <a:lstStyle/>
+                    <a:p>
+                      <a:pPr>
+                        <a:buNone/>
+                      </a:pPr>
+                      <a:r>
+                        <a:rPr lang="pt-BR" sz="2100">
+                          <a:effectLst/>
+                        </a:rPr>
+                        <a:t>IaC</a:t>
+                      </a:r>
+                    </a:p>
+                  </a:txBody>
+                  <a:tcPr marL="103495" marR="103495" marT="47767" marB="47767" anchor="ctr"/>
+                </a:tc>
+                <a:tc>
+                  <a:txBody>
+                    <a:bodyPr/>
+                    <a:lstStyle/>
+                    <a:p>
+                      <a:pPr>
+                        <a:buNone/>
+                      </a:pPr>
+                      <a:r>
+                        <a:rPr lang="pt-BR" sz="2100">
+                          <a:effectLst/>
+                        </a:rPr>
+                        <a:t>AWS CloudFormation</a:t>
+                      </a:r>
+                    </a:p>
+                  </a:txBody>
+                  <a:tcPr marL="103495" marR="103495" marT="47767" marB="47767" anchor="ctr"/>
+                </a:tc>
+                <a:tc>
+                  <a:txBody>
+                    <a:bodyPr/>
+                    <a:lstStyle/>
+                    <a:p>
+                      <a:pPr>
+                        <a:buNone/>
+                      </a:pPr>
+                      <a:r>
+                        <a:rPr lang="pt-BR" sz="2100">
+                          <a:effectLst/>
+                        </a:rPr>
+                        <a:t>Provisionamento de infraestrutura</a:t>
+                      </a:r>
+                    </a:p>
+                  </a:txBody>
+                  <a:tcPr marL="103495" marR="103495" marT="47767" marB="47767" anchor="ctr"/>
+                </a:tc>
+                <a:extLst>
+                  <a:ext uri="{0D108BD9-81ED-4DB2-BD59-A6C34878D82A}">
+                    <a16:rowId xmlns:a16="http://schemas.microsoft.com/office/drawing/2014/main" val="1175580572"/>
+                  </a:ext>
+                </a:extLst>
+              </a:tr>
+              <a:tr h="737521">
+                <a:tc>
+                  <a:txBody>
+                    <a:bodyPr/>
+                    <a:lstStyle/>
+                    <a:p>
+                      <a:pPr>
+                        <a:buNone/>
+                      </a:pPr>
+                      <a:r>
+                        <a:rPr lang="pt-BR" sz="2100">
+                          <a:effectLst/>
+                        </a:rPr>
+                        <a:t>Nuvem</a:t>
+                      </a:r>
+                    </a:p>
+                  </a:txBody>
+                  <a:tcPr marL="103495" marR="103495" marT="47767" marB="47767" anchor="ctr"/>
+                </a:tc>
+                <a:tc>
+                  <a:txBody>
+                    <a:bodyPr/>
+                    <a:lstStyle/>
+                    <a:p>
+                      <a:pPr>
+                        <a:buNone/>
+                      </a:pPr>
+                      <a:r>
+                        <a:rPr lang="pt-BR" sz="2100">
+                          <a:effectLst/>
+                        </a:rPr>
+                        <a:t>Amazon Web Services (AWS)</a:t>
+                      </a:r>
+                    </a:p>
+                  </a:txBody>
+                  <a:tcPr marL="103495" marR="103495" marT="47767" marB="47767" anchor="ctr"/>
+                </a:tc>
+                <a:tc>
+                  <a:txBody>
+                    <a:bodyPr/>
+                    <a:lstStyle/>
+                    <a:p>
+                      <a:pPr>
+                        <a:buNone/>
+                      </a:pPr>
+                      <a:r>
+                        <a:rPr lang="pt-BR" sz="2100">
+                          <a:effectLst/>
+                        </a:rPr>
+                        <a:t>Hospedagem e serviços gerenciados</a:t>
+                      </a:r>
+                    </a:p>
+                  </a:txBody>
+                  <a:tcPr marL="103495" marR="103495" marT="47767" marB="47767" anchor="ctr"/>
+                </a:tc>
+                <a:extLst>
+                  <a:ext uri="{0D108BD9-81ED-4DB2-BD59-A6C34878D82A}">
+                    <a16:rowId xmlns:a16="http://schemas.microsoft.com/office/drawing/2014/main" val="4274622489"/>
+                  </a:ext>
+                </a:extLst>
+              </a:tr>
+              <a:tr h="416528">
+                <a:tc>
+                  <a:txBody>
+                    <a:bodyPr/>
+                    <a:lstStyle/>
+                    <a:p>
+                      <a:pPr>
+                        <a:buNone/>
+                      </a:pPr>
+                      <a:r>
+                        <a:rPr lang="pt-BR" sz="2100">
+                          <a:effectLst/>
+                        </a:rPr>
+                        <a:t>Containers</a:t>
+                      </a:r>
+                    </a:p>
+                  </a:txBody>
+                  <a:tcPr marL="103495" marR="103495" marT="47767" marB="47767" anchor="ctr"/>
+                </a:tc>
+                <a:tc>
+                  <a:txBody>
+                    <a:bodyPr/>
+                    <a:lstStyle/>
+                    <a:p>
+                      <a:pPr>
+                        <a:buNone/>
+                      </a:pPr>
+                      <a:r>
+                        <a:rPr lang="pt-BR" sz="2100">
+                          <a:effectLst/>
+                        </a:rPr>
+                        <a:t>Docker (Fase 2)</a:t>
+                      </a:r>
+                    </a:p>
+                  </a:txBody>
+                  <a:tcPr marL="103495" marR="103495" marT="47767" marB="47767" anchor="ctr"/>
+                </a:tc>
+                <a:tc>
+                  <a:txBody>
+                    <a:bodyPr/>
+                    <a:lstStyle/>
+                    <a:p>
+                      <a:pPr>
+                        <a:buNone/>
+                      </a:pPr>
+                      <a:r>
+                        <a:rPr lang="pt-BR" sz="2100">
+                          <a:effectLst/>
+                        </a:rPr>
+                        <a:t>Containerização da aplicação</a:t>
+                      </a:r>
+                    </a:p>
+                  </a:txBody>
+                  <a:tcPr marL="103495" marR="103495" marT="47767" marB="47767" anchor="ctr"/>
+                </a:tc>
+                <a:extLst>
+                  <a:ext uri="{0D108BD9-81ED-4DB2-BD59-A6C34878D82A}">
+                    <a16:rowId xmlns:a16="http://schemas.microsoft.com/office/drawing/2014/main" val="1129159896"/>
+                  </a:ext>
+                </a:extLst>
+              </a:tr>
+              <a:tr h="416528">
+                <a:tc>
+                  <a:txBody>
+                    <a:bodyPr/>
+                    <a:lstStyle/>
+                    <a:p>
+                      <a:pPr>
+                        <a:buNone/>
+                      </a:pPr>
+                      <a:r>
+                        <a:rPr lang="pt-BR" sz="2100" dirty="0">
+                          <a:effectLst/>
+                        </a:rPr>
+                        <a:t>Monitoramento</a:t>
+                      </a:r>
+                    </a:p>
+                  </a:txBody>
+                  <a:tcPr marL="103495" marR="103495" marT="47767" marB="47767" anchor="ctr"/>
+                </a:tc>
+                <a:tc>
+                  <a:txBody>
+                    <a:bodyPr/>
+                    <a:lstStyle/>
+                    <a:p>
+                      <a:pPr>
+                        <a:buNone/>
+                      </a:pPr>
+                      <a:r>
+                        <a:rPr lang="pt-BR" sz="2100">
+                          <a:effectLst/>
+                        </a:rPr>
+                        <a:t>AWS CloudWatch (Fase 2)</a:t>
+                      </a:r>
+                    </a:p>
+                  </a:txBody>
+                  <a:tcPr marL="103495" marR="103495" marT="47767" marB="47767" anchor="ctr"/>
+                </a:tc>
+                <a:tc>
+                  <a:txBody>
+                    <a:bodyPr/>
+                    <a:lstStyle/>
+                    <a:p>
+                      <a:pPr>
+                        <a:buNone/>
+                      </a:pPr>
+                      <a:r>
+                        <a:rPr lang="pt-BR" sz="2100" dirty="0">
+                          <a:effectLst/>
+                        </a:rPr>
+                        <a:t>Logs e métricas</a:t>
+                      </a:r>
+                    </a:p>
+                  </a:txBody>
+                  <a:tcPr marL="103495" marR="103495" marT="47767" marB="47767" anchor="ctr"/>
+                </a:tc>
+                <a:extLst>
+                  <a:ext uri="{0D108BD9-81ED-4DB2-BD59-A6C34878D82A}">
+                    <a16:rowId xmlns:a16="http://schemas.microsoft.com/office/drawing/2014/main" val="2274693021"/>
+                  </a:ext>
+                </a:extLst>
+              </a:tr>
+            </a:tbl>
+          </a:graphicData>
+        </a:graphic>
+      </p:graphicFrame>
+      <p:sp>
+        <p:nvSpPr>
+          <p:cNvPr id="6" name="Rectangle 2">
+            <a:extLst>
+              <a:ext uri="{FF2B5EF4-FFF2-40B4-BE49-F238E27FC236}">
+                <a16:creationId xmlns:a16="http://schemas.microsoft.com/office/drawing/2014/main" id="{853B16F8-BF80-65CD-5024-FB18206E7919}"/>
+              </a:ext>
+            </a:extLst>
+          </p:cNvPr>
+          <p:cNvSpPr>
+            <a:spLocks noChangeArrowheads="1"/>
+          </p:cNvSpPr>
+          <p:nvPr/>
+        </p:nvSpPr>
+        <p:spPr bwMode="auto">
+          <a:xfrm>
+            <a:off x="7383689" y="1261737"/>
+            <a:ext cx="2988610" cy="768733"/>
+          </a:xfrm>
+          <a:prstGeom prst="rect">
+            <a:avLst/>
+          </a:prstGeom>
+          <a:solidFill>
+            <a:srgbClr val="0D1117"/>
+          </a:solidFill>
+          <a:ln>
+            <a:noFill/>
+          </a:ln>
+          <a:effectLst/>
+          <a:extLst>
+            <a:ext uri="{91240B29-F687-4F45-9708-019B960494DF}">
+              <a14:hiddenLine xmlns:a14="http://schemas.microsoft.com/office/drawing/2010/main" w="9525">
+                <a:solidFill>
+                  <a:schemeClr val="tx1"/>
+                </a:solidFill>
+                <a:miter lim="800000"/>
+                <a:headEnd/>
+                <a:tailEnd/>
+              </a14:hiddenLine>
+            </a:ext>
+            <a:ext uri="{AF507438-7753-43E0-B8FC-AC1667EBCBE1}">
+              <a14:hiddenEffects xmlns:a14="http://schemas.microsoft.com/office/drawing/2010/main">
+                <a:effectLst>
+                  <a:outerShdw dist="35921" dir="2700000" algn="ctr" rotWithShape="0">
+                    <a:schemeClr val="bg2"/>
+                  </a:outerShdw>
+                </a:effectLst>
+              </a14:hiddenEffects>
+            </a:ext>
+          </a:extLst>
+        </p:spPr>
+        <p:txBody>
+          <a:bodyPr vert="horz" wrap="square" lIns="91440" tIns="212658" rIns="91440" bIns="0" numCol="1" anchor="ctr" anchorCtr="0" compatLnSpc="1">
+            <a:prstTxWarp prst="textNoShape">
+              <a:avLst/>
+            </a:prstTxWarp>
+            <a:spAutoFit/>
+          </a:bodyPr>
+          <a:lstStyle/>
+          <a:p>
+            <a:pPr marL="0" marR="0" lvl="0" indent="0" algn="l" defTabSz="914400" rtl="0" eaLnBrk="0" fontAlgn="base" latinLnBrk="0" hangingPunct="0">
+              <a:lnSpc>
+                <a:spcPct val="100000"/>
+              </a:lnSpc>
+              <a:spcBef>
+                <a:spcPct val="0"/>
+              </a:spcBef>
+              <a:spcAft>
+                <a:spcPct val="0"/>
+              </a:spcAft>
+              <a:buClrTx/>
+              <a:buSzTx/>
+              <a:buFontTx/>
+              <a:buNone/>
+              <a:tabLst/>
+            </a:pPr>
+            <a:r>
+              <a:rPr kumimoji="0" lang="pt-BR" altLang="pt-BR" b="1" i="0" u="none" strike="noStrike" cap="none" normalizeH="0" baseline="0" dirty="0">
+                <a:ln>
+                  <a:noFill/>
+                </a:ln>
+                <a:solidFill>
+                  <a:srgbClr val="F0F6FC"/>
+                </a:solidFill>
+                <a:effectLst/>
+                <a:latin typeface="Mona Sans VF"/>
+              </a:rPr>
+              <a:t>1.3 Tecnologias Utilizadas</a:t>
+            </a:r>
+          </a:p>
+          <a:p>
+            <a:pPr marL="0" marR="0" lvl="0" indent="0" algn="l" defTabSz="914400" rtl="0" eaLnBrk="0" fontAlgn="base" latinLnBrk="0" hangingPunct="0">
+              <a:lnSpc>
+                <a:spcPct val="100000"/>
+              </a:lnSpc>
+              <a:spcBef>
+                <a:spcPct val="0"/>
+              </a:spcBef>
+              <a:spcAft>
+                <a:spcPct val="0"/>
+              </a:spcAft>
+              <a:buClrTx/>
+              <a:buSzTx/>
+              <a:buFontTx/>
+              <a:buNone/>
+              <a:tabLst/>
+            </a:pPr>
+            <a:endParaRPr kumimoji="0" lang="pt-BR" altLang="pt-BR" sz="1800" b="0" i="0" u="none" strike="noStrike" cap="none" normalizeH="0" baseline="0" dirty="0">
+              <a:ln>
+                <a:noFill/>
+              </a:ln>
+              <a:solidFill>
+                <a:schemeClr val="tx1"/>
+              </a:solidFill>
+              <a:effectLst/>
+              <a:latin typeface="Arial" panose="020B0604020202020204" pitchFamily="34" charset="0"/>
+            </a:endParaRPr>
           </a:p>
         </p:txBody>
       </p:sp>
     </p:spTree>
     <p:extLst>
       <p:ext uri="{BB962C8B-B14F-4D97-AF65-F5344CB8AC3E}">
-        <p14:creationId xmlns:p14="http://schemas.microsoft.com/office/powerpoint/2010/main" val="600266859"/>
+        <p14:creationId xmlns:p14="http://schemas.microsoft.com/office/powerpoint/2010/main" val="3789650125"/>
       </p:ext>
     </p:extLst>
   </p:cSld>
@@ -6218,7 +10454,13 @@
   <p:cSld>
     <p:spTree>
       <p:nvGrpSpPr>
-        <p:cNvPr id="1" name=""/>
+        <p:cNvPr id="1" name="">
+          <a:extLst>
+            <a:ext uri="{FF2B5EF4-FFF2-40B4-BE49-F238E27FC236}">
+              <a16:creationId xmlns:a16="http://schemas.microsoft.com/office/drawing/2014/main" id="{7CA7299A-366C-3A9C-0D84-003CA0294FD4}"/>
+            </a:ext>
+          </a:extLst>
+        </p:cNvPr>
         <p:cNvGrpSpPr/>
         <p:nvPr/>
       </p:nvGrpSpPr>
@@ -6235,7 +10477,7 @@
           <p:cNvPr id="3" name="Espaço Reservado para Texto 2">
             <a:extLst>
               <a:ext uri="{FF2B5EF4-FFF2-40B4-BE49-F238E27FC236}">
-                <a16:creationId xmlns:a16="http://schemas.microsoft.com/office/drawing/2014/main" id="{B0123114-87BF-4523-A231-EA598A2BD858}"/>
+                <a16:creationId xmlns:a16="http://schemas.microsoft.com/office/drawing/2014/main" id="{8431D1BB-7291-7BB3-4C31-58B99A976384}"/>
               </a:ext>
             </a:extLst>
           </p:cNvPr>
@@ -6251,14 +10493,649 @@
           <a:bodyPr/>
           <a:lstStyle/>
           <a:p>
-            <a:endParaRPr lang="pt-BR"/>
+            <a:r>
+              <a:rPr lang="pt-BR" dirty="0"/>
+              <a:t>.</a:t>
+            </a:r>
+          </a:p>
+          <a:p>
+            <a:r>
+              <a:rPr lang="pt-BR" b="1" dirty="0"/>
+              <a:t>2. Objetivos do Projeto</a:t>
+            </a:r>
+          </a:p>
+          <a:p>
+            <a:r>
+              <a:rPr lang="pt-BR" b="1" dirty="0"/>
+              <a:t>2.1 Objetivo Geral</a:t>
+            </a:r>
+          </a:p>
+          <a:p>
+            <a:r>
+              <a:rPr lang="pt-BR" dirty="0"/>
+              <a:t>Implementar um pipeline </a:t>
+            </a:r>
+            <a:r>
+              <a:rPr lang="pt-BR" dirty="0" err="1"/>
+              <a:t>DevOps</a:t>
+            </a:r>
+            <a:r>
+              <a:rPr lang="pt-BR" dirty="0"/>
+              <a:t> completo e funcional — desde o </a:t>
+            </a:r>
+            <a:r>
+              <a:rPr lang="pt-BR" dirty="0" err="1"/>
+              <a:t>commit</a:t>
+            </a:r>
+            <a:r>
+              <a:rPr lang="pt-BR" dirty="0"/>
+              <a:t> do código até o </a:t>
+            </a:r>
+            <a:r>
+              <a:rPr lang="pt-BR" dirty="0" err="1"/>
+              <a:t>deploy</a:t>
+            </a:r>
+            <a:r>
+              <a:rPr lang="pt-BR" dirty="0"/>
+              <a:t> automatizado em ambiente de nuvem — aplicando as melhores práticas de Integração Contínua, Entrega Contínua, Infraestrutura como Código e monitoramento.</a:t>
+            </a:r>
+          </a:p>
+          <a:p>
+            <a:r>
+              <a:rPr lang="pt-BR" b="1" dirty="0"/>
+              <a:t>2.2 Objetivos Específicos</a:t>
+            </a:r>
+          </a:p>
+          <a:p>
+            <a:endParaRPr lang="pt-BR" dirty="0"/>
           </a:p>
         </p:txBody>
       </p:sp>
+      <p:graphicFrame>
+        <p:nvGraphicFramePr>
+          <p:cNvPr id="2" name="Tabela 1">
+            <a:extLst>
+              <a:ext uri="{FF2B5EF4-FFF2-40B4-BE49-F238E27FC236}">
+                <a16:creationId xmlns:a16="http://schemas.microsoft.com/office/drawing/2014/main" id="{F7F47A03-81F9-2954-A819-0460794126FA}"/>
+              </a:ext>
+            </a:extLst>
+          </p:cNvPr>
+          <p:cNvGraphicFramePr>
+            <a:graphicFrameLocks noGrp="1"/>
+          </p:cNvGraphicFramePr>
+          <p:nvPr>
+            <p:extLst>
+              <p:ext uri="{D42A27DB-BD31-4B8C-83A1-F6EECF244321}">
+                <p14:modId xmlns:p14="http://schemas.microsoft.com/office/powerpoint/2010/main" val="3638459380"/>
+              </p:ext>
+            </p:extLst>
+          </p:nvPr>
+        </p:nvGraphicFramePr>
+        <p:xfrm>
+          <a:off x="928688" y="3998794"/>
+          <a:ext cx="14544672" cy="4825158"/>
+        </p:xfrm>
+        <a:graphic>
+          <a:graphicData uri="http://schemas.openxmlformats.org/drawingml/2006/table">
+            <a:tbl>
+              <a:tblPr>
+                <a:tableStyleId>{1FECB4D8-DB02-4DC6-A0A2-4F2EBAE1DC90}</a:tableStyleId>
+              </a:tblPr>
+              <a:tblGrid>
+                <a:gridCol w="4848224">
+                  <a:extLst>
+                    <a:ext uri="{9D8B030D-6E8A-4147-A177-3AD203B41FA5}">
+                      <a16:colId xmlns:a16="http://schemas.microsoft.com/office/drawing/2014/main" val="2064034466"/>
+                    </a:ext>
+                  </a:extLst>
+                </a:gridCol>
+                <a:gridCol w="4848224">
+                  <a:extLst>
+                    <a:ext uri="{9D8B030D-6E8A-4147-A177-3AD203B41FA5}">
+                      <a16:colId xmlns:a16="http://schemas.microsoft.com/office/drawing/2014/main" val="1734701952"/>
+                    </a:ext>
+                  </a:extLst>
+                </a:gridCol>
+                <a:gridCol w="4848224">
+                  <a:extLst>
+                    <a:ext uri="{9D8B030D-6E8A-4147-A177-3AD203B41FA5}">
+                      <a16:colId xmlns:a16="http://schemas.microsoft.com/office/drawing/2014/main" val="1688519770"/>
+                    </a:ext>
+                  </a:extLst>
+                </a:gridCol>
+              </a:tblGrid>
+              <a:tr h="309167">
+                <a:tc>
+                  <a:txBody>
+                    <a:bodyPr/>
+                    <a:lstStyle/>
+                    <a:p>
+                      <a:pPr>
+                        <a:buNone/>
+                      </a:pPr>
+                      <a:r>
+                        <a:rPr lang="pt-BR" sz="1300" b="1" dirty="0">
+                          <a:effectLst/>
+                        </a:rPr>
+                        <a:t>ID</a:t>
+                      </a:r>
+                    </a:p>
+                  </a:txBody>
+                  <a:tcPr marL="64644" marR="64644" marT="29836" marB="29836" anchor="ctr"/>
+                </a:tc>
+                <a:tc>
+                  <a:txBody>
+                    <a:bodyPr/>
+                    <a:lstStyle/>
+                    <a:p>
+                      <a:pPr>
+                        <a:buNone/>
+                      </a:pPr>
+                      <a:r>
+                        <a:rPr lang="pt-BR" sz="1300" b="1">
+                          <a:effectLst/>
+                        </a:rPr>
+                        <a:t>Objetivo</a:t>
+                      </a:r>
+                    </a:p>
+                  </a:txBody>
+                  <a:tcPr marL="64644" marR="64644" marT="29836" marB="29836" anchor="ctr"/>
+                </a:tc>
+                <a:tc>
+                  <a:txBody>
+                    <a:bodyPr/>
+                    <a:lstStyle/>
+                    <a:p>
+                      <a:pPr>
+                        <a:buNone/>
+                      </a:pPr>
+                      <a:r>
+                        <a:rPr lang="pt-BR" sz="1300" b="1">
+                          <a:effectLst/>
+                        </a:rPr>
+                        <a:t>Descrição</a:t>
+                      </a:r>
+                    </a:p>
+                  </a:txBody>
+                  <a:tcPr marL="64644" marR="64644" marT="29836" marB="29836" anchor="ctr"/>
+                </a:tc>
+                <a:extLst>
+                  <a:ext uri="{0D108BD9-81ED-4DB2-BD59-A6C34878D82A}">
+                    <a16:rowId xmlns:a16="http://schemas.microsoft.com/office/drawing/2014/main" val="1516199920"/>
+                  </a:ext>
+                </a:extLst>
+              </a:tr>
+              <a:tr h="654052">
+                <a:tc>
+                  <a:txBody>
+                    <a:bodyPr/>
+                    <a:lstStyle/>
+                    <a:p>
+                      <a:pPr>
+                        <a:buNone/>
+                      </a:pPr>
+                      <a:r>
+                        <a:rPr lang="pt-BR" sz="1300" dirty="0">
+                          <a:effectLst/>
+                        </a:rPr>
+                        <a:t>OBJ-01</a:t>
+                      </a:r>
+                    </a:p>
+                  </a:txBody>
+                  <a:tcPr marL="64644" marR="64644" marT="29836" marB="29836" anchor="ctr"/>
+                </a:tc>
+                <a:tc>
+                  <a:txBody>
+                    <a:bodyPr/>
+                    <a:lstStyle/>
+                    <a:p>
+                      <a:pPr>
+                        <a:buNone/>
+                      </a:pPr>
+                      <a:r>
+                        <a:rPr lang="pt-BR" sz="1300" dirty="0">
+                          <a:effectLst/>
+                        </a:rPr>
+                        <a:t>Repositório CI</a:t>
+                      </a:r>
+                    </a:p>
+                  </a:txBody>
+                  <a:tcPr marL="64644" marR="64644" marT="29836" marB="29836" anchor="ctr"/>
+                </a:tc>
+                <a:tc>
+                  <a:txBody>
+                    <a:bodyPr/>
+                    <a:lstStyle/>
+                    <a:p>
+                      <a:pPr>
+                        <a:buNone/>
+                      </a:pPr>
+                      <a:r>
+                        <a:rPr lang="pt-BR" sz="1300" dirty="0">
+                          <a:effectLst/>
+                        </a:rPr>
+                        <a:t>Configurar repositório no GitHub com boas práticas: </a:t>
+                      </a:r>
+                      <a:r>
+                        <a:rPr lang="pt-BR" sz="1300" dirty="0" err="1">
+                          <a:effectLst/>
+                        </a:rPr>
+                        <a:t>branches</a:t>
+                      </a:r>
+                      <a:r>
+                        <a:rPr lang="pt-BR" sz="1300" dirty="0">
+                          <a:effectLst/>
+                        </a:rPr>
+                        <a:t>, </a:t>
+                      </a:r>
+                      <a:r>
+                        <a:rPr lang="pt-BR" sz="1300" dirty="0" err="1">
+                          <a:effectLst/>
+                        </a:rPr>
+                        <a:t>commit</a:t>
+                      </a:r>
+                      <a:r>
+                        <a:rPr lang="pt-BR" sz="1300" dirty="0">
+                          <a:effectLst/>
+                        </a:rPr>
+                        <a:t> semântico e proteções de </a:t>
+                      </a:r>
+                      <a:r>
+                        <a:rPr lang="pt-BR" sz="1300" dirty="0" err="1">
+                          <a:effectLst/>
+                        </a:rPr>
+                        <a:t>branch</a:t>
+                      </a:r>
+                      <a:r>
+                        <a:rPr lang="pt-BR" sz="1300" dirty="0">
+                          <a:effectLst/>
+                        </a:rPr>
+                        <a:t>.</a:t>
+                      </a:r>
+                    </a:p>
+                  </a:txBody>
+                  <a:tcPr marL="64644" marR="64644" marT="29836" marB="29836" anchor="ctr"/>
+                </a:tc>
+                <a:extLst>
+                  <a:ext uri="{0D108BD9-81ED-4DB2-BD59-A6C34878D82A}">
+                    <a16:rowId xmlns:a16="http://schemas.microsoft.com/office/drawing/2014/main" val="3807238952"/>
+                  </a:ext>
+                </a:extLst>
+              </a:tr>
+              <a:tr h="654052">
+                <a:tc>
+                  <a:txBody>
+                    <a:bodyPr/>
+                    <a:lstStyle/>
+                    <a:p>
+                      <a:pPr>
+                        <a:buNone/>
+                      </a:pPr>
+                      <a:r>
+                        <a:rPr lang="pt-BR" sz="1300">
+                          <a:effectLst/>
+                        </a:rPr>
+                        <a:t>OBJ-02</a:t>
+                      </a:r>
+                    </a:p>
+                  </a:txBody>
+                  <a:tcPr marL="64644" marR="64644" marT="29836" marB="29836" anchor="ctr"/>
+                </a:tc>
+                <a:tc>
+                  <a:txBody>
+                    <a:bodyPr/>
+                    <a:lstStyle/>
+                    <a:p>
+                      <a:pPr>
+                        <a:buNone/>
+                      </a:pPr>
+                      <a:r>
+                        <a:rPr lang="pt-BR" sz="1300">
+                          <a:effectLst/>
+                        </a:rPr>
+                        <a:t>Pipeline CI</a:t>
+                      </a:r>
+                    </a:p>
+                  </a:txBody>
+                  <a:tcPr marL="64644" marR="64644" marT="29836" marB="29836" anchor="ctr"/>
+                </a:tc>
+                <a:tc>
+                  <a:txBody>
+                    <a:bodyPr/>
+                    <a:lstStyle/>
+                    <a:p>
+                      <a:pPr>
+                        <a:buNone/>
+                      </a:pPr>
+                      <a:r>
+                        <a:rPr lang="pt-BR" sz="1300">
+                          <a:effectLst/>
+                        </a:rPr>
+                        <a:t>Implementar pipeline de CI com GitHub Actions para build automático, lint e execução de testes a cada push/PR.</a:t>
+                      </a:r>
+                    </a:p>
+                  </a:txBody>
+                  <a:tcPr marL="64644" marR="64644" marT="29836" marB="29836" anchor="ctr"/>
+                </a:tc>
+                <a:extLst>
+                  <a:ext uri="{0D108BD9-81ED-4DB2-BD59-A6C34878D82A}">
+                    <a16:rowId xmlns:a16="http://schemas.microsoft.com/office/drawing/2014/main" val="3079331663"/>
+                  </a:ext>
+                </a:extLst>
+              </a:tr>
+              <a:tr h="806243">
+                <a:tc>
+                  <a:txBody>
+                    <a:bodyPr/>
+                    <a:lstStyle/>
+                    <a:p>
+                      <a:pPr>
+                        <a:buNone/>
+                      </a:pPr>
+                      <a:r>
+                        <a:rPr lang="pt-BR" sz="1300">
+                          <a:effectLst/>
+                        </a:rPr>
+                        <a:t>OBJ-03</a:t>
+                      </a:r>
+                    </a:p>
+                  </a:txBody>
+                  <a:tcPr marL="64644" marR="64644" marT="29836" marB="29836" anchor="ctr"/>
+                </a:tc>
+                <a:tc>
+                  <a:txBody>
+                    <a:bodyPr/>
+                    <a:lstStyle/>
+                    <a:p>
+                      <a:pPr>
+                        <a:buNone/>
+                      </a:pPr>
+                      <a:r>
+                        <a:rPr lang="pt-BR" sz="1300">
+                          <a:effectLst/>
+                        </a:rPr>
+                        <a:t>Infraestrutura como Código</a:t>
+                      </a:r>
+                    </a:p>
+                  </a:txBody>
+                  <a:tcPr marL="64644" marR="64644" marT="29836" marB="29836" anchor="ctr"/>
+                </a:tc>
+                <a:tc>
+                  <a:txBody>
+                    <a:bodyPr/>
+                    <a:lstStyle/>
+                    <a:p>
+                      <a:pPr>
+                        <a:buNone/>
+                      </a:pPr>
+                      <a:r>
+                        <a:rPr lang="pt-BR" sz="1300">
+                          <a:effectLst/>
+                        </a:rPr>
+                        <a:t>Desenvolver templates AWS CloudFormation para provisionamento da infraestrutura necessária (EC2, S3, IAM, etc.).</a:t>
+                      </a:r>
+                    </a:p>
+                  </a:txBody>
+                  <a:tcPr marL="64644" marR="64644" marT="29836" marB="29836" anchor="ctr"/>
+                </a:tc>
+                <a:extLst>
+                  <a:ext uri="{0D108BD9-81ED-4DB2-BD59-A6C34878D82A}">
+                    <a16:rowId xmlns:a16="http://schemas.microsoft.com/office/drawing/2014/main" val="3483340808"/>
+                  </a:ext>
+                </a:extLst>
+              </a:tr>
+              <a:tr h="654052">
+                <a:tc>
+                  <a:txBody>
+                    <a:bodyPr/>
+                    <a:lstStyle/>
+                    <a:p>
+                      <a:pPr>
+                        <a:buNone/>
+                      </a:pPr>
+                      <a:r>
+                        <a:rPr lang="pt-BR" sz="1300">
+                          <a:effectLst/>
+                        </a:rPr>
+                        <a:t>OBJ-04</a:t>
+                      </a:r>
+                    </a:p>
+                  </a:txBody>
+                  <a:tcPr marL="64644" marR="64644" marT="29836" marB="29836" anchor="ctr"/>
+                </a:tc>
+                <a:tc>
+                  <a:txBody>
+                    <a:bodyPr/>
+                    <a:lstStyle/>
+                    <a:p>
+                      <a:pPr>
+                        <a:buNone/>
+                      </a:pPr>
+                      <a:r>
+                        <a:rPr lang="pt-BR" sz="1300">
+                          <a:effectLst/>
+                        </a:rPr>
+                        <a:t>Entrega Contínua (Fase 2)</a:t>
+                      </a:r>
+                    </a:p>
+                  </a:txBody>
+                  <a:tcPr marL="64644" marR="64644" marT="29836" marB="29836" anchor="ctr"/>
+                </a:tc>
+                <a:tc>
+                  <a:txBody>
+                    <a:bodyPr/>
+                    <a:lstStyle/>
+                    <a:p>
+                      <a:pPr>
+                        <a:buNone/>
+                      </a:pPr>
+                      <a:r>
+                        <a:rPr lang="pt-BR" sz="1300">
+                          <a:effectLst/>
+                        </a:rPr>
+                        <a:t>Expandir o pipeline para CD, automatizando o deploy em ambiente AWS após a aprovação dos testes.</a:t>
+                      </a:r>
+                    </a:p>
+                  </a:txBody>
+                  <a:tcPr marL="64644" marR="64644" marT="29836" marB="29836" anchor="ctr"/>
+                </a:tc>
+                <a:extLst>
+                  <a:ext uri="{0D108BD9-81ED-4DB2-BD59-A6C34878D82A}">
+                    <a16:rowId xmlns:a16="http://schemas.microsoft.com/office/drawing/2014/main" val="153004129"/>
+                  </a:ext>
+                </a:extLst>
+              </a:tr>
+              <a:tr h="546770">
+                <a:tc>
+                  <a:txBody>
+                    <a:bodyPr/>
+                    <a:lstStyle/>
+                    <a:p>
+                      <a:pPr>
+                        <a:buNone/>
+                      </a:pPr>
+                      <a:r>
+                        <a:rPr lang="pt-BR" sz="1300">
+                          <a:effectLst/>
+                        </a:rPr>
+                        <a:t>OBJ-05</a:t>
+                      </a:r>
+                    </a:p>
+                  </a:txBody>
+                  <a:tcPr marL="64644" marR="64644" marT="29836" marB="29836" anchor="ctr"/>
+                </a:tc>
+                <a:tc>
+                  <a:txBody>
+                    <a:bodyPr/>
+                    <a:lstStyle/>
+                    <a:p>
+                      <a:pPr>
+                        <a:buNone/>
+                      </a:pPr>
+                      <a:r>
+                        <a:rPr lang="pt-BR" sz="1300">
+                          <a:effectLst/>
+                        </a:rPr>
+                        <a:t>Containerização (Fase 2)</a:t>
+                      </a:r>
+                    </a:p>
+                  </a:txBody>
+                  <a:tcPr marL="64644" marR="64644" marT="29836" marB="29836" anchor="ctr"/>
+                </a:tc>
+                <a:tc>
+                  <a:txBody>
+                    <a:bodyPr/>
+                    <a:lstStyle/>
+                    <a:p>
+                      <a:pPr>
+                        <a:buNone/>
+                      </a:pPr>
+                      <a:r>
+                        <a:rPr lang="pt-BR" sz="1300">
+                          <a:effectLst/>
+                        </a:rPr>
+                        <a:t>Containerizar a aplicação com Docker e criar scripts de deploy baseados em containers.</a:t>
+                      </a:r>
+                    </a:p>
+                  </a:txBody>
+                  <a:tcPr marL="64644" marR="64644" marT="29836" marB="29836" anchor="ctr"/>
+                </a:tc>
+                <a:extLst>
+                  <a:ext uri="{0D108BD9-81ED-4DB2-BD59-A6C34878D82A}">
+                    <a16:rowId xmlns:a16="http://schemas.microsoft.com/office/drawing/2014/main" val="1436763573"/>
+                  </a:ext>
+                </a:extLst>
+              </a:tr>
+              <a:tr h="654052">
+                <a:tc>
+                  <a:txBody>
+                    <a:bodyPr/>
+                    <a:lstStyle/>
+                    <a:p>
+                      <a:pPr>
+                        <a:buNone/>
+                      </a:pPr>
+                      <a:r>
+                        <a:rPr lang="pt-BR" sz="1300">
+                          <a:effectLst/>
+                        </a:rPr>
+                        <a:t>OBJ-06</a:t>
+                      </a:r>
+                    </a:p>
+                  </a:txBody>
+                  <a:tcPr marL="64644" marR="64644" marT="29836" marB="29836" anchor="ctr"/>
+                </a:tc>
+                <a:tc>
+                  <a:txBody>
+                    <a:bodyPr/>
+                    <a:lstStyle/>
+                    <a:p>
+                      <a:pPr>
+                        <a:buNone/>
+                      </a:pPr>
+                      <a:r>
+                        <a:rPr lang="pt-BR" sz="1300">
+                          <a:effectLst/>
+                        </a:rPr>
+                        <a:t>Monitoramento (Fase 2)</a:t>
+                      </a:r>
+                    </a:p>
+                  </a:txBody>
+                  <a:tcPr marL="64644" marR="64644" marT="29836" marB="29836" anchor="ctr"/>
+                </a:tc>
+                <a:tc>
+                  <a:txBody>
+                    <a:bodyPr/>
+                    <a:lstStyle/>
+                    <a:p>
+                      <a:pPr>
+                        <a:buNone/>
+                      </a:pPr>
+                      <a:r>
+                        <a:rPr lang="pt-BR" sz="1300">
+                          <a:effectLst/>
+                        </a:rPr>
+                        <a:t>Configurar monitoramento e logging com AWS CloudWatch para observabilidade em produção.</a:t>
+                      </a:r>
+                    </a:p>
+                  </a:txBody>
+                  <a:tcPr marL="64644" marR="64644" marT="29836" marB="29836" anchor="ctr"/>
+                </a:tc>
+                <a:extLst>
+                  <a:ext uri="{0D108BD9-81ED-4DB2-BD59-A6C34878D82A}">
+                    <a16:rowId xmlns:a16="http://schemas.microsoft.com/office/drawing/2014/main" val="964162858"/>
+                  </a:ext>
+                </a:extLst>
+              </a:tr>
+              <a:tr h="546770">
+                <a:tc>
+                  <a:txBody>
+                    <a:bodyPr/>
+                    <a:lstStyle/>
+                    <a:p>
+                      <a:pPr>
+                        <a:buNone/>
+                      </a:pPr>
+                      <a:r>
+                        <a:rPr lang="pt-BR" sz="1300">
+                          <a:effectLst/>
+                        </a:rPr>
+                        <a:t>OBJ-07</a:t>
+                      </a:r>
+                    </a:p>
+                  </a:txBody>
+                  <a:tcPr marL="64644" marR="64644" marT="29836" marB="29836" anchor="ctr"/>
+                </a:tc>
+                <a:tc>
+                  <a:txBody>
+                    <a:bodyPr/>
+                    <a:lstStyle/>
+                    <a:p>
+                      <a:pPr>
+                        <a:buNone/>
+                      </a:pPr>
+                      <a:r>
+                        <a:rPr lang="pt-BR" sz="1300">
+                          <a:effectLst/>
+                        </a:rPr>
+                        <a:t>Documentação</a:t>
+                      </a:r>
+                    </a:p>
+                  </a:txBody>
+                  <a:tcPr marL="64644" marR="64644" marT="29836" marB="29836" anchor="ctr"/>
+                </a:tc>
+                <a:tc>
+                  <a:txBody>
+                    <a:bodyPr/>
+                    <a:lstStyle/>
+                    <a:p>
+                      <a:pPr>
+                        <a:buNone/>
+                      </a:pPr>
+                      <a:r>
+                        <a:rPr lang="pt-BR" sz="1300" dirty="0">
+                          <a:effectLst/>
+                        </a:rPr>
+                        <a:t>Documentar todas as etapas, decisões técnicas e resultados obtidos ao longo do projeto.</a:t>
+                      </a:r>
+                    </a:p>
+                  </a:txBody>
+                  <a:tcPr marL="64644" marR="64644" marT="29836" marB="29836" anchor="ctr"/>
+                </a:tc>
+                <a:extLst>
+                  <a:ext uri="{0D108BD9-81ED-4DB2-BD59-A6C34878D82A}">
+                    <a16:rowId xmlns:a16="http://schemas.microsoft.com/office/drawing/2014/main" val="1708554767"/>
+                  </a:ext>
+                </a:extLst>
+              </a:tr>
+            </a:tbl>
+          </a:graphicData>
+        </a:graphic>
+      </p:graphicFrame>
     </p:spTree>
     <p:extLst>
       <p:ext uri="{BB962C8B-B14F-4D97-AF65-F5344CB8AC3E}">
-        <p14:creationId xmlns:p14="http://schemas.microsoft.com/office/powerpoint/2010/main" val="1375584897"/>
+        <p14:creationId xmlns:p14="http://schemas.microsoft.com/office/powerpoint/2010/main" val="423612267"/>
       </p:ext>
     </p:extLst>
   </p:cSld>
@@ -6273,7 +11150,13 @@
   <p:cSld>
     <p:spTree>
       <p:nvGrpSpPr>
-        <p:cNvPr id="1" name=""/>
+        <p:cNvPr id="1" name="">
+          <a:extLst>
+            <a:ext uri="{FF2B5EF4-FFF2-40B4-BE49-F238E27FC236}">
+              <a16:creationId xmlns:a16="http://schemas.microsoft.com/office/drawing/2014/main" id="{C3C14FF9-D5CD-CE04-14EF-8D7B2B7FC147}"/>
+            </a:ext>
+          </a:extLst>
+        </p:cNvPr>
         <p:cNvGrpSpPr/>
         <p:nvPr/>
       </p:nvGrpSpPr>
@@ -6285,10 +11168,163 @@
           <a:chExt cx="0" cy="0"/>
         </a:xfrm>
       </p:grpSpPr>
+      <p:sp>
+        <p:nvSpPr>
+          <p:cNvPr id="3" name="Espaço Reservado para Texto 2">
+            <a:extLst>
+              <a:ext uri="{FF2B5EF4-FFF2-40B4-BE49-F238E27FC236}">
+                <a16:creationId xmlns:a16="http://schemas.microsoft.com/office/drawing/2014/main" id="{15200F98-5E64-DD21-885E-0541F32277D6}"/>
+              </a:ext>
+            </a:extLst>
+          </p:cNvPr>
+          <p:cNvSpPr>
+            <a:spLocks noGrp="1"/>
+          </p:cNvSpPr>
+          <p:nvPr>
+            <p:ph type="body" sz="quarter" idx="10"/>
+          </p:nvPr>
+        </p:nvSpPr>
+        <p:spPr/>
+        <p:txBody>
+          <a:bodyPr/>
+          <a:lstStyle/>
+          <a:p>
+            <a:r>
+              <a:rPr lang="pt-BR" b="1" dirty="0"/>
+              <a:t>2.3 Escopo da Fase 1</a:t>
+            </a:r>
+          </a:p>
+          <a:p>
+            <a:r>
+              <a:rPr lang="pt-BR" b="1" dirty="0"/>
+              <a:t>Incluído no escopo:</a:t>
+            </a:r>
+            <a:endParaRPr lang="pt-BR" dirty="0"/>
+          </a:p>
+          <a:p>
+            <a:pPr marL="285750" indent="-285750">
+              <a:buFont typeface="Arial" panose="020B0604020202020204" pitchFamily="34" charset="0"/>
+              <a:buChar char="•"/>
+            </a:pPr>
+            <a:r>
+              <a:rPr lang="pt-BR" dirty="0"/>
+              <a:t>Documentação de planejamento (este documento)</a:t>
+            </a:r>
+          </a:p>
+          <a:p>
+            <a:pPr marL="285750" indent="-285750">
+              <a:buFont typeface="Arial" panose="020B0604020202020204" pitchFamily="34" charset="0"/>
+              <a:buChar char="•"/>
+            </a:pPr>
+            <a:r>
+              <a:rPr lang="pt-BR" dirty="0"/>
+              <a:t>Configuração do repositório GitHub com estrutura de </a:t>
+            </a:r>
+            <a:r>
+              <a:rPr lang="pt-BR" dirty="0" err="1"/>
+              <a:t>branches</a:t>
+            </a:r>
+            <a:r>
+              <a:rPr lang="pt-BR" dirty="0"/>
+              <a:t> e CI</a:t>
+            </a:r>
+          </a:p>
+          <a:p>
+            <a:pPr marL="285750" indent="-285750">
+              <a:buFont typeface="Arial" panose="020B0604020202020204" pitchFamily="34" charset="0"/>
+              <a:buChar char="•"/>
+            </a:pPr>
+            <a:r>
+              <a:rPr lang="pt-BR" dirty="0"/>
+              <a:t>Implementação do pipeline de CI usando GitHub </a:t>
+            </a:r>
+            <a:r>
+              <a:rPr lang="pt-BR" dirty="0" err="1"/>
+              <a:t>Actions</a:t>
+            </a:r>
+            <a:endParaRPr lang="pt-BR" dirty="0"/>
+          </a:p>
+          <a:p>
+            <a:pPr marL="285750" indent="-285750">
+              <a:buFont typeface="Arial" panose="020B0604020202020204" pitchFamily="34" charset="0"/>
+              <a:buChar char="•"/>
+            </a:pPr>
+            <a:r>
+              <a:rPr lang="pt-BR" dirty="0"/>
+              <a:t>Desenvolvimento dos scripts de Infraestrutura como Código com AWS </a:t>
+            </a:r>
+            <a:r>
+              <a:rPr lang="pt-BR" dirty="0" err="1"/>
+              <a:t>CloudFormation</a:t>
+            </a:r>
+            <a:endParaRPr lang="pt-BR" dirty="0"/>
+          </a:p>
+          <a:p>
+            <a:r>
+              <a:rPr lang="pt-BR" b="1" dirty="0"/>
+              <a:t>Fora do escopo (Fase 2):</a:t>
+            </a:r>
+            <a:endParaRPr lang="pt-BR" dirty="0"/>
+          </a:p>
+          <a:p>
+            <a:pPr marL="285750" indent="-285750">
+              <a:buFont typeface="Arial" panose="020B0604020202020204" pitchFamily="34" charset="0"/>
+              <a:buChar char="•"/>
+            </a:pPr>
+            <a:r>
+              <a:rPr lang="pt-BR" dirty="0"/>
+              <a:t>Entrega Contínua (CD) e </a:t>
+            </a:r>
+            <a:r>
+              <a:rPr lang="pt-BR" dirty="0" err="1"/>
+              <a:t>deploy</a:t>
+            </a:r>
+            <a:r>
+              <a:rPr lang="pt-BR" dirty="0"/>
+              <a:t> automatizado</a:t>
+            </a:r>
+          </a:p>
+          <a:p>
+            <a:pPr marL="285750" indent="-285750">
+              <a:buFont typeface="Arial" panose="020B0604020202020204" pitchFamily="34" charset="0"/>
+              <a:buChar char="•"/>
+            </a:pPr>
+            <a:r>
+              <a:rPr lang="pt-BR" dirty="0" err="1"/>
+              <a:t>Containerização</a:t>
+            </a:r>
+            <a:r>
+              <a:rPr lang="pt-BR" dirty="0"/>
+              <a:t> com Docker</a:t>
+            </a:r>
+          </a:p>
+          <a:p>
+            <a:pPr marL="285750" indent="-285750">
+              <a:buFont typeface="Arial" panose="020B0604020202020204" pitchFamily="34" charset="0"/>
+              <a:buChar char="•"/>
+            </a:pPr>
+            <a:r>
+              <a:rPr lang="pt-BR" dirty="0"/>
+              <a:t>Monitoramento, </a:t>
+            </a:r>
+            <a:r>
+              <a:rPr lang="pt-BR" dirty="0" err="1"/>
+              <a:t>logging</a:t>
+            </a:r>
+            <a:r>
+              <a:rPr lang="pt-BR" dirty="0"/>
+              <a:t> e segurança avançada</a:t>
+            </a:r>
+          </a:p>
+          <a:p>
+            <a:endParaRPr lang="pt-BR" dirty="0"/>
+          </a:p>
+        </p:txBody>
+      </p:sp>
     </p:spTree>
     <p:extLst>
       <p:ext uri="{BB962C8B-B14F-4D97-AF65-F5344CB8AC3E}">
-        <p14:creationId xmlns:p14="http://schemas.microsoft.com/office/powerpoint/2010/main" val="1999929606"/>
+        <p14:creationId xmlns:p14="http://schemas.microsoft.com/office/powerpoint/2010/main" val="2423736681"/>
       </p:ext>
     </p:extLst>
   </p:cSld>
@@ -6303,7 +11339,13 @@
   <p:cSld>
     <p:spTree>
       <p:nvGrpSpPr>
-        <p:cNvPr id="1" name=""/>
+        <p:cNvPr id="1" name="">
+          <a:extLst>
+            <a:ext uri="{FF2B5EF4-FFF2-40B4-BE49-F238E27FC236}">
+              <a16:creationId xmlns:a16="http://schemas.microsoft.com/office/drawing/2014/main" id="{99846F3E-709D-3249-4D4D-363E9BB3A2F5}"/>
+            </a:ext>
+          </a:extLst>
+        </p:cNvPr>
         <p:cNvGrpSpPr/>
         <p:nvPr/>
       </p:nvGrpSpPr>
@@ -6317,10 +11359,10 @@
       </p:grpSpPr>
       <p:sp>
         <p:nvSpPr>
-          <p:cNvPr id="2" name="Espaço Reservado para Texto 1">
+          <p:cNvPr id="3" name="Espaço Reservado para Texto 2">
             <a:extLst>
               <a:ext uri="{FF2B5EF4-FFF2-40B4-BE49-F238E27FC236}">
-                <a16:creationId xmlns:a16="http://schemas.microsoft.com/office/drawing/2014/main" id="{0796DCB6-D43A-4EB7-8614-1476A7E4B4E8}"/>
+                <a16:creationId xmlns:a16="http://schemas.microsoft.com/office/drawing/2014/main" id="{D0C92FF5-E4E1-BB7C-DA31-E1262003F481}"/>
               </a:ext>
             </a:extLst>
           </p:cNvPr>
@@ -6336,39 +11378,463 @@
           <a:bodyPr/>
           <a:lstStyle/>
           <a:p>
-            <a:endParaRPr lang="pt-BR"/>
+            <a:r>
+              <a:rPr lang="pt-BR" b="1" dirty="0"/>
+              <a:t>3. Requisitos do Projeto</a:t>
+            </a:r>
+          </a:p>
+          <a:p>
+            <a:r>
+              <a:rPr lang="pt-BR" b="1" dirty="0"/>
+              <a:t>3.1 Requisitos Funcionais</a:t>
+            </a:r>
+          </a:p>
+          <a:p>
+            <a:endParaRPr lang="pt-BR" dirty="0"/>
           </a:p>
         </p:txBody>
       </p:sp>
-      <p:sp>
-        <p:nvSpPr>
-          <p:cNvPr id="3" name="Espaço Reservado para Texto 2">
+      <p:graphicFrame>
+        <p:nvGraphicFramePr>
+          <p:cNvPr id="7" name="Tabela 6">
             <a:extLst>
               <a:ext uri="{FF2B5EF4-FFF2-40B4-BE49-F238E27FC236}">
-                <a16:creationId xmlns:a16="http://schemas.microsoft.com/office/drawing/2014/main" id="{2A21E794-B8F1-4074-A736-C3EC5824ADE5}"/>
+                <a16:creationId xmlns:a16="http://schemas.microsoft.com/office/drawing/2014/main" id="{16893675-9D45-C353-B617-5F475881E6AE}"/>
               </a:ext>
             </a:extLst>
           </p:cNvPr>
-          <p:cNvSpPr>
-            <a:spLocks noGrp="1"/>
-          </p:cNvSpPr>
+          <p:cNvGraphicFramePr>
+            <a:graphicFrameLocks noGrp="1"/>
+          </p:cNvGraphicFramePr>
           <p:nvPr>
-            <p:ph type="body" sz="quarter" idx="11"/>
+            <p:extLst>
+              <p:ext uri="{D42A27DB-BD31-4B8C-83A1-F6EECF244321}">
+                <p14:modId xmlns:p14="http://schemas.microsoft.com/office/powerpoint/2010/main" val="554547083"/>
+              </p:ext>
+            </p:extLst>
           </p:nvPr>
-        </p:nvSpPr>
-        <p:spPr/>
-        <p:txBody>
-          <a:bodyPr/>
-          <a:lstStyle/>
-          <a:p>
-            <a:endParaRPr lang="pt-BR"/>
-          </a:p>
-        </p:txBody>
-      </p:sp>
+        </p:nvGraphicFramePr>
+        <p:xfrm>
+          <a:off x="2661313" y="3016154"/>
+          <a:ext cx="11571172" cy="5703415"/>
+        </p:xfrm>
+        <a:graphic>
+          <a:graphicData uri="http://schemas.openxmlformats.org/drawingml/2006/table">
+            <a:tbl>
+              <a:tblPr>
+                <a:tableStyleId>{1FECB4D8-DB02-4DC6-A0A2-4F2EBAE1DC90}</a:tableStyleId>
+              </a:tblPr>
+              <a:tblGrid>
+                <a:gridCol w="1651380">
+                  <a:extLst>
+                    <a:ext uri="{9D8B030D-6E8A-4147-A177-3AD203B41FA5}">
+                      <a16:colId xmlns:a16="http://schemas.microsoft.com/office/drawing/2014/main" val="3283636135"/>
+                    </a:ext>
+                  </a:extLst>
+                </a:gridCol>
+                <a:gridCol w="9919792">
+                  <a:extLst>
+                    <a:ext uri="{9D8B030D-6E8A-4147-A177-3AD203B41FA5}">
+                      <a16:colId xmlns:a16="http://schemas.microsoft.com/office/drawing/2014/main" val="3335201694"/>
+                    </a:ext>
+                  </a:extLst>
+                </a:gridCol>
+              </a:tblGrid>
+              <a:tr h="326720">
+                <a:tc>
+                  <a:txBody>
+                    <a:bodyPr/>
+                    <a:lstStyle/>
+                    <a:p>
+                      <a:pPr>
+                        <a:buNone/>
+                      </a:pPr>
+                      <a:r>
+                        <a:rPr lang="pt-BR" sz="1800" b="1">
+                          <a:effectLst/>
+                        </a:rPr>
+                        <a:t>ID</a:t>
+                      </a:r>
+                    </a:p>
+                  </a:txBody>
+                  <a:tcPr marL="86599" marR="86599" marT="39969" marB="39969" anchor="ctr"/>
+                </a:tc>
+                <a:tc>
+                  <a:txBody>
+                    <a:bodyPr/>
+                    <a:lstStyle/>
+                    <a:p>
+                      <a:pPr>
+                        <a:buNone/>
+                      </a:pPr>
+                      <a:r>
+                        <a:rPr lang="pt-BR" sz="1800" b="1">
+                          <a:effectLst/>
+                        </a:rPr>
+                        <a:t>Requisito Funcional</a:t>
+                      </a:r>
+                    </a:p>
+                  </a:txBody>
+                  <a:tcPr marL="86599" marR="86599" marT="39969" marB="39969" anchor="ctr"/>
+                </a:tc>
+                <a:extLst>
+                  <a:ext uri="{0D108BD9-81ED-4DB2-BD59-A6C34878D82A}">
+                    <a16:rowId xmlns:a16="http://schemas.microsoft.com/office/drawing/2014/main" val="131035794"/>
+                  </a:ext>
+                </a:extLst>
+              </a:tr>
+              <a:tr h="579716">
+                <a:tc>
+                  <a:txBody>
+                    <a:bodyPr/>
+                    <a:lstStyle/>
+                    <a:p>
+                      <a:pPr>
+                        <a:buNone/>
+                      </a:pPr>
+                      <a:r>
+                        <a:rPr lang="pt-BR" sz="1800" dirty="0">
+                          <a:effectLst/>
+                        </a:rPr>
+                        <a:t>RF-01</a:t>
+                      </a:r>
+                    </a:p>
+                  </a:txBody>
+                  <a:tcPr marL="86599" marR="86599" marT="39969" marB="39969" anchor="ctr"/>
+                </a:tc>
+                <a:tc>
+                  <a:txBody>
+                    <a:bodyPr/>
+                    <a:lstStyle/>
+                    <a:p>
+                      <a:pPr>
+                        <a:buNone/>
+                      </a:pPr>
+                      <a:r>
+                        <a:rPr lang="pt-BR" sz="1800">
+                          <a:effectLst/>
+                        </a:rPr>
+                        <a:t>O sistema deve possuir um repositório de código no GitHub com branch principal protegida.</a:t>
+                      </a:r>
+                    </a:p>
+                  </a:txBody>
+                  <a:tcPr marL="86599" marR="86599" marT="39969" marB="39969" anchor="ctr"/>
+                </a:tc>
+                <a:extLst>
+                  <a:ext uri="{0D108BD9-81ED-4DB2-BD59-A6C34878D82A}">
+                    <a16:rowId xmlns:a16="http://schemas.microsoft.com/office/drawing/2014/main" val="815800707"/>
+                  </a:ext>
+                </a:extLst>
+              </a:tr>
+              <a:tr h="816859">
+                <a:tc>
+                  <a:txBody>
+                    <a:bodyPr/>
+                    <a:lstStyle/>
+                    <a:p>
+                      <a:pPr>
+                        <a:buNone/>
+                      </a:pPr>
+                      <a:r>
+                        <a:rPr lang="pt-BR" sz="1800">
+                          <a:effectLst/>
+                        </a:rPr>
+                        <a:t>RF-02</a:t>
+                      </a:r>
+                    </a:p>
+                  </a:txBody>
+                  <a:tcPr marL="86599" marR="86599" marT="39969" marB="39969" anchor="ctr"/>
+                </a:tc>
+                <a:tc>
+                  <a:txBody>
+                    <a:bodyPr/>
+                    <a:lstStyle/>
+                    <a:p>
+                      <a:pPr>
+                        <a:buNone/>
+                      </a:pPr>
+                      <a:r>
+                        <a:rPr lang="pt-BR" sz="1800">
+                          <a:effectLst/>
+                        </a:rPr>
+                        <a:t>O pipeline de CI deve ser acionado automaticamente a cada push na branch main e em pull requests.</a:t>
+                      </a:r>
+                    </a:p>
+                  </a:txBody>
+                  <a:tcPr marL="86599" marR="86599" marT="39969" marB="39969" anchor="ctr"/>
+                </a:tc>
+                <a:extLst>
+                  <a:ext uri="{0D108BD9-81ED-4DB2-BD59-A6C34878D82A}">
+                    <a16:rowId xmlns:a16="http://schemas.microsoft.com/office/drawing/2014/main" val="1084160307"/>
+                  </a:ext>
+                </a:extLst>
+              </a:tr>
+              <a:tr h="816859">
+                <a:tc>
+                  <a:txBody>
+                    <a:bodyPr/>
+                    <a:lstStyle/>
+                    <a:p>
+                      <a:pPr>
+                        <a:buNone/>
+                      </a:pPr>
+                      <a:r>
+                        <a:rPr lang="pt-BR" sz="1800">
+                          <a:effectLst/>
+                        </a:rPr>
+                        <a:t>RF-03</a:t>
+                      </a:r>
+                    </a:p>
+                  </a:txBody>
+                  <a:tcPr marL="86599" marR="86599" marT="39969" marB="39969" anchor="ctr"/>
+                </a:tc>
+                <a:tc>
+                  <a:txBody>
+                    <a:bodyPr/>
+                    <a:lstStyle/>
+                    <a:p>
+                      <a:pPr>
+                        <a:buNone/>
+                      </a:pPr>
+                      <a:r>
+                        <a:rPr lang="pt-BR" sz="1800">
+                          <a:effectLst/>
+                        </a:rPr>
+                        <a:t>O pipeline deve executar a instalação de dependências, lint e testes unitários automaticamente.</a:t>
+                      </a:r>
+                    </a:p>
+                  </a:txBody>
+                  <a:tcPr marL="86599" marR="86599" marT="39969" marB="39969" anchor="ctr"/>
+                </a:tc>
+                <a:extLst>
+                  <a:ext uri="{0D108BD9-81ED-4DB2-BD59-A6C34878D82A}">
+                    <a16:rowId xmlns:a16="http://schemas.microsoft.com/office/drawing/2014/main" val="3472044750"/>
+                  </a:ext>
+                </a:extLst>
+              </a:tr>
+              <a:tr h="579716">
+                <a:tc>
+                  <a:txBody>
+                    <a:bodyPr/>
+                    <a:lstStyle/>
+                    <a:p>
+                      <a:pPr>
+                        <a:buNone/>
+                      </a:pPr>
+                      <a:r>
+                        <a:rPr lang="pt-BR" sz="1800">
+                          <a:effectLst/>
+                        </a:rPr>
+                        <a:t>RF-04</a:t>
+                      </a:r>
+                    </a:p>
+                  </a:txBody>
+                  <a:tcPr marL="86599" marR="86599" marT="39969" marB="39969" anchor="ctr"/>
+                </a:tc>
+                <a:tc>
+                  <a:txBody>
+                    <a:bodyPr/>
+                    <a:lstStyle/>
+                    <a:p>
+                      <a:pPr>
+                        <a:buNone/>
+                      </a:pPr>
+                      <a:r>
+                        <a:rPr lang="pt-BR" sz="1800">
+                          <a:effectLst/>
+                        </a:rPr>
+                        <a:t>O pipeline deve notificar o resultado do build (sucesso ou falha) no GitHub.</a:t>
+                      </a:r>
+                    </a:p>
+                  </a:txBody>
+                  <a:tcPr marL="86599" marR="86599" marT="39969" marB="39969" anchor="ctr"/>
+                </a:tc>
+                <a:extLst>
+                  <a:ext uri="{0D108BD9-81ED-4DB2-BD59-A6C34878D82A}">
+                    <a16:rowId xmlns:a16="http://schemas.microsoft.com/office/drawing/2014/main" val="4071861692"/>
+                  </a:ext>
+                </a:extLst>
+              </a:tr>
+              <a:tr h="816859">
+                <a:tc>
+                  <a:txBody>
+                    <a:bodyPr/>
+                    <a:lstStyle/>
+                    <a:p>
+                      <a:pPr>
+                        <a:buNone/>
+                      </a:pPr>
+                      <a:r>
+                        <a:rPr lang="pt-BR" sz="1800">
+                          <a:effectLst/>
+                        </a:rPr>
+                        <a:t>RF-05</a:t>
+                      </a:r>
+                    </a:p>
+                  </a:txBody>
+                  <a:tcPr marL="86599" marR="86599" marT="39969" marB="39969" anchor="ctr"/>
+                </a:tc>
+                <a:tc>
+                  <a:txBody>
+                    <a:bodyPr/>
+                    <a:lstStyle/>
+                    <a:p>
+                      <a:pPr>
+                        <a:buNone/>
+                      </a:pPr>
+                      <a:r>
+                        <a:rPr lang="pt-BR" sz="1800">
+                          <a:effectLst/>
+                        </a:rPr>
+                        <a:t>Os templates CloudFormation devem provisionar pelo menos uma instância EC2 e um bucket S3 na AWS.</a:t>
+                      </a:r>
+                    </a:p>
+                  </a:txBody>
+                  <a:tcPr marL="86599" marR="86599" marT="39969" marB="39969" anchor="ctr"/>
+                </a:tc>
+                <a:extLst>
+                  <a:ext uri="{0D108BD9-81ED-4DB2-BD59-A6C34878D82A}">
+                    <a16:rowId xmlns:a16="http://schemas.microsoft.com/office/drawing/2014/main" val="2725184496"/>
+                  </a:ext>
+                </a:extLst>
+              </a:tr>
+              <a:tr h="579716">
+                <a:tc>
+                  <a:txBody>
+                    <a:bodyPr/>
+                    <a:lstStyle/>
+                    <a:p>
+                      <a:pPr>
+                        <a:buNone/>
+                      </a:pPr>
+                      <a:r>
+                        <a:rPr lang="pt-BR" sz="1800">
+                          <a:effectLst/>
+                        </a:rPr>
+                        <a:t>RF-06</a:t>
+                      </a:r>
+                    </a:p>
+                  </a:txBody>
+                  <a:tcPr marL="86599" marR="86599" marT="39969" marB="39969" anchor="ctr"/>
+                </a:tc>
+                <a:tc>
+                  <a:txBody>
+                    <a:bodyPr/>
+                    <a:lstStyle/>
+                    <a:p>
+                      <a:pPr>
+                        <a:buNone/>
+                      </a:pPr>
+                      <a:r>
+                        <a:rPr lang="pt-BR" sz="1800">
+                          <a:effectLst/>
+                        </a:rPr>
+                        <a:t>O template CloudFormation deve ser parametrizável (ambiente: dev, staging, prod).</a:t>
+                      </a:r>
+                    </a:p>
+                  </a:txBody>
+                  <a:tcPr marL="86599" marR="86599" marT="39969" marB="39969" anchor="ctr"/>
+                </a:tc>
+                <a:extLst>
+                  <a:ext uri="{0D108BD9-81ED-4DB2-BD59-A6C34878D82A}">
+                    <a16:rowId xmlns:a16="http://schemas.microsoft.com/office/drawing/2014/main" val="3447959205"/>
+                  </a:ext>
+                </a:extLst>
+              </a:tr>
+              <a:tr h="579716">
+                <a:tc>
+                  <a:txBody>
+                    <a:bodyPr/>
+                    <a:lstStyle/>
+                    <a:p>
+                      <a:pPr>
+                        <a:buNone/>
+                      </a:pPr>
+                      <a:r>
+                        <a:rPr lang="pt-BR" sz="1800">
+                          <a:effectLst/>
+                        </a:rPr>
+                        <a:t>RF-07</a:t>
+                      </a:r>
+                    </a:p>
+                  </a:txBody>
+                  <a:tcPr marL="86599" marR="86599" marT="39969" marB="39969" anchor="ctr"/>
+                </a:tc>
+                <a:tc>
+                  <a:txBody>
+                    <a:bodyPr/>
+                    <a:lstStyle/>
+                    <a:p>
+                      <a:pPr>
+                        <a:buNone/>
+                      </a:pPr>
+                      <a:r>
+                        <a:rPr lang="pt-BR" sz="1800">
+                          <a:effectLst/>
+                        </a:rPr>
+                        <a:t>A aplicação deve expor ao menos um endpoint HTTP funcional e testado.</a:t>
+                      </a:r>
+                    </a:p>
+                  </a:txBody>
+                  <a:tcPr marL="86599" marR="86599" marT="39969" marB="39969" anchor="ctr"/>
+                </a:tc>
+                <a:extLst>
+                  <a:ext uri="{0D108BD9-81ED-4DB2-BD59-A6C34878D82A}">
+                    <a16:rowId xmlns:a16="http://schemas.microsoft.com/office/drawing/2014/main" val="13741297"/>
+                  </a:ext>
+                </a:extLst>
+              </a:tr>
+              <a:tr h="579716">
+                <a:tc>
+                  <a:txBody>
+                    <a:bodyPr/>
+                    <a:lstStyle/>
+                    <a:p>
+                      <a:pPr>
+                        <a:buNone/>
+                      </a:pPr>
+                      <a:r>
+                        <a:rPr lang="pt-BR" sz="1800">
+                          <a:effectLst/>
+                        </a:rPr>
+                        <a:t>RF-08</a:t>
+                      </a:r>
+                    </a:p>
+                  </a:txBody>
+                  <a:tcPr marL="86599" marR="86599" marT="39969" marB="39969" anchor="ctr"/>
+                </a:tc>
+                <a:tc>
+                  <a:txBody>
+                    <a:bodyPr/>
+                    <a:lstStyle/>
+                    <a:p>
+                      <a:pPr>
+                        <a:buNone/>
+                      </a:pPr>
+                      <a:r>
+                        <a:rPr lang="pt-BR" sz="1800" dirty="0">
+                          <a:effectLst/>
+                        </a:rPr>
+                        <a:t>O repositório deve conter README com instruções de execução e link para a documentação.</a:t>
+                      </a:r>
+                    </a:p>
+                  </a:txBody>
+                  <a:tcPr marL="86599" marR="86599" marT="39969" marB="39969" anchor="ctr"/>
+                </a:tc>
+                <a:extLst>
+                  <a:ext uri="{0D108BD9-81ED-4DB2-BD59-A6C34878D82A}">
+                    <a16:rowId xmlns:a16="http://schemas.microsoft.com/office/drawing/2014/main" val="1022464760"/>
+                  </a:ext>
+                </a:extLst>
+              </a:tr>
+            </a:tbl>
+          </a:graphicData>
+        </a:graphic>
+      </p:graphicFrame>
     </p:spTree>
     <p:extLst>
       <p:ext uri="{BB962C8B-B14F-4D97-AF65-F5344CB8AC3E}">
-        <p14:creationId xmlns:p14="http://schemas.microsoft.com/office/powerpoint/2010/main" val="1260139504"/>
+        <p14:creationId xmlns:p14="http://schemas.microsoft.com/office/powerpoint/2010/main" val="3467603405"/>
       </p:ext>
     </p:extLst>
   </p:cSld>
@@ -6383,7 +11849,13 @@
   <p:cSld>
     <p:spTree>
       <p:nvGrpSpPr>
-        <p:cNvPr id="1" name=""/>
+        <p:cNvPr id="1" name="">
+          <a:extLst>
+            <a:ext uri="{FF2B5EF4-FFF2-40B4-BE49-F238E27FC236}">
+              <a16:creationId xmlns:a16="http://schemas.microsoft.com/office/drawing/2014/main" id="{C10705B7-9FC0-BAFA-E9AF-DB602284347E}"/>
+            </a:ext>
+          </a:extLst>
+        </p:cNvPr>
         <p:cNvGrpSpPr/>
         <p:nvPr/>
       </p:nvGrpSpPr>
@@ -6397,10 +11869,10 @@
       </p:grpSpPr>
       <p:sp>
         <p:nvSpPr>
-          <p:cNvPr id="2" name="Espaço Reservado para Texto 1">
+          <p:cNvPr id="3" name="Espaço Reservado para Texto 2">
             <a:extLst>
               <a:ext uri="{FF2B5EF4-FFF2-40B4-BE49-F238E27FC236}">
-                <a16:creationId xmlns:a16="http://schemas.microsoft.com/office/drawing/2014/main" id="{B1C23B81-E62A-4DBE-B9A9-C4B80D49122D}"/>
+                <a16:creationId xmlns:a16="http://schemas.microsoft.com/office/drawing/2014/main" id="{B500D0EC-7FE2-3B78-48AB-D7C0C35F8F31}"/>
               </a:ext>
             </a:extLst>
           </p:cNvPr>
@@ -6416,14 +11888,414 @@
           <a:bodyPr/>
           <a:lstStyle/>
           <a:p>
-            <a:endParaRPr lang="pt-BR"/>
+            <a:r>
+              <a:rPr lang="pt-BR" b="1" dirty="0"/>
+              <a:t>3.1 Requisitos Não Funcionais</a:t>
+            </a:r>
+          </a:p>
+          <a:p>
+            <a:endParaRPr lang="pt-BR" dirty="0"/>
           </a:p>
         </p:txBody>
       </p:sp>
+      <p:graphicFrame>
+        <p:nvGraphicFramePr>
+          <p:cNvPr id="2" name="Tabela 1">
+            <a:extLst>
+              <a:ext uri="{FF2B5EF4-FFF2-40B4-BE49-F238E27FC236}">
+                <a16:creationId xmlns:a16="http://schemas.microsoft.com/office/drawing/2014/main" id="{783CB874-8121-25C7-D98C-EBAE98605753}"/>
+              </a:ext>
+            </a:extLst>
+          </p:cNvPr>
+          <p:cNvGraphicFramePr>
+            <a:graphicFrameLocks noGrp="1"/>
+          </p:cNvGraphicFramePr>
+          <p:nvPr>
+            <p:extLst>
+              <p:ext uri="{D42A27DB-BD31-4B8C-83A1-F6EECF244321}">
+                <p14:modId xmlns:p14="http://schemas.microsoft.com/office/powerpoint/2010/main" val="1953257324"/>
+              </p:ext>
+            </p:extLst>
+          </p:nvPr>
+        </p:nvGraphicFramePr>
+        <p:xfrm>
+          <a:off x="1745889" y="2555386"/>
+          <a:ext cx="12910272" cy="6092216"/>
+        </p:xfrm>
+        <a:graphic>
+          <a:graphicData uri="http://schemas.openxmlformats.org/drawingml/2006/table">
+            <a:tbl>
+              <a:tblPr>
+                <a:tableStyleId>{1FECB4D8-DB02-4DC6-A0A2-4F2EBAE1DC90}</a:tableStyleId>
+              </a:tblPr>
+              <a:tblGrid>
+                <a:gridCol w="6455136">
+                  <a:extLst>
+                    <a:ext uri="{9D8B030D-6E8A-4147-A177-3AD203B41FA5}">
+                      <a16:colId xmlns:a16="http://schemas.microsoft.com/office/drawing/2014/main" val="627299418"/>
+                    </a:ext>
+                  </a:extLst>
+                </a:gridCol>
+                <a:gridCol w="6455136">
+                  <a:extLst>
+                    <a:ext uri="{9D8B030D-6E8A-4147-A177-3AD203B41FA5}">
+                      <a16:colId xmlns:a16="http://schemas.microsoft.com/office/drawing/2014/main" val="3908032301"/>
+                    </a:ext>
+                  </a:extLst>
+                </a:gridCol>
+              </a:tblGrid>
+              <a:tr h="454757">
+                <a:tc>
+                  <a:txBody>
+                    <a:bodyPr/>
+                    <a:lstStyle/>
+                    <a:p>
+                      <a:pPr>
+                        <a:buNone/>
+                      </a:pPr>
+                      <a:r>
+                        <a:rPr lang="pt-BR" sz="2300" b="1">
+                          <a:effectLst/>
+                        </a:rPr>
+                        <a:t>ID</a:t>
+                      </a:r>
+                    </a:p>
+                  </a:txBody>
+                  <a:tcPr marL="112994" marR="112994" marT="52151" marB="52151" anchor="ctr"/>
+                </a:tc>
+                <a:tc>
+                  <a:txBody>
+                    <a:bodyPr/>
+                    <a:lstStyle/>
+                    <a:p>
+                      <a:pPr>
+                        <a:buNone/>
+                      </a:pPr>
+                      <a:r>
+                        <a:rPr lang="pt-BR" sz="2300" b="1">
+                          <a:effectLst/>
+                        </a:rPr>
+                        <a:t>Requisito Não Funcional</a:t>
+                      </a:r>
+                    </a:p>
+                  </a:txBody>
+                  <a:tcPr marL="112994" marR="112994" marT="52151" marB="52151" anchor="ctr"/>
+                </a:tc>
+                <a:extLst>
+                  <a:ext uri="{0D108BD9-81ED-4DB2-BD59-A6C34878D82A}">
+                    <a16:rowId xmlns:a16="http://schemas.microsoft.com/office/drawing/2014/main" val="884331631"/>
+                  </a:ext>
+                </a:extLst>
+              </a:tr>
+              <a:tr h="805212">
+                <a:tc>
+                  <a:txBody>
+                    <a:bodyPr/>
+                    <a:lstStyle/>
+                    <a:p>
+                      <a:pPr>
+                        <a:buNone/>
+                      </a:pPr>
+                      <a:r>
+                        <a:rPr lang="pt-BR" sz="2300">
+                          <a:effectLst/>
+                        </a:rPr>
+                        <a:t>RNF-01</a:t>
+                      </a:r>
+                    </a:p>
+                  </a:txBody>
+                  <a:tcPr marL="112994" marR="112994" marT="52151" marB="52151" anchor="ctr"/>
+                </a:tc>
+                <a:tc>
+                  <a:txBody>
+                    <a:bodyPr/>
+                    <a:lstStyle/>
+                    <a:p>
+                      <a:pPr>
+                        <a:buNone/>
+                      </a:pPr>
+                      <a:r>
+                        <a:rPr lang="pt-BR" sz="2300">
+                          <a:effectLst/>
+                        </a:rPr>
+                        <a:t>O pipeline de CI deve ser concluído em no máximo 10 minutos.</a:t>
+                      </a:r>
+                    </a:p>
+                  </a:txBody>
+                  <a:tcPr marL="112994" marR="112994" marT="52151" marB="52151" anchor="ctr"/>
+                </a:tc>
+                <a:extLst>
+                  <a:ext uri="{0D108BD9-81ED-4DB2-BD59-A6C34878D82A}">
+                    <a16:rowId xmlns:a16="http://schemas.microsoft.com/office/drawing/2014/main" val="3372694416"/>
+                  </a:ext>
+                </a:extLst>
+              </a:tr>
+              <a:tr h="805212">
+                <a:tc>
+                  <a:txBody>
+                    <a:bodyPr/>
+                    <a:lstStyle/>
+                    <a:p>
+                      <a:pPr>
+                        <a:buNone/>
+                      </a:pPr>
+                      <a:r>
+                        <a:rPr lang="pt-BR" sz="2300">
+                          <a:effectLst/>
+                        </a:rPr>
+                        <a:t>RNF-02</a:t>
+                      </a:r>
+                    </a:p>
+                  </a:txBody>
+                  <a:tcPr marL="112994" marR="112994" marT="52151" marB="52151" anchor="ctr"/>
+                </a:tc>
+                <a:tc>
+                  <a:txBody>
+                    <a:bodyPr/>
+                    <a:lstStyle/>
+                    <a:p>
+                      <a:pPr>
+                        <a:buNone/>
+                      </a:pPr>
+                      <a:r>
+                        <a:rPr lang="pt-BR" sz="2300">
+                          <a:effectLst/>
+                        </a:rPr>
+                        <a:t>O código deve seguir padrões de qualidade verificados por linter (ESLint / Flake8).</a:t>
+                      </a:r>
+                    </a:p>
+                  </a:txBody>
+                  <a:tcPr marL="112994" marR="112994" marT="52151" marB="52151" anchor="ctr"/>
+                </a:tc>
+                <a:extLst>
+                  <a:ext uri="{0D108BD9-81ED-4DB2-BD59-A6C34878D82A}">
+                    <a16:rowId xmlns:a16="http://schemas.microsoft.com/office/drawing/2014/main" val="1375908997"/>
+                  </a:ext>
+                </a:extLst>
+              </a:tr>
+              <a:tr h="805212">
+                <a:tc>
+                  <a:txBody>
+                    <a:bodyPr/>
+                    <a:lstStyle/>
+                    <a:p>
+                      <a:pPr>
+                        <a:buNone/>
+                      </a:pPr>
+                      <a:r>
+                        <a:rPr lang="pt-BR" sz="2300">
+                          <a:effectLst/>
+                        </a:rPr>
+                        <a:t>RNF-03</a:t>
+                      </a:r>
+                    </a:p>
+                  </a:txBody>
+                  <a:tcPr marL="112994" marR="112994" marT="52151" marB="52151" anchor="ctr"/>
+                </a:tc>
+                <a:tc>
+                  <a:txBody>
+                    <a:bodyPr/>
+                    <a:lstStyle/>
+                    <a:p>
+                      <a:pPr>
+                        <a:buNone/>
+                      </a:pPr>
+                      <a:r>
+                        <a:rPr lang="pt-BR" sz="2300">
+                          <a:effectLst/>
+                        </a:rPr>
+                        <a:t>A cobertura de testes unitários deve ser de no mínimo 60%.</a:t>
+                      </a:r>
+                    </a:p>
+                  </a:txBody>
+                  <a:tcPr marL="112994" marR="112994" marT="52151" marB="52151" anchor="ctr"/>
+                </a:tc>
+                <a:extLst>
+                  <a:ext uri="{0D108BD9-81ED-4DB2-BD59-A6C34878D82A}">
+                    <a16:rowId xmlns:a16="http://schemas.microsoft.com/office/drawing/2014/main" val="3159152787"/>
+                  </a:ext>
+                </a:extLst>
+              </a:tr>
+              <a:tr h="805212">
+                <a:tc>
+                  <a:txBody>
+                    <a:bodyPr/>
+                    <a:lstStyle/>
+                    <a:p>
+                      <a:pPr>
+                        <a:buNone/>
+                      </a:pPr>
+                      <a:r>
+                        <a:rPr lang="pt-BR" sz="2300">
+                          <a:effectLst/>
+                        </a:rPr>
+                        <a:t>RNF-04</a:t>
+                      </a:r>
+                    </a:p>
+                  </a:txBody>
+                  <a:tcPr marL="112994" marR="112994" marT="52151" marB="52151" anchor="ctr"/>
+                </a:tc>
+                <a:tc>
+                  <a:txBody>
+                    <a:bodyPr/>
+                    <a:lstStyle/>
+                    <a:p>
+                      <a:pPr>
+                        <a:buNone/>
+                      </a:pPr>
+                      <a:r>
+                        <a:rPr lang="pt-BR" sz="2300">
+                          <a:effectLst/>
+                        </a:rPr>
+                        <a:t>Os templates CloudFormation devem ser versionados junto ao código no repositório.</a:t>
+                      </a:r>
+                    </a:p>
+                  </a:txBody>
+                  <a:tcPr marL="112994" marR="112994" marT="52151" marB="52151" anchor="ctr"/>
+                </a:tc>
+                <a:extLst>
+                  <a:ext uri="{0D108BD9-81ED-4DB2-BD59-A6C34878D82A}">
+                    <a16:rowId xmlns:a16="http://schemas.microsoft.com/office/drawing/2014/main" val="2779291169"/>
+                  </a:ext>
+                </a:extLst>
+              </a:tr>
+              <a:tr h="805212">
+                <a:tc>
+                  <a:txBody>
+                    <a:bodyPr/>
+                    <a:lstStyle/>
+                    <a:p>
+                      <a:pPr>
+                        <a:buNone/>
+                      </a:pPr>
+                      <a:r>
+                        <a:rPr lang="pt-BR" sz="2300">
+                          <a:effectLst/>
+                        </a:rPr>
+                        <a:t>RNF-05</a:t>
+                      </a:r>
+                    </a:p>
+                  </a:txBody>
+                  <a:tcPr marL="112994" marR="112994" marT="52151" marB="52151" anchor="ctr"/>
+                </a:tc>
+                <a:tc>
+                  <a:txBody>
+                    <a:bodyPr/>
+                    <a:lstStyle/>
+                    <a:p>
+                      <a:pPr>
+                        <a:buNone/>
+                      </a:pPr>
+                      <a:r>
+                        <a:rPr lang="pt-BR" sz="2300">
+                          <a:effectLst/>
+                        </a:rPr>
+                        <a:t>As credenciais AWS nunca devem ser expostas no código; devem usar GitHub Secrets.</a:t>
+                      </a:r>
+                    </a:p>
+                  </a:txBody>
+                  <a:tcPr marL="112994" marR="112994" marT="52151" marB="52151" anchor="ctr"/>
+                </a:tc>
+                <a:extLst>
+                  <a:ext uri="{0D108BD9-81ED-4DB2-BD59-A6C34878D82A}">
+                    <a16:rowId xmlns:a16="http://schemas.microsoft.com/office/drawing/2014/main" val="3182353696"/>
+                  </a:ext>
+                </a:extLst>
+              </a:tr>
+              <a:tr h="805212">
+                <a:tc>
+                  <a:txBody>
+                    <a:bodyPr/>
+                    <a:lstStyle/>
+                    <a:p>
+                      <a:pPr>
+                        <a:buNone/>
+                      </a:pPr>
+                      <a:r>
+                        <a:rPr lang="pt-BR" sz="2300">
+                          <a:effectLst/>
+                        </a:rPr>
+                        <a:t>RNF-06</a:t>
+                      </a:r>
+                    </a:p>
+                  </a:txBody>
+                  <a:tcPr marL="112994" marR="112994" marT="52151" marB="52151" anchor="ctr"/>
+                </a:tc>
+                <a:tc>
+                  <a:txBody>
+                    <a:bodyPr/>
+                    <a:lstStyle/>
+                    <a:p>
+                      <a:pPr>
+                        <a:buNone/>
+                      </a:pPr>
+                      <a:r>
+                        <a:rPr lang="pt-BR" sz="2300">
+                          <a:effectLst/>
+                        </a:rPr>
+                        <a:t>O pipeline deve ser reproduzível: o mesmo commit deve gerar sempre o mesmo resultado.</a:t>
+                      </a:r>
+                    </a:p>
+                  </a:txBody>
+                  <a:tcPr marL="112994" marR="112994" marT="52151" marB="52151" anchor="ctr"/>
+                </a:tc>
+                <a:extLst>
+                  <a:ext uri="{0D108BD9-81ED-4DB2-BD59-A6C34878D82A}">
+                    <a16:rowId xmlns:a16="http://schemas.microsoft.com/office/drawing/2014/main" val="1371961995"/>
+                  </a:ext>
+                </a:extLst>
+              </a:tr>
+              <a:tr h="805212">
+                <a:tc>
+                  <a:txBody>
+                    <a:bodyPr/>
+                    <a:lstStyle/>
+                    <a:p>
+                      <a:pPr>
+                        <a:buNone/>
+                      </a:pPr>
+                      <a:r>
+                        <a:rPr lang="pt-BR" sz="2300">
+                          <a:effectLst/>
+                        </a:rPr>
+                        <a:t>RNF-07</a:t>
+                      </a:r>
+                    </a:p>
+                  </a:txBody>
+                  <a:tcPr marL="112994" marR="112994" marT="52151" marB="52151" anchor="ctr"/>
+                </a:tc>
+                <a:tc>
+                  <a:txBody>
+                    <a:bodyPr/>
+                    <a:lstStyle/>
+                    <a:p>
+                      <a:pPr>
+                        <a:buNone/>
+                      </a:pPr>
+                      <a:r>
+                        <a:rPr lang="pt-BR" sz="2300" dirty="0">
+                          <a:effectLst/>
+                        </a:rPr>
+                        <a:t>O repositório deve ser público e acessível para avaliação do professor.</a:t>
+                      </a:r>
+                    </a:p>
+                  </a:txBody>
+                  <a:tcPr marL="112994" marR="112994" marT="52151" marB="52151" anchor="ctr"/>
+                </a:tc>
+                <a:extLst>
+                  <a:ext uri="{0D108BD9-81ED-4DB2-BD59-A6C34878D82A}">
+                    <a16:rowId xmlns:a16="http://schemas.microsoft.com/office/drawing/2014/main" val="1964046820"/>
+                  </a:ext>
+                </a:extLst>
+              </a:tr>
+            </a:tbl>
+          </a:graphicData>
+        </a:graphic>
+      </p:graphicFrame>
     </p:spTree>
     <p:extLst>
       <p:ext uri="{BB962C8B-B14F-4D97-AF65-F5344CB8AC3E}">
-        <p14:creationId xmlns:p14="http://schemas.microsoft.com/office/powerpoint/2010/main" val="3670702398"/>
+        <p14:creationId xmlns:p14="http://schemas.microsoft.com/office/powerpoint/2010/main" val="1305872043"/>
       </p:ext>
     </p:extLst>
   </p:cSld>
@@ -7352,6 +13224,23 @@
 </file>
 
 <file path=customXml/item1.xml><?xml version="1.0" encoding="utf-8"?>
+<p:properties xmlns:p="http://schemas.microsoft.com/office/2006/metadata/properties" xmlns:xsi="http://www.w3.org/2001/XMLSchema-instance" xmlns:pc="http://schemas.microsoft.com/office/infopath/2007/PartnerControls">
+  <documentManagement>
+    <_activity xmlns="6439f31e-650a-4110-90ce-dedea4761958" xsi:nil="true"/>
+  </documentManagement>
+</p:properties>
+</file>
+
+<file path=customXml/item2.xml><?xml version="1.0" encoding="utf-8"?>
+<?mso-contentType ?>
+<FormTemplates xmlns="http://schemas.microsoft.com/sharepoint/v3/contenttype/forms">
+  <Display>DocumentLibraryForm</Display>
+  <Edit>DocumentLibraryForm</Edit>
+  <New>DocumentLibraryForm</New>
+</FormTemplates>
+</file>
+
+<file path=customXml/item3.xml><?xml version="1.0" encoding="utf-8"?>
 <ct:contentTypeSchema xmlns:ct="http://schemas.microsoft.com/office/2006/metadata/contentType" xmlns:ma="http://schemas.microsoft.com/office/2006/metadata/properties/metaAttributes" ct:_="" ma:_="" ma:contentTypeName="Documento" ma:contentTypeID="0x010100D0B80C79D672AC42A1970465DFBE826F" ma:contentTypeVersion="15" ma:contentTypeDescription="Crie um novo documento." ma:contentTypeScope="" ma:versionID="2eefaa1e6d6c44dc16da2b9d163c9050">
   <xsd:schema xmlns:xsd="http://www.w3.org/2001/XMLSchema" xmlns:xs="http://www.w3.org/2001/XMLSchema" xmlns:p="http://schemas.microsoft.com/office/2006/metadata/properties" xmlns:ns3="6439f31e-650a-4110-90ce-dedea4761958" xmlns:ns4="0c1d693f-504f-4903-8fa4-fc4240ce4f11" targetNamespace="http://schemas.microsoft.com/office/2006/metadata/properties" ma:root="true" ma:fieldsID="0d3e9c37c1323d55a0c2b9c866021e93" ns3:_="" ns4:_="">
     <xsd:import namespace="6439f31e-650a-4110-90ce-dedea4761958"/>
@@ -7584,24 +13473,32 @@
 </ct:contentTypeSchema>
 </file>
 
-<file path=customXml/item2.xml><?xml version="1.0" encoding="utf-8"?>
-<?mso-contentType ?>
-<FormTemplates xmlns="http://schemas.microsoft.com/sharepoint/v3/contenttype/forms">
-  <Display>DocumentLibraryForm</Display>
-  <Edit>DocumentLibraryForm</Edit>
-  <New>DocumentLibraryForm</New>
-</FormTemplates>
+<file path=customXml/itemProps1.xml><?xml version="1.0" encoding="utf-8"?>
+<ds:datastoreItem xmlns:ds="http://schemas.openxmlformats.org/officeDocument/2006/customXml" ds:itemID="{0C5DC577-20A1-4512-B4E1-28F0CC21B7A7}">
+  <ds:schemaRefs>
+    <ds:schemaRef ds:uri="6439f31e-650a-4110-90ce-dedea4761958"/>
+    <ds:schemaRef ds:uri="http://purl.org/dc/terms/"/>
+    <ds:schemaRef ds:uri="http://schemas.openxmlformats.org/package/2006/metadata/core-properties"/>
+    <ds:schemaRef ds:uri="http://purl.org/dc/dcmitype/"/>
+    <ds:schemaRef ds:uri="0c1d693f-504f-4903-8fa4-fc4240ce4f11"/>
+    <ds:schemaRef ds:uri="http://purl.org/dc/elements/1.1/"/>
+    <ds:schemaRef ds:uri="http://schemas.microsoft.com/office/2006/metadata/properties"/>
+    <ds:schemaRef ds:uri="http://schemas.microsoft.com/office/2006/documentManagement/types"/>
+    <ds:schemaRef ds:uri="http://schemas.microsoft.com/office/infopath/2007/PartnerControls"/>
+    <ds:schemaRef ds:uri="http://www.w3.org/XML/1998/namespace"/>
+  </ds:schemaRefs>
+</ds:datastoreItem>
 </file>
 
-<file path=customXml/item3.xml><?xml version="1.0" encoding="utf-8"?>
-<p:properties xmlns:p="http://schemas.microsoft.com/office/2006/metadata/properties" xmlns:xsi="http://www.w3.org/2001/XMLSchema-instance" xmlns:pc="http://schemas.microsoft.com/office/infopath/2007/PartnerControls">
-  <documentManagement>
-    <_activity xmlns="6439f31e-650a-4110-90ce-dedea4761958" xsi:nil="true"/>
-  </documentManagement>
-</p:properties>
+<file path=customXml/itemProps2.xml><?xml version="1.0" encoding="utf-8"?>
+<ds:datastoreItem xmlns:ds="http://schemas.openxmlformats.org/officeDocument/2006/customXml" ds:itemID="{F16D510D-55C7-43E2-BA4A-72786699A122}">
+  <ds:schemaRefs>
+    <ds:schemaRef ds:uri="http://schemas.microsoft.com/sharepoint/v3/contenttype/forms"/>
+  </ds:schemaRefs>
+</ds:datastoreItem>
 </file>
 
-<file path=customXml/itemProps1.xml><?xml version="1.0" encoding="utf-8"?>
+<file path=customXml/itemProps3.xml><?xml version="1.0" encoding="utf-8"?>
 <ds:datastoreItem xmlns:ds="http://schemas.openxmlformats.org/officeDocument/2006/customXml" ds:itemID="{D4840938-E05E-4C2F-BC8B-C9AED83822C2}">
   <ds:schemaRefs>
     <ds:schemaRef ds:uri="http://schemas.microsoft.com/office/2006/metadata/contentType"/>
@@ -7618,29 +13515,4 @@
     <ds:schemaRef ds:uri="http://schemas.microsoft.com/internal/obd"/>
   </ds:schemaRefs>
 </ds:datastoreItem>
-</file>
-
-<file path=customXml/itemProps2.xml><?xml version="1.0" encoding="utf-8"?>
-<ds:datastoreItem xmlns:ds="http://schemas.openxmlformats.org/officeDocument/2006/customXml" ds:itemID="{F16D510D-55C7-43E2-BA4A-72786699A122}">
-  <ds:schemaRefs>
-    <ds:schemaRef ds:uri="http://schemas.microsoft.com/sharepoint/v3/contenttype/forms"/>
-  </ds:schemaRefs>
-</ds:datastoreItem>
-</file>
-
-<file path=customXml/itemProps3.xml><?xml version="1.0" encoding="utf-8"?>
-<ds:datastoreItem xmlns:ds="http://schemas.openxmlformats.org/officeDocument/2006/customXml" ds:itemID="{0C5DC577-20A1-4512-B4E1-28F0CC21B7A7}">
-  <ds:schemaRefs>
-    <ds:schemaRef ds:uri="6439f31e-650a-4110-90ce-dedea4761958"/>
-    <ds:schemaRef ds:uri="http://purl.org/dc/terms/"/>
-    <ds:schemaRef ds:uri="http://schemas.openxmlformats.org/package/2006/metadata/core-properties"/>
-    <ds:schemaRef ds:uri="http://purl.org/dc/dcmitype/"/>
-    <ds:schemaRef ds:uri="0c1d693f-504f-4903-8fa4-fc4240ce4f11"/>
-    <ds:schemaRef ds:uri="http://purl.org/dc/elements/1.1/"/>
-    <ds:schemaRef ds:uri="http://schemas.microsoft.com/office/2006/metadata/properties"/>
-    <ds:schemaRef ds:uri="http://schemas.microsoft.com/office/2006/documentManagement/types"/>
-    <ds:schemaRef ds:uri="http://schemas.microsoft.com/office/infopath/2007/PartnerControls"/>
-    <ds:schemaRef ds:uri="http://www.w3.org/XML/1998/namespace"/>
-  </ds:schemaRefs>
-</ds:datastoreItem>
 </file>